--- a/ai-kwau-final.pptx
+++ b/ai-kwau-final.pptx
@@ -2009,7 +2009,7 @@
     <p:bg>
       <p:bgPr>
         <a:solidFill>
-          <a:srgbClr val="0B1520"/>
+          <a:srgbClr val="FFFFFF"/>
         </a:solidFill>
       </p:bgPr>
     </p:bg>
@@ -2054,15 +2054,13 @@
             <a:r>
               <a:rPr lang="en-US" sz="800" b="1" spc="300" kern="0" dirty="0">
                 <a:solidFill>
-                  <a:srgbClr val="FFFFFF">
-                    <a:alpha val="45000"/>
-                  </a:srgbClr>
+                  <a:srgbClr val="AAAAAA"/>
                 </a:solidFill>
                 <a:latin typeface="Calibri" pitchFamily="34" charset="0"/>
                 <a:ea typeface="Calibri" pitchFamily="34" charset="-122"/>
                 <a:cs typeface="Calibri" pitchFamily="34" charset="-120"/>
               </a:rPr>
-              <a:t>Technology &amp; Health</a:t>
+              <a:t>TECHNOLOGY &amp; HEALTH</a:t>
             </a:r>
             <a:endParaRPr lang="en-US" sz="800" dirty="0"/>
           </a:p>
@@ -2095,9 +2093,7 @@
             <a:r>
               <a:rPr lang="en-US" sz="1400" b="1" dirty="0">
                 <a:solidFill>
-                  <a:srgbClr val="FFFFFF">
-                    <a:alpha val="85000"/>
-                  </a:srgbClr>
+                  <a:srgbClr val="333333"/>
                 </a:solidFill>
                 <a:latin typeface="Georgia" pitchFamily="34" charset="0"/>
                 <a:ea typeface="Georgia" pitchFamily="34" charset="-122"/>
@@ -2136,8 +2132,8 @@
             <a:r>
               <a:rPr lang="en-US" sz="900" dirty="0">
                 <a:solidFill>
-                  <a:srgbClr val="CCCCCC">
-                    <a:alpha val="75000"/>
+                  <a:srgbClr val="666666">
+                    <a:alpha val="95000"/>
                   </a:srgbClr>
                 </a:solidFill>
                 <a:latin typeface="Georgia" pitchFamily="34" charset="0"/>
@@ -2177,8 +2173,8 @@
             <a:r>
               <a:rPr lang="en-US" sz="900" dirty="0">
                 <a:solidFill>
-                  <a:srgbClr val="CCCCCC">
-                    <a:alpha val="75000"/>
+                  <a:srgbClr val="666666">
+                    <a:alpha val="95000"/>
                   </a:srgbClr>
                 </a:solidFill>
                 <a:latin typeface="Georgia" pitchFamily="34" charset="0"/>
@@ -2218,15 +2214,15 @@
             <a:r>
               <a:rPr lang="en-US" sz="900" dirty="0">
                 <a:solidFill>
-                  <a:srgbClr val="CCCCCC">
-                    <a:alpha val="75000"/>
+                  <a:srgbClr val="666666">
+                    <a:alpha val="95000"/>
                   </a:srgbClr>
                 </a:solidFill>
                 <a:latin typeface="Georgia" pitchFamily="34" charset="0"/>
                 <a:ea typeface="Georgia" pitchFamily="34" charset="-122"/>
                 <a:cs typeface="Georgia" pitchFamily="34" charset="-120"/>
               </a:rPr>
-              <a:t>The platform's inference engine supports quantised language models as compact as 1.5 billion parameters, small enough to fit entirely within system memory while delivering sub-second summarisation latency. Early benchmarks show GPU-accelerated inference completing in 0.85 seconds.</a:t>
+              <a:t>The platform's inference engine supports quantised language models as compact as 1.5 billion parameters, small enough to fit entirely within system memory while delivering sub-second summarisation latency.</a:t>
             </a:r>
             <a:endParaRPr lang="en-US" sz="900" dirty="0"/>
           </a:p>
@@ -2240,18 +2236,18 @@
         </p:nvSpPr>
         <p:spPr>
           <a:xfrm>
-            <a:off x="-914400" y="-914400"/>
-            <a:ext cx="10972800" cy="6972300"/>
+            <a:off x="-457200" y="-457200"/>
+            <a:ext cx="10058400" cy="6057900"/>
           </a:xfrm>
           <a:prstGeom prst="ellipse">
             <a:avLst/>
           </a:prstGeom>
           <a:solidFill>
-            <a:srgbClr val="000000"/>
+            <a:srgbClr val="A0A0A0"/>
           </a:solidFill>
           <a:ln w="12700">
             <a:solidFill>
-              <a:srgbClr val="000000"/>
+              <a:srgbClr val="A0A0A0"/>
             </a:solidFill>
             <a:prstDash val="solid"/>
           </a:ln>
@@ -2265,18 +2261,18 @@
         </p:nvSpPr>
         <p:spPr>
           <a:xfrm>
-            <a:off x="2560320" y="914400"/>
-            <a:ext cx="4023360" cy="3200400"/>
+            <a:off x="2560320" y="822960"/>
+            <a:ext cx="4023360" cy="3474720"/>
           </a:xfrm>
           <a:prstGeom prst="ellipse">
             <a:avLst/>
           </a:prstGeom>
           <a:solidFill>
-            <a:srgbClr val="0B1520"/>
+            <a:srgbClr val="FFFFFF"/>
           </a:solidFill>
           <a:ln w="12700">
             <a:solidFill>
-              <a:srgbClr val="0B1520"/>
+              <a:srgbClr val="FFFFFF"/>
             </a:solidFill>
             <a:prstDash val="solid"/>
           </a:ln>
@@ -2290,20 +2286,20 @@
         </p:nvSpPr>
         <p:spPr>
           <a:xfrm>
-            <a:off x="1371600" y="182880"/>
-            <a:ext cx="6400800" cy="4754880"/>
+            <a:off x="1097280" y="91440"/>
+            <a:ext cx="6949440" cy="4937760"/>
           </a:xfrm>
           <a:prstGeom prst="ellipse">
             <a:avLst/>
           </a:prstGeom>
           <a:solidFill>
-            <a:srgbClr val="000000">
-              <a:alpha val="55000"/>
+            <a:srgbClr val="CCCCCC">
+              <a:alpha val="60000"/>
             </a:srgbClr>
           </a:solidFill>
           <a:ln w="12700">
             <a:solidFill>
-              <a:srgbClr val="000000"/>
+              <a:srgbClr val="CCCCCC"/>
             </a:solidFill>
             <a:prstDash val="solid"/>
           </a:ln>
@@ -2324,13 +2320,13 @@
             <a:avLst/>
           </a:prstGeom>
           <a:solidFill>
-            <a:srgbClr val="000000">
+            <a:srgbClr val="B0B0B0">
               <a:alpha val="90000"/>
             </a:srgbClr>
           </a:solidFill>
           <a:ln w="12700">
             <a:solidFill>
-              <a:srgbClr val="000000"/>
+              <a:srgbClr val="B0B0B0"/>
             </a:solidFill>
             <a:prstDash val="solid"/>
           </a:ln>
@@ -2351,13 +2347,13 @@
             <a:avLst/>
           </a:prstGeom>
           <a:solidFill>
-            <a:srgbClr val="000000">
+            <a:srgbClr val="B0B0B0">
               <a:alpha val="90000"/>
             </a:srgbClr>
           </a:solidFill>
           <a:ln w="12700">
             <a:solidFill>
-              <a:srgbClr val="000000"/>
+              <a:srgbClr val="B0B0B0"/>
             </a:solidFill>
             <a:prstDash val="solid"/>
           </a:ln>
@@ -2390,9 +2386,7 @@
             <a:r>
               <a:rPr lang="en-US" sz="700" b="1" spc="300" kern="0" dirty="0">
                 <a:solidFill>
-                  <a:srgbClr val="FFFFFF">
-                    <a:alpha val="20000"/>
-                  </a:srgbClr>
+                  <a:srgbClr val="888888"/>
                 </a:solidFill>
                 <a:latin typeface="Calibri" pitchFamily="34" charset="0"/>
                 <a:ea typeface="Calibri" pitchFamily="34" charset="-122"/>
@@ -2445,7 +2439,7 @@
         <p:spPr>
           <a:xfrm>
             <a:off x="3566160" y="237744"/>
-            <a:ext cx="2011680" cy="256032"/>
+            <a:ext cx="2286000" cy="256032"/>
           </a:xfrm>
           <a:prstGeom prst="roundRect">
             <a:avLst>
@@ -2473,7 +2467,7 @@
                 <a:ea typeface="Calibri" pitchFamily="34" charset="-122"/>
                 <a:cs typeface="Calibri" pitchFamily="34" charset="-120"/>
               </a:rPr>
-              <a:t>5 · FUTURE ROADMAP</a:t>
+              <a:t>3 · USER EXPERIENCE</a:t>
             </a:r>
             <a:endParaRPr lang="en-US" sz="900" dirty="0"/>
           </a:p>
@@ -2487,8 +2481,8 @@
         </p:nvSpPr>
         <p:spPr>
           <a:xfrm>
-            <a:off x="457200" y="566928"/>
-            <a:ext cx="8229600" cy="548640"/>
+            <a:off x="457200" y="548640"/>
+            <a:ext cx="8229600" cy="658368"/>
           </a:xfrm>
           <a:prstGeom prst="rect">
             <a:avLst/>
@@ -2504,7 +2498,7 @@
               <a:buNone/>
             </a:pPr>
             <a:r>
-              <a:rPr lang="en-US" sz="3200" b="1" dirty="0">
+              <a:rPr lang="en-US" sz="4000" b="1" dirty="0">
                 <a:solidFill>
                   <a:srgbClr val="0D1F3C"/>
                 </a:solidFill>
@@ -2512,9 +2506,9 @@
                 <a:ea typeface="Cambria" pitchFamily="34" charset="-122"/>
                 <a:cs typeface="Cambria" pitchFamily="34" charset="-120"/>
               </a:rPr>
-              <a:t>What Users Want Next</a:t>
-            </a:r>
-            <a:endParaRPr lang="en-US" sz="3200" dirty="0"/>
+              <a:t>Read Faster</a:t>
+            </a:r>
+            <a:endParaRPr lang="en-US" sz="4000" dirty="0"/>
           </a:p>
         </p:txBody>
       </p:sp>
@@ -2526,7 +2520,7 @@
         </p:nvSpPr>
         <p:spPr>
           <a:xfrm>
-            <a:off x="457200" y="1097280"/>
+            <a:off x="457200" y="1170432"/>
             <a:ext cx="8229600" cy="256032"/>
           </a:xfrm>
           <a:prstGeom prst="rect">
@@ -2551,448 +2545,28 @@
                 <a:ea typeface="Calibri" pitchFamily="34" charset="-122"/>
                 <a:cs typeface="Calibri" pitchFamily="34" charset="-120"/>
               </a:rPr>
-              <a:t>Wishlist from user testing — planned iterations beyond the PoC</a:t>
+              <a:t>Measured reading time across three conditions — same 1000-word article, same user</a:t>
             </a:r>
             <a:endParaRPr lang="en-US" sz="1100" dirty="0"/>
           </a:p>
         </p:txBody>
       </p:sp>
-      <p:sp>
-        <p:nvSpPr>
-          <p:cNvPr id="5" name="Shape 3"/>
-          <p:cNvSpPr/>
-          <p:nvPr/>
-        </p:nvSpPr>
-        <p:spPr>
-          <a:xfrm>
-            <a:off x="256032" y="1481328"/>
-            <a:ext cx="4187952" cy="1572768"/>
-          </a:xfrm>
-          <a:prstGeom prst="roundRect">
-            <a:avLst>
-              <a:gd name="adj" fmla="val 8140"/>
-            </a:avLst>
-          </a:prstGeom>
-          <a:solidFill>
-            <a:srgbClr val="F6AE2D">
-              <a:alpha val="10000"/>
-            </a:srgbClr>
-          </a:solidFill>
-          <a:ln w="12700">
-            <a:solidFill>
-              <a:srgbClr val="C9922A">
-                <a:alpha val="50000"/>
-              </a:srgbClr>
-            </a:solidFill>
-            <a:prstDash val="solid"/>
-          </a:ln>
-        </p:spPr>
-      </p:sp>
-      <p:sp>
-        <p:nvSpPr>
-          <p:cNvPr id="6" name="Text 4"/>
-          <p:cNvSpPr/>
-          <p:nvPr/>
-        </p:nvSpPr>
-        <p:spPr>
-          <a:xfrm>
-            <a:off x="438912" y="1645920"/>
-            <a:ext cx="3840480" cy="402336"/>
-          </a:xfrm>
-          <a:prstGeom prst="rect">
-            <a:avLst/>
-          </a:prstGeom>
-          <a:noFill/>
-          <a:ln/>
-        </p:spPr>
-        <p:txBody>
-          <a:bodyPr wrap="square" rtlCol="0" anchor="ctr"/>
-          <a:lstStyle/>
-          <a:p>
-            <a:pPr indent="0" marL="0">
-              <a:buNone/>
-            </a:pPr>
-            <a:r>
-              <a:rPr lang="en-US" sz="1600" b="1" dirty="0">
-                <a:solidFill>
-                  <a:srgbClr val="0D1F3C"/>
-                </a:solidFill>
-                <a:latin typeface="Cambria" pitchFamily="34" charset="0"/>
-                <a:ea typeface="Cambria" pitchFamily="34" charset="-122"/>
-                <a:cs typeface="Cambria" pitchFamily="34" charset="-120"/>
-              </a:rPr>
-              <a:t>Personalised Feature Profiles</a:t>
-            </a:r>
-            <a:endParaRPr lang="en-US" sz="1600" dirty="0"/>
-          </a:p>
-        </p:txBody>
-      </p:sp>
-      <p:sp>
-        <p:nvSpPr>
-          <p:cNvPr id="7" name="Text 5"/>
-          <p:cNvSpPr/>
-          <p:nvPr/>
-        </p:nvSpPr>
-        <p:spPr>
-          <a:xfrm>
-            <a:off x="438912" y="2066544"/>
-            <a:ext cx="3840480" cy="877824"/>
-          </a:xfrm>
-          <a:prstGeom prst="rect">
-            <a:avLst/>
-          </a:prstGeom>
-          <a:noFill/>
-          <a:ln/>
-        </p:spPr>
-        <p:txBody>
-          <a:bodyPr wrap="square" rtlCol="0" anchor="t"/>
-          <a:lstStyle/>
-          <a:p>
-            <a:pPr indent="0" marL="0">
-              <a:buNone/>
-            </a:pPr>
-            <a:r>
-              <a:rPr lang="en-US" sz="1100" dirty="0">
-                <a:solidFill>
-                  <a:srgbClr val="4A5568"/>
-                </a:solidFill>
-                <a:latin typeface="Calibri" pitchFamily="34" charset="0"/>
-                <a:ea typeface="Calibri" pitchFamily="34" charset="-122"/>
-                <a:cs typeface="Calibri" pitchFamily="34" charset="-120"/>
-              </a:rPr>
-              <a:t>Save each user's preferred toggle states — no re-configuration on every session</a:t>
-            </a:r>
-            <a:endParaRPr lang="en-US" sz="1100" dirty="0"/>
-          </a:p>
-        </p:txBody>
-      </p:sp>
-      <p:sp>
-        <p:nvSpPr>
-          <p:cNvPr id="8" name="Shape 6"/>
-          <p:cNvSpPr/>
-          <p:nvPr/>
-        </p:nvSpPr>
-        <p:spPr>
-          <a:xfrm>
-            <a:off x="4645152" y="1481328"/>
-            <a:ext cx="4187952" cy="1572768"/>
-          </a:xfrm>
-          <a:prstGeom prst="roundRect">
-            <a:avLst>
-              <a:gd name="adj" fmla="val 8140"/>
-            </a:avLst>
-          </a:prstGeom>
-          <a:solidFill>
-            <a:srgbClr val="F6AE2D">
-              <a:alpha val="10000"/>
-            </a:srgbClr>
-          </a:solidFill>
-          <a:ln w="12700">
-            <a:solidFill>
-              <a:srgbClr val="C9922A">
-                <a:alpha val="50000"/>
-              </a:srgbClr>
-            </a:solidFill>
-            <a:prstDash val="solid"/>
-          </a:ln>
-        </p:spPr>
-      </p:sp>
-      <p:sp>
-        <p:nvSpPr>
-          <p:cNvPr id="9" name="Text 7"/>
-          <p:cNvSpPr/>
-          <p:nvPr/>
-        </p:nvSpPr>
-        <p:spPr>
-          <a:xfrm>
-            <a:off x="4828032" y="1645920"/>
-            <a:ext cx="3840480" cy="402336"/>
-          </a:xfrm>
-          <a:prstGeom prst="rect">
-            <a:avLst/>
-          </a:prstGeom>
-          <a:noFill/>
-          <a:ln/>
-        </p:spPr>
-        <p:txBody>
-          <a:bodyPr wrap="square" rtlCol="0" anchor="ctr"/>
-          <a:lstStyle/>
-          <a:p>
-            <a:pPr indent="0" marL="0">
-              <a:buNone/>
-            </a:pPr>
-            <a:r>
-              <a:rPr lang="en-US" sz="1600" b="1" dirty="0">
-                <a:solidFill>
-                  <a:srgbClr val="0D1F3C"/>
-                </a:solidFill>
-                <a:latin typeface="Cambria" pitchFamily="34" charset="0"/>
-                <a:ea typeface="Cambria" pitchFamily="34" charset="-122"/>
-                <a:cs typeface="Cambria" pitchFamily="34" charset="-120"/>
-              </a:rPr>
-              <a:t>Model Selection</a:t>
-            </a:r>
-            <a:endParaRPr lang="en-US" sz="1600" dirty="0"/>
-          </a:p>
-        </p:txBody>
-      </p:sp>
-      <p:sp>
-        <p:nvSpPr>
-          <p:cNvPr id="10" name="Text 8"/>
-          <p:cNvSpPr/>
-          <p:nvPr/>
-        </p:nvSpPr>
-        <p:spPr>
-          <a:xfrm>
-            <a:off x="4828032" y="2066544"/>
-            <a:ext cx="3840480" cy="877824"/>
-          </a:xfrm>
-          <a:prstGeom prst="rect">
-            <a:avLst/>
-          </a:prstGeom>
-          <a:noFill/>
-          <a:ln/>
-        </p:spPr>
-        <p:txBody>
-          <a:bodyPr wrap="square" rtlCol="0" anchor="t"/>
-          <a:lstStyle/>
-          <a:p>
-            <a:pPr indent="0" marL="0">
-              <a:buNone/>
-            </a:pPr>
-            <a:r>
-              <a:rPr lang="en-US" sz="1100" dirty="0">
-                <a:solidFill>
-                  <a:srgbClr val="4A5568"/>
-                </a:solidFill>
-                <a:latin typeface="Calibri" pitchFamily="34" charset="0"/>
-                <a:ea typeface="Calibri" pitchFamily="34" charset="-122"/>
-                <a:cs typeface="Calibri" pitchFamily="34" charset="-120"/>
-              </a:rPr>
-              <a:t>Switch between models by language or task — larger for accuracy, smaller for speed</a:t>
-            </a:r>
-            <a:endParaRPr lang="en-US" sz="1100" dirty="0"/>
-          </a:p>
-        </p:txBody>
-      </p:sp>
-      <p:sp>
-        <p:nvSpPr>
-          <p:cNvPr id="11" name="Shape 9"/>
-          <p:cNvSpPr/>
-          <p:nvPr/>
-        </p:nvSpPr>
-        <p:spPr>
-          <a:xfrm>
-            <a:off x="256032" y="3218688"/>
-            <a:ext cx="4187952" cy="1572768"/>
-          </a:xfrm>
-          <a:prstGeom prst="roundRect">
-            <a:avLst>
-              <a:gd name="adj" fmla="val 8140"/>
-            </a:avLst>
-          </a:prstGeom>
-          <a:solidFill>
-            <a:srgbClr val="F6AE2D">
-              <a:alpha val="10000"/>
-            </a:srgbClr>
-          </a:solidFill>
-          <a:ln w="12700">
-            <a:solidFill>
-              <a:srgbClr val="C9922A">
-                <a:alpha val="50000"/>
-              </a:srgbClr>
-            </a:solidFill>
-            <a:prstDash val="solid"/>
-          </a:ln>
-        </p:spPr>
-      </p:sp>
-      <p:sp>
-        <p:nvSpPr>
-          <p:cNvPr id="12" name="Text 10"/>
-          <p:cNvSpPr/>
-          <p:nvPr/>
-        </p:nvSpPr>
-        <p:spPr>
-          <a:xfrm>
-            <a:off x="438912" y="3383280"/>
-            <a:ext cx="3840480" cy="402336"/>
-          </a:xfrm>
-          <a:prstGeom prst="rect">
-            <a:avLst/>
-          </a:prstGeom>
-          <a:noFill/>
-          <a:ln/>
-        </p:spPr>
-        <p:txBody>
-          <a:bodyPr wrap="square" rtlCol="0" anchor="ctr"/>
-          <a:lstStyle/>
-          <a:p>
-            <a:pPr indent="0" marL="0">
-              <a:buNone/>
-            </a:pPr>
-            <a:r>
-              <a:rPr lang="en-US" sz="1600" b="1" dirty="0">
-                <a:solidFill>
-                  <a:srgbClr val="0D1F3C"/>
-                </a:solidFill>
-                <a:latin typeface="Cambria" pitchFamily="34" charset="0"/>
-                <a:ea typeface="Cambria" pitchFamily="34" charset="-122"/>
-                <a:cs typeface="Cambria" pitchFamily="34" charset="-120"/>
-              </a:rPr>
-              <a:t>Translation &amp; Knowledge Extension</a:t>
-            </a:r>
-            <a:endParaRPr lang="en-US" sz="1600" dirty="0"/>
-          </a:p>
-        </p:txBody>
-      </p:sp>
-      <p:sp>
-        <p:nvSpPr>
-          <p:cNvPr id="13" name="Text 11"/>
-          <p:cNvSpPr/>
-          <p:nvPr/>
-        </p:nvSpPr>
-        <p:spPr>
-          <a:xfrm>
-            <a:off x="438912" y="3803904"/>
-            <a:ext cx="3840480" cy="877824"/>
-          </a:xfrm>
-          <a:prstGeom prst="rect">
-            <a:avLst/>
-          </a:prstGeom>
-          <a:noFill/>
-          <a:ln/>
-        </p:spPr>
-        <p:txBody>
-          <a:bodyPr wrap="square" rtlCol="0" anchor="t"/>
-          <a:lstStyle/>
-          <a:p>
-            <a:pPr indent="0" marL="0">
-              <a:buNone/>
-            </a:pPr>
-            <a:r>
-              <a:rPr lang="en-US" sz="1100" dirty="0">
-                <a:solidFill>
-                  <a:srgbClr val="4A5568"/>
-                </a:solidFill>
-                <a:latin typeface="Calibri" pitchFamily="34" charset="0"/>
-                <a:ea typeface="Calibri" pitchFamily="34" charset="-122"/>
-                <a:cs typeface="Calibri" pitchFamily="34" charset="-120"/>
-              </a:rPr>
-              <a:t>In-page translation and contextual information lookup without leaving the article</a:t>
-            </a:r>
-            <a:endParaRPr lang="en-US" sz="1100" dirty="0"/>
-          </a:p>
-        </p:txBody>
-      </p:sp>
-      <p:sp>
-        <p:nvSpPr>
-          <p:cNvPr id="14" name="Shape 12"/>
-          <p:cNvSpPr/>
-          <p:nvPr/>
-        </p:nvSpPr>
-        <p:spPr>
-          <a:xfrm>
-            <a:off x="4645152" y="3218688"/>
-            <a:ext cx="4187952" cy="1572768"/>
-          </a:xfrm>
-          <a:prstGeom prst="roundRect">
-            <a:avLst>
-              <a:gd name="adj" fmla="val 8140"/>
-            </a:avLst>
-          </a:prstGeom>
-          <a:solidFill>
-            <a:srgbClr val="F6AE2D">
-              <a:alpha val="10000"/>
-            </a:srgbClr>
-          </a:solidFill>
-          <a:ln w="12700">
-            <a:solidFill>
-              <a:srgbClr val="C9922A">
-                <a:alpha val="50000"/>
-              </a:srgbClr>
-            </a:solidFill>
-            <a:prstDash val="solid"/>
-          </a:ln>
-        </p:spPr>
-      </p:sp>
-      <p:sp>
-        <p:nvSpPr>
-          <p:cNvPr id="15" name="Text 13"/>
-          <p:cNvSpPr/>
-          <p:nvPr/>
-        </p:nvSpPr>
-        <p:spPr>
-          <a:xfrm>
-            <a:off x="4828032" y="3383280"/>
-            <a:ext cx="3840480" cy="402336"/>
-          </a:xfrm>
-          <a:prstGeom prst="rect">
-            <a:avLst/>
-          </a:prstGeom>
-          <a:noFill/>
-          <a:ln/>
-        </p:spPr>
-        <p:txBody>
-          <a:bodyPr wrap="square" rtlCol="0" anchor="ctr"/>
-          <a:lstStyle/>
-          <a:p>
-            <a:pPr indent="0" marL="0">
-              <a:buNone/>
-            </a:pPr>
-            <a:r>
-              <a:rPr lang="en-US" sz="1600" b="1" dirty="0">
-                <a:solidFill>
-                  <a:srgbClr val="0D1F3C"/>
-                </a:solidFill>
-                <a:latin typeface="Cambria" pitchFamily="34" charset="0"/>
-                <a:ea typeface="Cambria" pitchFamily="34" charset="-122"/>
-                <a:cs typeface="Cambria" pitchFamily="34" charset="-120"/>
-              </a:rPr>
-              <a:t>Hardware-Accelerated Gaze</a:t>
-            </a:r>
-            <a:endParaRPr lang="en-US" sz="1600" dirty="0"/>
-          </a:p>
-        </p:txBody>
-      </p:sp>
-      <p:sp>
-        <p:nvSpPr>
-          <p:cNvPr id="16" name="Text 14"/>
-          <p:cNvSpPr/>
-          <p:nvPr/>
-        </p:nvSpPr>
-        <p:spPr>
-          <a:xfrm>
-            <a:off x="4828032" y="3803904"/>
-            <a:ext cx="3840480" cy="877824"/>
-          </a:xfrm>
-          <a:prstGeom prst="rect">
-            <a:avLst/>
-          </a:prstGeom>
-          <a:noFill/>
-          <a:ln/>
-        </p:spPr>
-        <p:txBody>
-          <a:bodyPr wrap="square" rtlCol="0" anchor="t"/>
-          <a:lstStyle/>
-          <a:p>
-            <a:pPr indent="0" marL="0">
-              <a:buNone/>
-            </a:pPr>
-            <a:r>
-              <a:rPr lang="en-US" sz="1100" dirty="0">
-                <a:solidFill>
-                  <a:srgbClr val="4A5568"/>
-                </a:solidFill>
-                <a:latin typeface="Calibri" pitchFamily="34" charset="0"/>
-                <a:ea typeface="Calibri" pitchFamily="34" charset="-122"/>
-                <a:cs typeface="Calibri" pitchFamily="34" charset="-120"/>
-              </a:rPr>
-              <a:t>On-chip gaze processing — only (x,y) coordinates reach the app, no raw video exposure</a:t>
-            </a:r>
-            <a:endParaRPr lang="en-US" sz="1100" dirty="0"/>
-          </a:p>
-        </p:txBody>
-      </p:sp>
+      <p:graphicFrame>
+        <p:nvGraphicFramePr>
+          <p:cNvPr id="5" name="Chart 0" descr=""/>
+          <p:cNvGraphicFramePr/>
+          <p:nvPr/>
+        </p:nvGraphicFramePr>
+        <p:xfrm>
+          <a:off x="640080" y="1508760"/>
+          <a:ext cx="7863840" cy="3310128"/>
+        </p:xfrm>
+        <a:graphic xmlns:a="http://schemas.openxmlformats.org/drawingml/2006/main">
+          <a:graphicData uri="http://schemas.openxmlformats.org/drawingml/2006/chart">
+            <c:chart xmlns:c="http://schemas.openxmlformats.org/drawingml/2006/chart" r:id="rId1"/>
+          </a:graphicData>
+        </a:graphic>
+      </p:graphicFrame>
     </p:spTree>
   </p:cSld>
   <p:clrMapOvr>
@@ -3004,13 +2578,6 @@
 <file path=ppt/slides/slide11.xml><?xml version="1.0" encoding="utf-8"?>
 <p:sld xmlns:a="http://schemas.openxmlformats.org/drawingml/2006/main" xmlns:r="http://schemas.openxmlformats.org/officeDocument/2006/relationships" xmlns:p="http://schemas.openxmlformats.org/presentationml/2006/main">
   <p:cSld name="Slide 11">
-    <p:bg>
-      <p:bgPr>
-        <a:solidFill>
-          <a:srgbClr val="EEF5FF"/>
-        </a:solidFill>
-      </p:bgPr>
-    </p:bg>
     <p:spTree>
       <p:nvGrpSpPr>
         <p:cNvPr id="1" name=""/>
@@ -3027,14 +2594,39 @@
       </p:grpSpPr>
       <p:sp>
         <p:nvSpPr>
-          <p:cNvPr id="2" name="Text 0"/>
-          <p:cNvSpPr/>
-          <p:nvPr/>
-        </p:nvSpPr>
-        <p:spPr>
-          <a:xfrm>
-            <a:off x="3383280" y="201168"/>
-            <a:ext cx="2011680" cy="256032"/>
+          <p:cNvPr id="2" name="Shape 0"/>
+          <p:cNvSpPr/>
+          <p:nvPr/>
+        </p:nvSpPr>
+        <p:spPr>
+          <a:xfrm>
+            <a:off x="0" y="0"/>
+            <a:ext cx="9144000" cy="1298448"/>
+          </a:xfrm>
+          <a:prstGeom prst="rect">
+            <a:avLst/>
+          </a:prstGeom>
+          <a:solidFill>
+            <a:srgbClr val="0D1F3C"/>
+          </a:solidFill>
+          <a:ln w="12700">
+            <a:solidFill>
+              <a:srgbClr val="0D1F3C"/>
+            </a:solidFill>
+            <a:prstDash val="solid"/>
+          </a:ln>
+        </p:spPr>
+      </p:sp>
+      <p:sp>
+        <p:nvSpPr>
+          <p:cNvPr id="3" name="Text 1"/>
+          <p:cNvSpPr/>
+          <p:nvPr/>
+        </p:nvSpPr>
+        <p:spPr>
+          <a:xfrm>
+            <a:off x="219456" y="219456"/>
+            <a:ext cx="2743200" cy="256032"/>
           </a:xfrm>
           <a:prstGeom prst="roundRect">
             <a:avLst>
@@ -3042,7 +2634,7 @@
             </a:avLst>
           </a:prstGeom>
           <a:solidFill>
-            <a:srgbClr val="00B4D8"/>
+            <a:srgbClr val="F6AE2D"/>
           </a:solidFill>
           <a:ln/>
         </p:spPr>
@@ -3062,7 +2654,7 @@
                 <a:ea typeface="Calibri" pitchFamily="34" charset="-122"/>
                 <a:cs typeface="Calibri" pitchFamily="34" charset="-120"/>
               </a:rPr>
-              <a:t>6 · POST-LAUNCH VALIDATION</a:t>
+              <a:t>4 · VALUE &amp; IMPACT / CURB-CUT</a:t>
             </a:r>
             <a:endParaRPr lang="en-US" sz="900" dirty="0"/>
           </a:p>
@@ -3070,79 +2662,40 @@
       </p:sp>
       <p:sp>
         <p:nvSpPr>
-          <p:cNvPr id="3" name="Text 1"/>
-          <p:cNvSpPr/>
-          <p:nvPr/>
-        </p:nvSpPr>
-        <p:spPr>
-          <a:xfrm>
-            <a:off x="457200" y="530352"/>
-            <a:ext cx="8229600" cy="530352"/>
-          </a:xfrm>
-          <a:prstGeom prst="rect">
-            <a:avLst/>
-          </a:prstGeom>
-          <a:noFill/>
-          <a:ln/>
-        </p:spPr>
-        <p:txBody>
-          <a:bodyPr wrap="square" rtlCol="0" anchor="ctr"/>
-          <a:lstStyle/>
-          <a:p>
-            <a:pPr algn="ctr" indent="0" marL="0">
-              <a:buNone/>
-            </a:pPr>
-            <a:r>
-              <a:rPr lang="en-US" sz="3000" b="1" dirty="0">
-                <a:solidFill>
-                  <a:srgbClr val="0D1F3C"/>
+          <p:cNvPr id="4" name="Text 2"/>
+          <p:cNvSpPr/>
+          <p:nvPr/>
+        </p:nvSpPr>
+        <p:spPr>
+          <a:xfrm>
+            <a:off x="219456" y="548640"/>
+            <a:ext cx="8686800" cy="512064"/>
+          </a:xfrm>
+          <a:prstGeom prst="rect">
+            <a:avLst/>
+          </a:prstGeom>
+          <a:noFill/>
+          <a:ln/>
+        </p:spPr>
+        <p:txBody>
+          <a:bodyPr wrap="square" rtlCol="0" anchor="ctr"/>
+          <a:lstStyle/>
+          <a:p>
+            <a:pPr indent="0" marL="0">
+              <a:buNone/>
+            </a:pPr>
+            <a:r>
+              <a:rPr lang="en-US" sz="2200" b="1" dirty="0">
+                <a:solidFill>
+                  <a:srgbClr val="FFFFFF"/>
                 </a:solidFill>
                 <a:latin typeface="Cambria" pitchFamily="34" charset="0"/>
                 <a:ea typeface="Cambria" pitchFamily="34" charset="-122"/>
                 <a:cs typeface="Cambria" pitchFamily="34" charset="-120"/>
               </a:rPr>
-              <a:t>Proving Real-World Impact</a:t>
-            </a:r>
-            <a:endParaRPr lang="en-US" sz="3000" dirty="0"/>
-          </a:p>
-        </p:txBody>
-      </p:sp>
-      <p:sp>
-        <p:nvSpPr>
-          <p:cNvPr id="4" name="Text 2"/>
-          <p:cNvSpPr/>
-          <p:nvPr/>
-        </p:nvSpPr>
-        <p:spPr>
-          <a:xfrm>
-            <a:off x="457200" y="1042416"/>
-            <a:ext cx="8229600" cy="256032"/>
-          </a:xfrm>
-          <a:prstGeom prst="rect">
-            <a:avLst/>
-          </a:prstGeom>
-          <a:noFill/>
-          <a:ln/>
-        </p:spPr>
-        <p:txBody>
-          <a:bodyPr wrap="square" rtlCol="0" anchor="ctr"/>
-          <a:lstStyle/>
-          <a:p>
-            <a:pPr algn="ctr" indent="0" marL="0">
-              <a:buNone/>
-            </a:pPr>
-            <a:r>
-              <a:rPr lang="en-US" sz="1000" dirty="0">
-                <a:solidFill>
-                  <a:srgbClr val="4A5568"/>
-                </a:solidFill>
-                <a:latin typeface="Calibri" pitchFamily="34" charset="0"/>
-                <a:ea typeface="Calibri" pitchFamily="34" charset="-122"/>
-                <a:cs typeface="Calibri" pitchFamily="34" charset="-120"/>
-              </a:rPr>
-              <a:t>How we confirm the solution works after official HP shipment — measurable, time-bound, independent</a:t>
-            </a:r>
-            <a:endParaRPr lang="en-US" sz="1000" dirty="0"/>
+              <a:t>Curb-Cut Effect — From 20% to Everyday Users</a:t>
+            </a:r>
+            <a:endParaRPr lang="en-US" sz="2200" dirty="0"/>
           </a:p>
         </p:txBody>
       </p:sp>
@@ -3154,20 +2707,20 @@
         </p:nvSpPr>
         <p:spPr>
           <a:xfrm>
-            <a:off x="256032" y="1408176"/>
-            <a:ext cx="4187952" cy="1664208"/>
+            <a:off x="182880" y="1481328"/>
+            <a:ext cx="2103120" cy="1463040"/>
           </a:xfrm>
           <a:prstGeom prst="roundRect">
             <a:avLst>
-              <a:gd name="adj" fmla="val 7692"/>
+              <a:gd name="adj" fmla="val 9375"/>
             </a:avLst>
           </a:prstGeom>
           <a:solidFill>
-            <a:srgbClr val="FFFFFF"/>
-          </a:solidFill>
-          <a:ln w="25400">
+            <a:srgbClr val="F4F6FA"/>
+          </a:solidFill>
+          <a:ln w="12700">
             <a:solidFill>
-              <a:srgbClr val="00B4D8"/>
+              <a:srgbClr val="F4F6FA"/>
             </a:solidFill>
             <a:prstDash val="solid"/>
           </a:ln>
@@ -3181,8 +2734,8 @@
         </p:nvSpPr>
         <p:spPr>
           <a:xfrm>
-            <a:off x="256032" y="1408176"/>
-            <a:ext cx="54864" cy="1664208"/>
+            <a:off x="182880" y="1481328"/>
+            <a:ext cx="2103120" cy="45720"/>
           </a:xfrm>
           <a:prstGeom prst="rect">
             <a:avLst/>
@@ -3206,8 +2759,8 @@
         </p:nvSpPr>
         <p:spPr>
           <a:xfrm>
-            <a:off x="438912" y="1499616"/>
-            <a:ext cx="3840480" cy="201168"/>
+            <a:off x="320040" y="1600200"/>
+            <a:ext cx="1828800" cy="1188720"/>
           </a:xfrm>
           <a:prstGeom prst="rect">
             <a:avLst/>
@@ -3223,46 +2776,7 @@
               <a:buNone/>
             </a:pPr>
             <a:r>
-              <a:rPr lang="en-US" sz="750" b="1" spc="120" kern="0" dirty="0">
-                <a:solidFill>
-                  <a:srgbClr val="00B4D8"/>
-                </a:solidFill>
-                <a:latin typeface="Calibri" pitchFamily="34" charset="0"/>
-                <a:ea typeface="Calibri" pitchFamily="34" charset="-122"/>
-                <a:cs typeface="Calibri" pitchFamily="34" charset="-120"/>
-              </a:rPr>
-              <a:t>MONTH 1–6 · ADOPTION STUDY</a:t>
-            </a:r>
-            <a:endParaRPr lang="en-US" sz="750" dirty="0"/>
-          </a:p>
-        </p:txBody>
-      </p:sp>
-      <p:sp>
-        <p:nvSpPr>
-          <p:cNvPr id="8" name="Text 6"/>
-          <p:cNvSpPr/>
-          <p:nvPr/>
-        </p:nvSpPr>
-        <p:spPr>
-          <a:xfrm>
-            <a:off x="438912" y="1719072"/>
-            <a:ext cx="3840480" cy="384048"/>
-          </a:xfrm>
-          <a:prstGeom prst="rect">
-            <a:avLst/>
-          </a:prstGeom>
-          <a:noFill/>
-          <a:ln/>
-        </p:spPr>
-        <p:txBody>
-          <a:bodyPr wrap="square" rtlCol="0" anchor="ctr"/>
-          <a:lstStyle/>
-          <a:p>
-            <a:pPr indent="0" marL="0">
-              <a:buNone/>
-            </a:pPr>
-            <a:r>
-              <a:rPr lang="en-US" sz="1600" b="1" dirty="0">
+              <a:rPr lang="en-US" sz="1500" b="1" dirty="0">
                 <a:solidFill>
                   <a:srgbClr val="0D1F3C"/>
                 </a:solidFill>
@@ -3270,73 +2784,34 @@
                 <a:ea typeface="Cambria" pitchFamily="34" charset="-122"/>
                 <a:cs typeface="Cambria" pitchFamily="34" charset="-120"/>
               </a:rPr>
-              <a:t>Usage Retention</a:t>
-            </a:r>
-            <a:endParaRPr lang="en-US" sz="1600" dirty="0"/>
-          </a:p>
-        </p:txBody>
-      </p:sp>
-      <p:sp>
-        <p:nvSpPr>
-          <p:cNvPr id="9" name="Text 7"/>
-          <p:cNvSpPr/>
-          <p:nvPr/>
-        </p:nvSpPr>
-        <p:spPr>
-          <a:xfrm>
-            <a:off x="438912" y="2103120"/>
-            <a:ext cx="3840480" cy="896112"/>
-          </a:xfrm>
-          <a:prstGeom prst="rect">
-            <a:avLst/>
-          </a:prstGeom>
-          <a:noFill/>
-          <a:ln/>
-        </p:spPr>
-        <p:txBody>
-          <a:bodyPr wrap="square" rtlCol="0" anchor="t"/>
-          <a:lstStyle/>
-          <a:p>
-            <a:pPr indent="0" marL="0">
-              <a:buNone/>
-            </a:pPr>
-            <a:r>
-              <a:rPr lang="en-US" sz="1000" dirty="0">
-                <a:solidFill>
-                  <a:srgbClr val="4A5568"/>
-                </a:solidFill>
-                <a:latin typeface="Calibri" pitchFamily="34" charset="0"/>
-                <a:ea typeface="Calibri" pitchFamily="34" charset="-122"/>
-                <a:cs typeface="Calibri" pitchFamily="34" charset="-120"/>
-              </a:rPr>
-              <a:t>Track weekly active use among registered users — target &gt;65% WAU at 6 months, compared to current 41% baseline for opt-in accessibility tools</a:t>
-            </a:r>
-            <a:endParaRPr lang="en-US" sz="1000" dirty="0"/>
-          </a:p>
-        </p:txBody>
-      </p:sp>
-      <p:sp>
-        <p:nvSpPr>
-          <p:cNvPr id="10" name="Shape 8"/>
-          <p:cNvSpPr/>
-          <p:nvPr/>
-        </p:nvSpPr>
-        <p:spPr>
-          <a:xfrm>
-            <a:off x="4645152" y="1408176"/>
-            <a:ext cx="4187952" cy="1664208"/>
+              <a:t>Screen Glare &amp; Reflections</a:t>
+            </a:r>
+            <a:endParaRPr lang="en-US" sz="1500" dirty="0"/>
+          </a:p>
+        </p:txBody>
+      </p:sp>
+      <p:sp>
+        <p:nvSpPr>
+          <p:cNvPr id="8" name="Shape 6"/>
+          <p:cNvSpPr/>
+          <p:nvPr/>
+        </p:nvSpPr>
+        <p:spPr>
+          <a:xfrm>
+            <a:off x="2395728" y="1481328"/>
+            <a:ext cx="2103120" cy="1463040"/>
           </a:xfrm>
           <a:prstGeom prst="roundRect">
             <a:avLst>
-              <a:gd name="adj" fmla="val 7692"/>
+              <a:gd name="adj" fmla="val 9375"/>
             </a:avLst>
           </a:prstGeom>
           <a:solidFill>
-            <a:srgbClr val="FFFFFF"/>
-          </a:solidFill>
-          <a:ln w="25400">
+            <a:srgbClr val="F4F6FA"/>
+          </a:solidFill>
+          <a:ln w="12700">
             <a:solidFill>
-              <a:srgbClr val="06D6A0"/>
+              <a:srgbClr val="F4F6FA"/>
             </a:solidFill>
             <a:prstDash val="solid"/>
           </a:ln>
@@ -3344,24 +2819,24 @@
       </p:sp>
       <p:sp>
         <p:nvSpPr>
-          <p:cNvPr id="11" name="Shape 9"/>
-          <p:cNvSpPr/>
-          <p:nvPr/>
-        </p:nvSpPr>
-        <p:spPr>
-          <a:xfrm>
-            <a:off x="4645152" y="1408176"/>
-            <a:ext cx="54864" cy="1664208"/>
-          </a:xfrm>
-          <a:prstGeom prst="rect">
-            <a:avLst/>
-          </a:prstGeom>
-          <a:solidFill>
-            <a:srgbClr val="06D6A0"/>
+          <p:cNvPr id="9" name="Shape 7"/>
+          <p:cNvSpPr/>
+          <p:nvPr/>
+        </p:nvSpPr>
+        <p:spPr>
+          <a:xfrm>
+            <a:off x="2395728" y="1481328"/>
+            <a:ext cx="2103120" cy="45720"/>
+          </a:xfrm>
+          <a:prstGeom prst="rect">
+            <a:avLst/>
+          </a:prstGeom>
+          <a:solidFill>
+            <a:srgbClr val="00B4D8"/>
           </a:solidFill>
           <a:ln w="12700">
             <a:solidFill>
-              <a:srgbClr val="06D6A0"/>
+              <a:srgbClr val="00B4D8"/>
             </a:solidFill>
             <a:prstDash val="solid"/>
           </a:ln>
@@ -3369,14 +2844,14 @@
       </p:sp>
       <p:sp>
         <p:nvSpPr>
-          <p:cNvPr id="12" name="Text 10"/>
-          <p:cNvSpPr/>
-          <p:nvPr/>
-        </p:nvSpPr>
-        <p:spPr>
-          <a:xfrm>
-            <a:off x="4828032" y="1499616"/>
-            <a:ext cx="3840480" cy="201168"/>
+          <p:cNvPr id="10" name="Text 8"/>
+          <p:cNvSpPr/>
+          <p:nvPr/>
+        </p:nvSpPr>
+        <p:spPr>
+          <a:xfrm>
+            <a:off x="2532888" y="1600200"/>
+            <a:ext cx="1828800" cy="1188720"/>
           </a:xfrm>
           <a:prstGeom prst="rect">
             <a:avLst/>
@@ -3392,46 +2867,7 @@
               <a:buNone/>
             </a:pPr>
             <a:r>
-              <a:rPr lang="en-US" sz="750" b="1" spc="120" kern="0" dirty="0">
-                <a:solidFill>
-                  <a:srgbClr val="06D6A0"/>
-                </a:solidFill>
-                <a:latin typeface="Calibri" pitchFamily="34" charset="0"/>
-                <a:ea typeface="Calibri" pitchFamily="34" charset="-122"/>
-                <a:cs typeface="Calibri" pitchFamily="34" charset="-120"/>
-              </a:rPr>
-              <a:t>MONTH 3 · CONTROLLED STUDY</a:t>
-            </a:r>
-            <a:endParaRPr lang="en-US" sz="750" dirty="0"/>
-          </a:p>
-        </p:txBody>
-      </p:sp>
-      <p:sp>
-        <p:nvSpPr>
-          <p:cNvPr id="13" name="Text 11"/>
-          <p:cNvSpPr/>
-          <p:nvPr/>
-        </p:nvSpPr>
-        <p:spPr>
-          <a:xfrm>
-            <a:off x="4828032" y="1719072"/>
-            <a:ext cx="3840480" cy="384048"/>
-          </a:xfrm>
-          <a:prstGeom prst="rect">
-            <a:avLst/>
-          </a:prstGeom>
-          <a:noFill/>
-          <a:ln/>
-        </p:spPr>
-        <p:txBody>
-          <a:bodyPr wrap="square" rtlCol="0" anchor="ctr"/>
-          <a:lstStyle/>
-          <a:p>
-            <a:pPr indent="0" marL="0">
-              <a:buNone/>
-            </a:pPr>
-            <a:r>
-              <a:rPr lang="en-US" sz="1600" b="1" dirty="0">
+              <a:rPr lang="en-US" sz="1500" b="1" dirty="0">
                 <a:solidFill>
                   <a:srgbClr val="0D1F3C"/>
                 </a:solidFill>
@@ -3439,73 +2875,34 @@
                 <a:ea typeface="Cambria" pitchFamily="34" charset="-122"/>
                 <a:cs typeface="Cambria" pitchFamily="34" charset="-120"/>
               </a:rPr>
-              <a:t>Reading Speed Benchmark</a:t>
-            </a:r>
-            <a:endParaRPr lang="en-US" sz="1600" dirty="0"/>
-          </a:p>
-        </p:txBody>
-      </p:sp>
-      <p:sp>
-        <p:nvSpPr>
-          <p:cNvPr id="14" name="Text 12"/>
-          <p:cNvSpPr/>
-          <p:nvPr/>
-        </p:nvSpPr>
-        <p:spPr>
-          <a:xfrm>
-            <a:off x="4828032" y="2103120"/>
-            <a:ext cx="3840480" cy="896112"/>
-          </a:xfrm>
-          <a:prstGeom prst="rect">
-            <a:avLst/>
-          </a:prstGeom>
-          <a:noFill/>
-          <a:ln/>
-        </p:spPr>
-        <p:txBody>
-          <a:bodyPr wrap="square" rtlCol="0" anchor="t"/>
-          <a:lstStyle/>
-          <a:p>
-            <a:pPr indent="0" marL="0">
-              <a:buNone/>
-            </a:pPr>
-            <a:r>
-              <a:rPr lang="en-US" sz="1000" dirty="0">
-                <a:solidFill>
-                  <a:srgbClr val="4A5568"/>
-                </a:solidFill>
-                <a:latin typeface="Calibri" pitchFamily="34" charset="0"/>
-                <a:ea typeface="Calibri" pitchFamily="34" charset="-122"/>
-                <a:cs typeface="Calibri" pitchFamily="34" charset="-120"/>
-              </a:rPr>
-              <a:t>Repeat the 3-condition reading test with n=50 users (vision-impaired &amp; general) — target: replicate ≥50% time improvement with AI Summary enabled</a:t>
-            </a:r>
-            <a:endParaRPr lang="en-US" sz="1000" dirty="0"/>
-          </a:p>
-        </p:txBody>
-      </p:sp>
-      <p:sp>
-        <p:nvSpPr>
-          <p:cNvPr id="15" name="Shape 13"/>
-          <p:cNvSpPr/>
-          <p:nvPr/>
-        </p:nvSpPr>
-        <p:spPr>
-          <a:xfrm>
-            <a:off x="256032" y="3218688"/>
-            <a:ext cx="4187952" cy="1664208"/>
+              <a:t>Outdoor Bright Sunlight</a:t>
+            </a:r>
+            <a:endParaRPr lang="en-US" sz="1500" dirty="0"/>
+          </a:p>
+        </p:txBody>
+      </p:sp>
+      <p:sp>
+        <p:nvSpPr>
+          <p:cNvPr id="11" name="Shape 9"/>
+          <p:cNvSpPr/>
+          <p:nvPr/>
+        </p:nvSpPr>
+        <p:spPr>
+          <a:xfrm>
+            <a:off x="4608576" y="1481328"/>
+            <a:ext cx="2103120" cy="1463040"/>
           </a:xfrm>
           <a:prstGeom prst="roundRect">
             <a:avLst>
-              <a:gd name="adj" fmla="val 7692"/>
+              <a:gd name="adj" fmla="val 9375"/>
             </a:avLst>
           </a:prstGeom>
           <a:solidFill>
-            <a:srgbClr val="FFFFFF"/>
-          </a:solidFill>
-          <a:ln w="25400">
+            <a:srgbClr val="F4F6FA"/>
+          </a:solidFill>
+          <a:ln w="12700">
             <a:solidFill>
-              <a:srgbClr val="F6AE2D"/>
+              <a:srgbClr val="F4F6FA"/>
             </a:solidFill>
             <a:prstDash val="solid"/>
           </a:ln>
@@ -3513,14 +2910,105 @@
       </p:sp>
       <p:sp>
         <p:nvSpPr>
-          <p:cNvPr id="16" name="Shape 14"/>
-          <p:cNvSpPr/>
-          <p:nvPr/>
-        </p:nvSpPr>
-        <p:spPr>
-          <a:xfrm>
-            <a:off x="256032" y="3218688"/>
-            <a:ext cx="54864" cy="1664208"/>
+          <p:cNvPr id="12" name="Shape 10"/>
+          <p:cNvSpPr/>
+          <p:nvPr/>
+        </p:nvSpPr>
+        <p:spPr>
+          <a:xfrm>
+            <a:off x="4608576" y="1481328"/>
+            <a:ext cx="2103120" cy="45720"/>
+          </a:xfrm>
+          <a:prstGeom prst="rect">
+            <a:avLst/>
+          </a:prstGeom>
+          <a:solidFill>
+            <a:srgbClr val="00B4D8"/>
+          </a:solidFill>
+          <a:ln w="12700">
+            <a:solidFill>
+              <a:srgbClr val="00B4D8"/>
+            </a:solidFill>
+            <a:prstDash val="solid"/>
+          </a:ln>
+        </p:spPr>
+      </p:sp>
+      <p:sp>
+        <p:nvSpPr>
+          <p:cNvPr id="13" name="Text 11"/>
+          <p:cNvSpPr/>
+          <p:nvPr/>
+        </p:nvSpPr>
+        <p:spPr>
+          <a:xfrm>
+            <a:off x="4745736" y="1600200"/>
+            <a:ext cx="1828800" cy="1188720"/>
+          </a:xfrm>
+          <a:prstGeom prst="rect">
+            <a:avLst/>
+          </a:prstGeom>
+          <a:noFill/>
+          <a:ln/>
+        </p:spPr>
+        <p:txBody>
+          <a:bodyPr wrap="square" rtlCol="0" anchor="ctr"/>
+          <a:lstStyle/>
+          <a:p>
+            <a:pPr indent="0" marL="0">
+              <a:buNone/>
+            </a:pPr>
+            <a:r>
+              <a:rPr lang="en-US" sz="1500" b="1" dirty="0">
+                <a:solidFill>
+                  <a:srgbClr val="0D1F3C"/>
+                </a:solidFill>
+                <a:latin typeface="Cambria" pitchFamily="34" charset="0"/>
+                <a:ea typeface="Cambria" pitchFamily="34" charset="-122"/>
+                <a:cs typeface="Cambria" pitchFamily="34" charset="-120"/>
+              </a:rPr>
+              <a:t>Eye Strain from Long Screen Time</a:t>
+            </a:r>
+            <a:endParaRPr lang="en-US" sz="1500" dirty="0"/>
+          </a:p>
+        </p:txBody>
+      </p:sp>
+      <p:sp>
+        <p:nvSpPr>
+          <p:cNvPr id="14" name="Shape 12"/>
+          <p:cNvSpPr/>
+          <p:nvPr/>
+        </p:nvSpPr>
+        <p:spPr>
+          <a:xfrm>
+            <a:off x="6821424" y="1481328"/>
+            <a:ext cx="2103120" cy="1463040"/>
+          </a:xfrm>
+          <a:prstGeom prst="roundRect">
+            <a:avLst>
+              <a:gd name="adj" fmla="val 9375"/>
+            </a:avLst>
+          </a:prstGeom>
+          <a:solidFill>
+            <a:srgbClr val="F4F6FA"/>
+          </a:solidFill>
+          <a:ln w="12700">
+            <a:solidFill>
+              <a:srgbClr val="F4F6FA"/>
+            </a:solidFill>
+            <a:prstDash val="solid"/>
+          </a:ln>
+        </p:spPr>
+      </p:sp>
+      <p:sp>
+        <p:nvSpPr>
+          <p:cNvPr id="15" name="Shape 13"/>
+          <p:cNvSpPr/>
+          <p:nvPr/>
+        </p:nvSpPr>
+        <p:spPr>
+          <a:xfrm>
+            <a:off x="6821424" y="1481328"/>
+            <a:ext cx="2103120" cy="45720"/>
           </a:xfrm>
           <a:prstGeom prst="rect">
             <a:avLst/>
@@ -3538,14 +3026,14 @@
       </p:sp>
       <p:sp>
         <p:nvSpPr>
-          <p:cNvPr id="17" name="Text 15"/>
-          <p:cNvSpPr/>
-          <p:nvPr/>
-        </p:nvSpPr>
-        <p:spPr>
-          <a:xfrm>
-            <a:off x="438912" y="3310128"/>
-            <a:ext cx="3840480" cy="201168"/>
+          <p:cNvPr id="16" name="Text 14"/>
+          <p:cNvSpPr/>
+          <p:nvPr/>
+        </p:nvSpPr>
+        <p:spPr>
+          <a:xfrm>
+            <a:off x="6958584" y="1600200"/>
+            <a:ext cx="1828800" cy="1188720"/>
           </a:xfrm>
           <a:prstGeom prst="rect">
             <a:avLst/>
@@ -3561,46 +3049,7 @@
               <a:buNone/>
             </a:pPr>
             <a:r>
-              <a:rPr lang="en-US" sz="750" b="1" spc="120" kern="0" dirty="0">
-                <a:solidFill>
-                  <a:srgbClr val="F6AE2D"/>
-                </a:solidFill>
-                <a:latin typeface="Calibri" pitchFamily="34" charset="0"/>
-                <a:ea typeface="Calibri" pitchFamily="34" charset="-122"/>
-                <a:cs typeface="Calibri" pitchFamily="34" charset="-120"/>
-              </a:rPr>
-              <a:t>MONTH 6 · CLINICAL PARTNERSHIP</a:t>
-            </a:r>
-            <a:endParaRPr lang="en-US" sz="750" dirty="0"/>
-          </a:p>
-        </p:txBody>
-      </p:sp>
-      <p:sp>
-        <p:nvSpPr>
-          <p:cNvPr id="18" name="Text 16"/>
-          <p:cNvSpPr/>
-          <p:nvPr/>
-        </p:nvSpPr>
-        <p:spPr>
-          <a:xfrm>
-            <a:off x="438912" y="3529584"/>
-            <a:ext cx="3840480" cy="384048"/>
-          </a:xfrm>
-          <a:prstGeom prst="rect">
-            <a:avLst/>
-          </a:prstGeom>
-          <a:noFill/>
-          <a:ln/>
-        </p:spPr>
-        <p:txBody>
-          <a:bodyPr wrap="square" rtlCol="0" anchor="ctr"/>
-          <a:lstStyle/>
-          <a:p>
-            <a:pPr indent="0" marL="0">
-              <a:buNone/>
-            </a:pPr>
-            <a:r>
-              <a:rPr lang="en-US" sz="1600" b="1" dirty="0">
+              <a:rPr lang="en-US" sz="1500" b="1" dirty="0">
                 <a:solidFill>
                   <a:srgbClr val="0D1F3C"/>
                 </a:solidFill>
@@ -3608,217 +3057,9 @@
                 <a:ea typeface="Cambria" pitchFamily="34" charset="-122"/>
                 <a:cs typeface="Cambria" pitchFamily="34" charset="-120"/>
               </a:rPr>
-              <a:t>Accessibility Assessment</a:t>
-            </a:r>
-            <a:endParaRPr lang="en-US" sz="1600" dirty="0"/>
-          </a:p>
-        </p:txBody>
-      </p:sp>
-      <p:sp>
-        <p:nvSpPr>
-          <p:cNvPr id="19" name="Text 17"/>
-          <p:cNvSpPr/>
-          <p:nvPr/>
-        </p:nvSpPr>
-        <p:spPr>
-          <a:xfrm>
-            <a:off x="438912" y="3913632"/>
-            <a:ext cx="3840480" cy="896112"/>
-          </a:xfrm>
-          <a:prstGeom prst="rect">
-            <a:avLst/>
-          </a:prstGeom>
-          <a:noFill/>
-          <a:ln/>
-        </p:spPr>
-        <p:txBody>
-          <a:bodyPr wrap="square" rtlCol="0" anchor="t"/>
-          <a:lstStyle/>
-          <a:p>
-            <a:pPr indent="0" marL="0">
-              <a:buNone/>
-            </a:pPr>
-            <a:r>
-              <a:rPr lang="en-US" sz="1000" dirty="0">
-                <a:solidFill>
-                  <a:srgbClr val="4A5568"/>
-                </a:solidFill>
-                <a:latin typeface="Calibri" pitchFamily="34" charset="0"/>
-                <a:ea typeface="Calibri" pitchFamily="34" charset="-122"/>
-                <a:cs typeface="Calibri" pitchFamily="34" charset="-120"/>
-              </a:rPr>
-              <a:t>Co-study with ophthalmology clinic — SUS usability score from n=20 glaucoma patients, target SUS ≥75 (Good), plus self-reported eye strain NPS</a:t>
-            </a:r>
-            <a:endParaRPr lang="en-US" sz="1000" dirty="0"/>
-          </a:p>
-        </p:txBody>
-      </p:sp>
-      <p:sp>
-        <p:nvSpPr>
-          <p:cNvPr id="20" name="Shape 18"/>
-          <p:cNvSpPr/>
-          <p:nvPr/>
-        </p:nvSpPr>
-        <p:spPr>
-          <a:xfrm>
-            <a:off x="4645152" y="3218688"/>
-            <a:ext cx="4187952" cy="1664208"/>
-          </a:xfrm>
-          <a:prstGeom prst="roundRect">
-            <a:avLst>
-              <a:gd name="adj" fmla="val 7692"/>
-            </a:avLst>
-          </a:prstGeom>
-          <a:solidFill>
-            <a:srgbClr val="FFFFFF"/>
-          </a:solidFill>
-          <a:ln w="25400">
-            <a:solidFill>
-              <a:srgbClr val="0077B6"/>
-            </a:solidFill>
-            <a:prstDash val="solid"/>
-          </a:ln>
-        </p:spPr>
-      </p:sp>
-      <p:sp>
-        <p:nvSpPr>
-          <p:cNvPr id="21" name="Shape 19"/>
-          <p:cNvSpPr/>
-          <p:nvPr/>
-        </p:nvSpPr>
-        <p:spPr>
-          <a:xfrm>
-            <a:off x="4645152" y="3218688"/>
-            <a:ext cx="54864" cy="1664208"/>
-          </a:xfrm>
-          <a:prstGeom prst="rect">
-            <a:avLst/>
-          </a:prstGeom>
-          <a:solidFill>
-            <a:srgbClr val="0077B6"/>
-          </a:solidFill>
-          <a:ln w="12700">
-            <a:solidFill>
-              <a:srgbClr val="0077B6"/>
-            </a:solidFill>
-            <a:prstDash val="solid"/>
-          </a:ln>
-        </p:spPr>
-      </p:sp>
-      <p:sp>
-        <p:nvSpPr>
-          <p:cNvPr id="22" name="Text 20"/>
-          <p:cNvSpPr/>
-          <p:nvPr/>
-        </p:nvSpPr>
-        <p:spPr>
-          <a:xfrm>
-            <a:off x="4828032" y="3310128"/>
-            <a:ext cx="3840480" cy="201168"/>
-          </a:xfrm>
-          <a:prstGeom prst="rect">
-            <a:avLst/>
-          </a:prstGeom>
-          <a:noFill/>
-          <a:ln/>
-        </p:spPr>
-        <p:txBody>
-          <a:bodyPr wrap="square" rtlCol="0" anchor="ctr"/>
-          <a:lstStyle/>
-          <a:p>
-            <a:pPr indent="0" marL="0">
-              <a:buNone/>
-            </a:pPr>
-            <a:r>
-              <a:rPr lang="en-US" sz="750" b="1" spc="120" kern="0" dirty="0">
-                <a:solidFill>
-                  <a:srgbClr val="0077B6"/>
-                </a:solidFill>
-                <a:latin typeface="Calibri" pitchFamily="34" charset="0"/>
-                <a:ea typeface="Calibri" pitchFamily="34" charset="-122"/>
-                <a:cs typeface="Calibri" pitchFamily="34" charset="-120"/>
-              </a:rPr>
-              <a:t>ONGOING · OEM TELEMETRY</a:t>
-            </a:r>
-            <a:endParaRPr lang="en-US" sz="750" dirty="0"/>
-          </a:p>
-        </p:txBody>
-      </p:sp>
-      <p:sp>
-        <p:nvSpPr>
-          <p:cNvPr id="23" name="Text 21"/>
-          <p:cNvSpPr/>
-          <p:nvPr/>
-        </p:nvSpPr>
-        <p:spPr>
-          <a:xfrm>
-            <a:off x="4828032" y="3529584"/>
-            <a:ext cx="3840480" cy="384048"/>
-          </a:xfrm>
-          <a:prstGeom prst="rect">
-            <a:avLst/>
-          </a:prstGeom>
-          <a:noFill/>
-          <a:ln/>
-        </p:spPr>
-        <p:txBody>
-          <a:bodyPr wrap="square" rtlCol="0" anchor="ctr"/>
-          <a:lstStyle/>
-          <a:p>
-            <a:pPr indent="0" marL="0">
-              <a:buNone/>
-            </a:pPr>
-            <a:r>
-              <a:rPr lang="en-US" sz="1600" b="1" dirty="0">
-                <a:solidFill>
-                  <a:srgbClr val="0D1F3C"/>
-                </a:solidFill>
-                <a:latin typeface="Cambria" pitchFamily="34" charset="0"/>
-                <a:ea typeface="Cambria" pitchFamily="34" charset="-122"/>
-                <a:cs typeface="Cambria" pitchFamily="34" charset="-120"/>
-              </a:rPr>
-              <a:t>Feature Usage Signal</a:t>
-            </a:r>
-            <a:endParaRPr lang="en-US" sz="1600" dirty="0"/>
-          </a:p>
-        </p:txBody>
-      </p:sp>
-      <p:sp>
-        <p:nvSpPr>
-          <p:cNvPr id="24" name="Text 22"/>
-          <p:cNvSpPr/>
-          <p:nvPr/>
-        </p:nvSpPr>
-        <p:spPr>
-          <a:xfrm>
-            <a:off x="4828032" y="3913632"/>
-            <a:ext cx="3840480" cy="896112"/>
-          </a:xfrm>
-          <a:prstGeom prst="rect">
-            <a:avLst/>
-          </a:prstGeom>
-          <a:noFill/>
-          <a:ln/>
-        </p:spPr>
-        <p:txBody>
-          <a:bodyPr wrap="square" rtlCol="0" anchor="t"/>
-          <a:lstStyle/>
-          <a:p>
-            <a:pPr indent="0" marL="0">
-              <a:buNone/>
-            </a:pPr>
-            <a:r>
-              <a:rPr lang="en-US" sz="1000" dirty="0">
-                <a:solidFill>
-                  <a:srgbClr val="4A5568"/>
-                </a:solidFill>
-                <a:latin typeface="Calibri" pitchFamily="34" charset="0"/>
-                <a:ea typeface="Calibri" pitchFamily="34" charset="-122"/>
-                <a:cs typeface="Calibri" pitchFamily="34" charset="-120"/>
-              </a:rPr>
-              <a:t>Opt-in anonymised telemetry via HP Privacy Dashboard — identify which features drive retention vs. churn, informing the next hardware generation spec</a:t>
-            </a:r>
-            <a:endParaRPr lang="en-US" sz="1000" dirty="0"/>
+              <a:t>Busy Readers &amp; Skimmers</a:t>
+            </a:r>
+            <a:endParaRPr lang="en-US" sz="1500" dirty="0"/>
           </a:p>
         </p:txBody>
       </p:sp>
@@ -4350,47 +3591,6 @@
           </a:ln>
         </p:spPr>
       </p:sp>
-      <p:sp>
-        <p:nvSpPr>
-          <p:cNvPr id="16" name="Text 14"/>
-          <p:cNvSpPr/>
-          <p:nvPr/>
-        </p:nvSpPr>
-        <p:spPr>
-          <a:xfrm>
-            <a:off x="5029200" y="4663440"/>
-            <a:ext cx="4114800" cy="274320"/>
-          </a:xfrm>
-          <a:prstGeom prst="rect">
-            <a:avLst/>
-          </a:prstGeom>
-          <a:noFill/>
-          <a:ln/>
-        </p:spPr>
-        <p:txBody>
-          <a:bodyPr wrap="square" rtlCol="0" anchor="ctr"/>
-          <a:lstStyle/>
-          <a:p>
-            <a:pPr algn="ctr" indent="0" marL="0">
-              <a:buNone/>
-            </a:pPr>
-            <a:r>
-              <a:rPr lang="en-US" sz="800" spc="200" kern="0" dirty="0">
-                <a:solidFill>
-                  <a:srgbClr val="FFFFFF">
-                    <a:alpha val="40000"/>
-                  </a:srgbClr>
-                </a:solidFill>
-                <a:latin typeface="Calibri" pitchFamily="34" charset="0"/>
-                <a:ea typeface="Calibri" pitchFamily="34" charset="-122"/>
-                <a:cs typeface="Calibri" pitchFamily="34" charset="-120"/>
-              </a:rPr>
-              <a:t>On-Device · No Cloud · Privacy-First</a:t>
-            </a:r>
-            <a:endParaRPr lang="en-US" sz="800" dirty="0"/>
-          </a:p>
-        </p:txBody>
-      </p:sp>
     </p:spTree>
   </p:cSld>
   <p:clrMapOvr>
@@ -4450,7 +3650,7 @@
         <p:spPr>
           <a:xfrm>
             <a:off x="164592" y="347472"/>
-            <a:ext cx="2011680" cy="256032"/>
+            <a:ext cx="2286000" cy="256032"/>
           </a:xfrm>
           <a:prstGeom prst="roundRect">
             <a:avLst>
@@ -4564,84 +3764,14 @@
       </p:sp>
       <p:sp>
         <p:nvSpPr>
-          <p:cNvPr id="6" name="Shape 4"/>
-          <p:cNvSpPr/>
-          <p:nvPr/>
-        </p:nvSpPr>
-        <p:spPr>
-          <a:xfrm>
-            <a:off x="164592" y="1627632"/>
-            <a:ext cx="2962656" cy="896112"/>
-          </a:xfrm>
-          <a:prstGeom prst="roundRect">
-            <a:avLst>
-              <a:gd name="adj" fmla="val 15306"/>
-            </a:avLst>
-          </a:prstGeom>
-          <a:solidFill>
-            <a:srgbClr val="00B4D8">
-              <a:alpha val="12000"/>
-            </a:srgbClr>
-          </a:solidFill>
-          <a:ln w="12700">
-            <a:solidFill>
-              <a:srgbClr val="00B4D8">
-                <a:alpha val="60000"/>
-              </a:srgbClr>
-            </a:solidFill>
-            <a:prstDash val="solid"/>
-          </a:ln>
-        </p:spPr>
-      </p:sp>
-      <p:sp>
-        <p:nvSpPr>
-          <p:cNvPr id="7" name="Text 5"/>
-          <p:cNvSpPr/>
-          <p:nvPr/>
-        </p:nvSpPr>
-        <p:spPr>
-          <a:xfrm>
-            <a:off x="237744" y="1673352"/>
-            <a:ext cx="2834640" cy="548640"/>
-          </a:xfrm>
-          <a:prstGeom prst="rect">
-            <a:avLst/>
-          </a:prstGeom>
-          <a:noFill/>
-          <a:ln/>
-        </p:spPr>
-        <p:txBody>
-          <a:bodyPr wrap="square" rtlCol="0" anchor="ctr"/>
-          <a:lstStyle/>
-          <a:p>
-            <a:pPr algn="l" indent="0" marL="0">
-              <a:buNone/>
-            </a:pPr>
-            <a:r>
-              <a:rPr lang="en-US" sz="4400" b="1" dirty="0">
-                <a:solidFill>
-                  <a:srgbClr val="00B4D8"/>
-                </a:solidFill>
-                <a:latin typeface="Cambria" pitchFamily="34" charset="0"/>
-                <a:ea typeface="Cambria" pitchFamily="34" charset="-122"/>
-                <a:cs typeface="Cambria" pitchFamily="34" charset="-120"/>
-              </a:rPr>
-              <a:t>59%</a:t>
-            </a:r>
-            <a:endParaRPr lang="en-US" sz="4400" dirty="0"/>
-          </a:p>
-        </p:txBody>
-      </p:sp>
-      <p:sp>
-        <p:nvSpPr>
-          <p:cNvPr id="8" name="Text 6"/>
-          <p:cNvSpPr/>
-          <p:nvPr/>
-        </p:nvSpPr>
-        <p:spPr>
-          <a:xfrm>
-            <a:off x="237744" y="2212848"/>
-            <a:ext cx="2834640" cy="274320"/>
+          <p:cNvPr id="6" name="Text 4"/>
+          <p:cNvSpPr/>
+          <p:nvPr/>
+        </p:nvSpPr>
+        <p:spPr>
+          <a:xfrm>
+            <a:off x="164592" y="4892040"/>
+            <a:ext cx="2962656" cy="182880"/>
           </a:xfrm>
           <a:prstGeom prst="rect">
             <a:avLst/>
@@ -4657,61 +3787,30 @@
               <a:buNone/>
             </a:pPr>
             <a:r>
-              <a:rPr lang="en-US" sz="1100" dirty="0">
-                <a:solidFill>
-                  <a:srgbClr val="DDDDDD"/>
+              <a:rPr lang="en-US" sz="800" dirty="0">
+                <a:solidFill>
+                  <a:srgbClr val="666666"/>
                 </a:solidFill>
                 <a:latin typeface="Calibri" pitchFamily="34" charset="0"/>
                 <a:ea typeface="Calibri" pitchFamily="34" charset="-122"/>
                 <a:cs typeface="Calibri" pitchFamily="34" charset="-120"/>
               </a:rPr>
-              <a:t>never adopted an assistive tool</a:t>
-            </a:r>
-            <a:endParaRPr lang="en-US" sz="1100" dirty="0"/>
-          </a:p>
-        </p:txBody>
-      </p:sp>
-      <p:sp>
-        <p:nvSpPr>
-          <p:cNvPr id="9" name="Shape 7"/>
-          <p:cNvSpPr/>
-          <p:nvPr/>
-        </p:nvSpPr>
-        <p:spPr>
-          <a:xfrm>
-            <a:off x="164592" y="2633472"/>
-            <a:ext cx="2962656" cy="896112"/>
-          </a:xfrm>
-          <a:prstGeom prst="roundRect">
-            <a:avLst>
-              <a:gd name="adj" fmla="val 12245"/>
-            </a:avLst>
-          </a:prstGeom>
-          <a:solidFill>
-            <a:srgbClr val="E74C3C">
-              <a:alpha val="7000"/>
-            </a:srgbClr>
-          </a:solidFill>
-          <a:ln w="12700">
-            <a:solidFill>
-              <a:srgbClr val="E74C3C">
-                <a:alpha val="45000"/>
-              </a:srgbClr>
-            </a:solidFill>
-            <a:prstDash val="solid"/>
-          </a:ln>
-        </p:spPr>
-      </p:sp>
-      <p:sp>
-        <p:nvSpPr>
-          <p:cNvPr id="10" name="Text 8"/>
-          <p:cNvSpPr/>
-          <p:nvPr/>
-        </p:nvSpPr>
-        <p:spPr>
-          <a:xfrm>
-            <a:off x="237744" y="2679192"/>
-            <a:ext cx="2834640" cy="164592"/>
+              <a:t>Survey n=17 · Avg PC experience 3.4 / 5</a:t>
+            </a:r>
+            <a:endParaRPr lang="en-US" sz="800" dirty="0"/>
+          </a:p>
+        </p:txBody>
+      </p:sp>
+      <p:sp>
+        <p:nvSpPr>
+          <p:cNvPr id="7" name="Text 5"/>
+          <p:cNvSpPr/>
+          <p:nvPr/>
+        </p:nvSpPr>
+        <p:spPr>
+          <a:xfrm>
+            <a:off x="3429000" y="347472"/>
+            <a:ext cx="5486400" cy="201168"/>
           </a:xfrm>
           <a:prstGeom prst="rect">
             <a:avLst/>
@@ -4727,68 +3826,15 @@
               <a:buNone/>
             </a:pPr>
             <a:r>
-              <a:rPr lang="en-US" sz="700" b="1" spc="50" kern="0" dirty="0">
-                <a:solidFill>
-                  <a:srgbClr val="E74C3C"/>
+              <a:rPr lang="en-US" sz="900" b="1" spc="200" kern="0" dirty="0">
+                <a:solidFill>
+                  <a:srgbClr val="0077B6"/>
                 </a:solidFill>
                 <a:latin typeface="Calibri" pitchFamily="34" charset="0"/>
                 <a:ea typeface="Calibri" pitchFamily="34" charset="-122"/>
                 <a:cs typeface="Calibri" pitchFamily="34" charset="-120"/>
               </a:rPr>
-              <a:t>WHY EXISTING TOOLS ARE ABANDONED</a:t>
-            </a:r>
-            <a:endParaRPr lang="en-US" sz="700" dirty="0"/>
-          </a:p>
-        </p:txBody>
-      </p:sp>
-      <p:sp>
-        <p:nvSpPr>
-          <p:cNvPr id="11" name="Text 9"/>
-          <p:cNvSpPr/>
-          <p:nvPr/>
-        </p:nvSpPr>
-        <p:spPr>
-          <a:xfrm>
-            <a:off x="237744" y="2871216"/>
-            <a:ext cx="2834640" cy="274320"/>
-          </a:xfrm>
-          <a:prstGeom prst="rect">
-            <a:avLst/>
-          </a:prstGeom>
-          <a:noFill/>
-          <a:ln/>
-        </p:spPr>
-        <p:txBody>
-          <a:bodyPr wrap="square" rtlCol="0" anchor="ctr"/>
-          <a:lstStyle/>
-          <a:p>
-            <a:pPr indent="0" marL="0">
-              <a:buNone/>
-            </a:pPr>
-            <a:r>
-              <a:rPr lang="en-US" sz="900" b="1" dirty="0">
-                <a:solidFill>
-                  <a:srgbClr val="F6AE2D"/>
-                </a:solidFill>
-                <a:latin typeface="Calibri" pitchFamily="34" charset="0"/>
-                <a:ea typeface="Calibri" pitchFamily="34" charset="-122"/>
-                <a:cs typeface="Calibri" pitchFamily="34" charset="-120"/>
-              </a:rPr>
-              <a:t>⏻ Always-on required</a:t>
-            </a:r>
-            <a:pPr indent="0" marL="0">
-              <a:buNone/>
-            </a:pPr>
-            <a:r>
-              <a:rPr lang="en-US" sz="900" dirty="0">
-                <a:solidFill>
-                  <a:srgbClr val="BBBBBB"/>
-                </a:solidFill>
-                <a:latin typeface="Calibri" pitchFamily="34" charset="0"/>
-                <a:ea typeface="Calibri" pitchFamily="34" charset="-122"/>
-                <a:cs typeface="Calibri" pitchFamily="34" charset="-120"/>
-              </a:rPr>
-              <a:t> — Magnifier &amp; Narrator need constant manual activation</a:t>
+              <a:t>FIVE DAILY PAIN POINTS</a:t>
             </a:r>
             <a:endParaRPr lang="en-US" sz="900" dirty="0"/>
           </a:p>
@@ -4796,138 +3842,7 @@
       </p:sp>
       <p:sp>
         <p:nvSpPr>
-          <p:cNvPr id="12" name="Text 10"/>
-          <p:cNvSpPr/>
-          <p:nvPr/>
-        </p:nvSpPr>
-        <p:spPr>
-          <a:xfrm>
-            <a:off x="237744" y="3163824"/>
-            <a:ext cx="2834640" cy="274320"/>
-          </a:xfrm>
-          <a:prstGeom prst="rect">
-            <a:avLst/>
-          </a:prstGeom>
-          <a:noFill/>
-          <a:ln/>
-        </p:spPr>
-        <p:txBody>
-          <a:bodyPr wrap="square" rtlCol="0" anchor="ctr"/>
-          <a:lstStyle/>
-          <a:p>
-            <a:pPr indent="0" marL="0">
-              <a:buNone/>
-            </a:pPr>
-            <a:r>
-              <a:rPr lang="en-US" sz="900" b="1" dirty="0">
-                <a:solidFill>
-                  <a:srgbClr val="F6AE2D"/>
-                </a:solidFill>
-                <a:latin typeface="Calibri" pitchFamily="34" charset="0"/>
-                <a:ea typeface="Calibri" pitchFamily="34" charset="-122"/>
-                <a:cs typeface="Calibri" pitchFamily="34" charset="-120"/>
-              </a:rPr>
-              <a:t>■ Special hardware</a:t>
-            </a:r>
-            <a:pPr indent="0" marL="0">
-              <a:buNone/>
-            </a:pPr>
-            <a:r>
-              <a:rPr lang="en-US" sz="900" dirty="0">
-                <a:solidFill>
-                  <a:srgbClr val="BBBBBB"/>
-                </a:solidFill>
-                <a:latin typeface="Calibri" pitchFamily="34" charset="0"/>
-                <a:ea typeface="Calibri" pitchFamily="34" charset="-122"/>
-                <a:cs typeface="Calibri" pitchFamily="34" charset="-120"/>
-              </a:rPr>
-              <a:t> — Tobii eye trackers cost $100–$300 extra</a:t>
-            </a:r>
-            <a:endParaRPr lang="en-US" sz="900" dirty="0"/>
-          </a:p>
-        </p:txBody>
-      </p:sp>
-      <p:sp>
-        <p:nvSpPr>
-          <p:cNvPr id="13" name="Text 11"/>
-          <p:cNvSpPr/>
-          <p:nvPr/>
-        </p:nvSpPr>
-        <p:spPr>
-          <a:xfrm>
-            <a:off x="164592" y="4892040"/>
-            <a:ext cx="2962656" cy="182880"/>
-          </a:xfrm>
-          <a:prstGeom prst="rect">
-            <a:avLst/>
-          </a:prstGeom>
-          <a:noFill/>
-          <a:ln/>
-        </p:spPr>
-        <p:txBody>
-          <a:bodyPr wrap="square" rtlCol="0" anchor="ctr"/>
-          <a:lstStyle/>
-          <a:p>
-            <a:pPr indent="0" marL="0">
-              <a:buNone/>
-            </a:pPr>
-            <a:r>
-              <a:rPr lang="en-US" sz="800" dirty="0">
-                <a:solidFill>
-                  <a:srgbClr val="666666"/>
-                </a:solidFill>
-                <a:latin typeface="Calibri" pitchFamily="34" charset="0"/>
-                <a:ea typeface="Calibri" pitchFamily="34" charset="-122"/>
-                <a:cs typeface="Calibri" pitchFamily="34" charset="-120"/>
-              </a:rPr>
-              <a:t>Survey n=17 · Avg PC experience 3.4 / 5</a:t>
-            </a:r>
-            <a:endParaRPr lang="en-US" sz="800" dirty="0"/>
-          </a:p>
-        </p:txBody>
-      </p:sp>
-      <p:sp>
-        <p:nvSpPr>
-          <p:cNvPr id="14" name="Text 12"/>
-          <p:cNvSpPr/>
-          <p:nvPr/>
-        </p:nvSpPr>
-        <p:spPr>
-          <a:xfrm>
-            <a:off x="3429000" y="347472"/>
-            <a:ext cx="5486400" cy="201168"/>
-          </a:xfrm>
-          <a:prstGeom prst="rect">
-            <a:avLst/>
-          </a:prstGeom>
-          <a:noFill/>
-          <a:ln/>
-        </p:spPr>
-        <p:txBody>
-          <a:bodyPr wrap="square" rtlCol="0" anchor="ctr"/>
-          <a:lstStyle/>
-          <a:p>
-            <a:pPr indent="0" marL="0">
-              <a:buNone/>
-            </a:pPr>
-            <a:r>
-              <a:rPr lang="en-US" sz="900" b="1" spc="200" kern="0" dirty="0">
-                <a:solidFill>
-                  <a:srgbClr val="0077B6"/>
-                </a:solidFill>
-                <a:latin typeface="Calibri" pitchFamily="34" charset="0"/>
-                <a:ea typeface="Calibri" pitchFamily="34" charset="-122"/>
-                <a:cs typeface="Calibri" pitchFamily="34" charset="-120"/>
-              </a:rPr>
-              <a:t>FIVE DAILY PAIN POINTS</a:t>
-            </a:r>
-            <a:endParaRPr lang="en-US" sz="900" dirty="0"/>
-          </a:p>
-        </p:txBody>
-      </p:sp>
-      <p:sp>
-        <p:nvSpPr>
-          <p:cNvPr id="15" name="Shape 13"/>
+          <p:cNvPr id="8" name="Shape 6"/>
           <p:cNvSpPr/>
           <p:nvPr/>
         </p:nvSpPr>
@@ -4954,7 +3869,7 @@
       </p:sp>
       <p:sp>
         <p:nvSpPr>
-          <p:cNvPr id="16" name="Shape 14"/>
+          <p:cNvPr id="9" name="Shape 7"/>
           <p:cNvSpPr/>
           <p:nvPr/>
         </p:nvSpPr>
@@ -4979,7 +3894,7 @@
       </p:sp>
       <p:sp>
         <p:nvSpPr>
-          <p:cNvPr id="17" name="Text 15"/>
+          <p:cNvPr id="10" name="Text 8"/>
           <p:cNvSpPr/>
           <p:nvPr/>
         </p:nvSpPr>
@@ -5018,7 +3933,7 @@
       </p:sp>
       <p:sp>
         <p:nvSpPr>
-          <p:cNvPr id="18" name="Text 16"/>
+          <p:cNvPr id="11" name="Text 9"/>
           <p:cNvSpPr/>
           <p:nvPr/>
         </p:nvSpPr>
@@ -5057,7 +3972,7 @@
       </p:sp>
       <p:sp>
         <p:nvSpPr>
-          <p:cNvPr id="19" name="Shape 17"/>
+          <p:cNvPr id="12" name="Shape 10"/>
           <p:cNvSpPr/>
           <p:nvPr/>
         </p:nvSpPr>
@@ -5084,7 +3999,7 @@
       </p:sp>
       <p:sp>
         <p:nvSpPr>
-          <p:cNvPr id="20" name="Shape 18"/>
+          <p:cNvPr id="13" name="Shape 11"/>
           <p:cNvSpPr/>
           <p:nvPr/>
         </p:nvSpPr>
@@ -5109,7 +4024,7 @@
       </p:sp>
       <p:sp>
         <p:nvSpPr>
-          <p:cNvPr id="21" name="Text 19"/>
+          <p:cNvPr id="14" name="Text 12"/>
           <p:cNvSpPr/>
           <p:nvPr/>
         </p:nvSpPr>
@@ -5148,7 +4063,7 @@
       </p:sp>
       <p:sp>
         <p:nvSpPr>
-          <p:cNvPr id="22" name="Text 20"/>
+          <p:cNvPr id="15" name="Text 13"/>
           <p:cNvSpPr/>
           <p:nvPr/>
         </p:nvSpPr>
@@ -5187,7 +4102,7 @@
       </p:sp>
       <p:sp>
         <p:nvSpPr>
-          <p:cNvPr id="23" name="Shape 21"/>
+          <p:cNvPr id="16" name="Shape 14"/>
           <p:cNvSpPr/>
           <p:nvPr/>
         </p:nvSpPr>
@@ -5214,7 +4129,7 @@
       </p:sp>
       <p:sp>
         <p:nvSpPr>
-          <p:cNvPr id="24" name="Shape 22"/>
+          <p:cNvPr id="17" name="Shape 15"/>
           <p:cNvSpPr/>
           <p:nvPr/>
         </p:nvSpPr>
@@ -5239,7 +4154,7 @@
       </p:sp>
       <p:sp>
         <p:nvSpPr>
-          <p:cNvPr id="25" name="Text 23"/>
+          <p:cNvPr id="18" name="Text 16"/>
           <p:cNvSpPr/>
           <p:nvPr/>
         </p:nvSpPr>
@@ -5278,7 +4193,7 @@
       </p:sp>
       <p:sp>
         <p:nvSpPr>
-          <p:cNvPr id="26" name="Text 24"/>
+          <p:cNvPr id="19" name="Text 17"/>
           <p:cNvSpPr/>
           <p:nvPr/>
         </p:nvSpPr>
@@ -5317,7 +4232,7 @@
       </p:sp>
       <p:sp>
         <p:nvSpPr>
-          <p:cNvPr id="27" name="Shape 25"/>
+          <p:cNvPr id="20" name="Shape 18"/>
           <p:cNvSpPr/>
           <p:nvPr/>
         </p:nvSpPr>
@@ -5344,7 +4259,7 @@
       </p:sp>
       <p:sp>
         <p:nvSpPr>
-          <p:cNvPr id="28" name="Shape 26"/>
+          <p:cNvPr id="21" name="Shape 19"/>
           <p:cNvSpPr/>
           <p:nvPr/>
         </p:nvSpPr>
@@ -5369,7 +4284,7 @@
       </p:sp>
       <p:sp>
         <p:nvSpPr>
-          <p:cNvPr id="29" name="Text 27"/>
+          <p:cNvPr id="22" name="Text 20"/>
           <p:cNvSpPr/>
           <p:nvPr/>
         </p:nvSpPr>
@@ -5408,7 +4323,7 @@
       </p:sp>
       <p:sp>
         <p:nvSpPr>
-          <p:cNvPr id="30" name="Text 28"/>
+          <p:cNvPr id="23" name="Text 21"/>
           <p:cNvSpPr/>
           <p:nvPr/>
         </p:nvSpPr>
@@ -5447,7 +4362,7 @@
       </p:sp>
       <p:sp>
         <p:nvSpPr>
-          <p:cNvPr id="31" name="Shape 29"/>
+          <p:cNvPr id="24" name="Shape 22"/>
           <p:cNvSpPr/>
           <p:nvPr/>
         </p:nvSpPr>
@@ -5474,7 +4389,7 @@
       </p:sp>
       <p:sp>
         <p:nvSpPr>
-          <p:cNvPr id="32" name="Shape 30"/>
+          <p:cNvPr id="25" name="Shape 23"/>
           <p:cNvSpPr/>
           <p:nvPr/>
         </p:nvSpPr>
@@ -5499,7 +4414,7 @@
       </p:sp>
       <p:sp>
         <p:nvSpPr>
-          <p:cNvPr id="33" name="Text 31"/>
+          <p:cNvPr id="26" name="Text 24"/>
           <p:cNvSpPr/>
           <p:nvPr/>
         </p:nvSpPr>
@@ -5538,7 +4453,7 @@
       </p:sp>
       <p:sp>
         <p:nvSpPr>
-          <p:cNvPr id="34" name="Text 32"/>
+          <p:cNvPr id="27" name="Text 25"/>
           <p:cNvSpPr/>
           <p:nvPr/>
         </p:nvSpPr>
@@ -5586,6 +4501,13 @@
 <file path=ppt/slides/slide4.xml><?xml version="1.0" encoding="utf-8"?>
 <p:sld xmlns:a="http://schemas.openxmlformats.org/drawingml/2006/main" xmlns:r="http://schemas.openxmlformats.org/officeDocument/2006/relationships" xmlns:p="http://schemas.openxmlformats.org/presentationml/2006/main">
   <p:cSld name="Slide 4">
+    <p:bg>
+      <p:bgPr>
+        <a:solidFill>
+          <a:srgbClr val="0D1F3C"/>
+        </a:solidFill>
+      </p:bgPr>
+    </p:bg>
     <p:spTree>
       <p:nvGrpSpPr>
         <p:cNvPr id="1" name=""/>
@@ -5602,39 +4524,14 @@
       </p:grpSpPr>
       <p:sp>
         <p:nvSpPr>
-          <p:cNvPr id="2" name="Shape 0"/>
-          <p:cNvSpPr/>
-          <p:nvPr/>
-        </p:nvSpPr>
-        <p:spPr>
-          <a:xfrm>
-            <a:off x="0" y="0"/>
-            <a:ext cx="3840480" cy="5143500"/>
-          </a:xfrm>
-          <a:prstGeom prst="rect">
-            <a:avLst/>
-          </a:prstGeom>
-          <a:solidFill>
-            <a:srgbClr val="0D1F3C"/>
-          </a:solidFill>
-          <a:ln w="12700">
-            <a:solidFill>
-              <a:srgbClr val="0D1F3C"/>
-            </a:solidFill>
-            <a:prstDash val="solid"/>
-          </a:ln>
-        </p:spPr>
-      </p:sp>
-      <p:sp>
-        <p:nvSpPr>
-          <p:cNvPr id="3" name="Text 1"/>
-          <p:cNvSpPr/>
-          <p:nvPr/>
-        </p:nvSpPr>
-        <p:spPr>
-          <a:xfrm>
-            <a:off x="182880" y="329184"/>
-            <a:ext cx="2011680" cy="256032"/>
+          <p:cNvPr id="2" name="Text 0"/>
+          <p:cNvSpPr/>
+          <p:nvPr/>
+        </p:nvSpPr>
+        <p:spPr>
+          <a:xfrm>
+            <a:off x="3429000" y="292608"/>
+            <a:ext cx="2286000" cy="256032"/>
           </a:xfrm>
           <a:prstGeom prst="roundRect">
             <a:avLst>
@@ -5642,7 +4539,7 @@
             </a:avLst>
           </a:prstGeom>
           <a:solidFill>
-            <a:srgbClr val="C9922A"/>
+            <a:srgbClr val="00B4D8"/>
           </a:solidFill>
           <a:ln/>
         </p:spPr>
@@ -5656,13 +4553,13 @@
             <a:r>
               <a:rPr lang="en-US" sz="900" b="1" dirty="0">
                 <a:solidFill>
-                  <a:srgbClr val="FFFFFF"/>
+                  <a:srgbClr val="0D1F3C"/>
                 </a:solidFill>
                 <a:latin typeface="Calibri" pitchFamily="34" charset="0"/>
                 <a:ea typeface="Calibri" pitchFamily="34" charset="-122"/>
                 <a:cs typeface="Calibri" pitchFamily="34" charset="-120"/>
               </a:rPr>
-              <a:t>2 · PROPOSED SOLUTION</a:t>
+              <a:t>1 · PROBLEM STATEMENT</a:t>
             </a:r>
             <a:endParaRPr lang="en-US" sz="900" dirty="0"/>
           </a:p>
@@ -5670,107 +4567,107 @@
       </p:sp>
       <p:sp>
         <p:nvSpPr>
-          <p:cNvPr id="4" name="Text 2"/>
-          <p:cNvSpPr/>
-          <p:nvPr/>
-        </p:nvSpPr>
-        <p:spPr>
-          <a:xfrm>
-            <a:off x="182880" y="676656"/>
-            <a:ext cx="3429000" cy="475488"/>
-          </a:xfrm>
-          <a:prstGeom prst="rect">
-            <a:avLst/>
-          </a:prstGeom>
-          <a:noFill/>
-          <a:ln/>
-        </p:spPr>
-        <p:txBody>
-          <a:bodyPr wrap="square" rtlCol="0" anchor="ctr"/>
-          <a:lstStyle/>
-          <a:p>
-            <a:pPr indent="0" marL="0">
-              <a:buNone/>
-            </a:pPr>
-            <a:r>
-              <a:rPr lang="en-US" sz="2600" b="1" dirty="0">
-                <a:solidFill>
-                  <a:srgbClr val="FFFFFF"/>
+          <p:cNvPr id="3" name="Text 1"/>
+          <p:cNvSpPr/>
+          <p:nvPr/>
+        </p:nvSpPr>
+        <p:spPr>
+          <a:xfrm>
+            <a:off x="457200" y="658368"/>
+            <a:ext cx="8229600" cy="1371600"/>
+          </a:xfrm>
+          <a:prstGeom prst="rect">
+            <a:avLst/>
+          </a:prstGeom>
+          <a:noFill/>
+          <a:ln/>
+        </p:spPr>
+        <p:txBody>
+          <a:bodyPr wrap="square" rtlCol="0" anchor="ctr"/>
+          <a:lstStyle/>
+          <a:p>
+            <a:pPr algn="ctr" indent="0" marL="0">
+              <a:buNone/>
+            </a:pPr>
+            <a:r>
+              <a:rPr lang="en-US" sz="9600" b="1" spc="-400" kern="0" dirty="0">
+                <a:solidFill>
+                  <a:srgbClr val="00B4D8"/>
                 </a:solidFill>
                 <a:latin typeface="Cambria" pitchFamily="34" charset="0"/>
                 <a:ea typeface="Cambria" pitchFamily="34" charset="-122"/>
                 <a:cs typeface="Cambria" pitchFamily="34" charset="-120"/>
               </a:rPr>
-              <a:t>Blind Area</a:t>
-            </a:r>
-            <a:endParaRPr lang="en-US" sz="2600" dirty="0"/>
-          </a:p>
-        </p:txBody>
-      </p:sp>
-      <p:sp>
-        <p:nvSpPr>
-          <p:cNvPr id="5" name="Text 3"/>
-          <p:cNvSpPr/>
-          <p:nvPr/>
-        </p:nvSpPr>
-        <p:spPr>
-          <a:xfrm>
-            <a:off x="182880" y="1133856"/>
-            <a:ext cx="3429000" cy="256032"/>
-          </a:xfrm>
-          <a:prstGeom prst="rect">
-            <a:avLst/>
-          </a:prstGeom>
-          <a:noFill/>
-          <a:ln/>
-        </p:spPr>
-        <p:txBody>
-          <a:bodyPr wrap="square" rtlCol="0" anchor="ctr"/>
-          <a:lstStyle/>
-          <a:p>
-            <a:pPr indent="0" marL="0">
-              <a:buNone/>
-            </a:pPr>
-            <a:r>
-              <a:rPr lang="en-US" sz="1100" dirty="0">
-                <a:solidFill>
-                  <a:srgbClr val="AAAAAA"/>
+              <a:t>59%</a:t>
+            </a:r>
+            <a:endParaRPr lang="en-US" sz="9600" dirty="0"/>
+          </a:p>
+        </p:txBody>
+      </p:sp>
+      <p:sp>
+        <p:nvSpPr>
+          <p:cNvPr id="4" name="Text 2"/>
+          <p:cNvSpPr/>
+          <p:nvPr/>
+        </p:nvSpPr>
+        <p:spPr>
+          <a:xfrm>
+            <a:off x="457200" y="1938528"/>
+            <a:ext cx="8229600" cy="365760"/>
+          </a:xfrm>
+          <a:prstGeom prst="rect">
+            <a:avLst/>
+          </a:prstGeom>
+          <a:noFill/>
+          <a:ln/>
+        </p:spPr>
+        <p:txBody>
+          <a:bodyPr wrap="square" rtlCol="0" anchor="ctr"/>
+          <a:lstStyle/>
+          <a:p>
+            <a:pPr algn="ctr" indent="0" marL="0">
+              <a:buNone/>
+            </a:pPr>
+            <a:r>
+              <a:rPr lang="en-US" sz="2000" dirty="0">
+                <a:solidFill>
+                  <a:srgbClr val="DDDDDD"/>
                 </a:solidFill>
                 <a:latin typeface="Calibri" pitchFamily="34" charset="0"/>
                 <a:ea typeface="Calibri" pitchFamily="34" charset="-122"/>
                 <a:cs typeface="Calibri" pitchFamily="34" charset="-120"/>
               </a:rPr>
-              <a:t>Unvisited zones — AI detects &amp; guides</a:t>
-            </a:r>
-            <a:endParaRPr lang="en-US" sz="1100" dirty="0"/>
-          </a:p>
-        </p:txBody>
-      </p:sp>
-      <p:sp>
-        <p:nvSpPr>
-          <p:cNvPr id="6" name="Shape 4"/>
-          <p:cNvSpPr/>
-          <p:nvPr/>
-        </p:nvSpPr>
-        <p:spPr>
-          <a:xfrm>
-            <a:off x="182880" y="1499616"/>
-            <a:ext cx="3429000" cy="694944"/>
+              <a:t>never adopted an assistive tool</a:t>
+            </a:r>
+            <a:endParaRPr lang="en-US" sz="2000" dirty="0"/>
+          </a:p>
+        </p:txBody>
+      </p:sp>
+      <p:sp>
+        <p:nvSpPr>
+          <p:cNvPr id="5" name="Shape 3"/>
+          <p:cNvSpPr/>
+          <p:nvPr/>
+        </p:nvSpPr>
+        <p:spPr>
+          <a:xfrm>
+            <a:off x="2011680" y="2468880"/>
+            <a:ext cx="5120640" cy="1993392"/>
           </a:xfrm>
           <a:prstGeom prst="roundRect">
             <a:avLst>
-              <a:gd name="adj" fmla="val 13158"/>
+              <a:gd name="adj" fmla="val 6422"/>
             </a:avLst>
           </a:prstGeom>
           <a:solidFill>
-            <a:srgbClr val="FFFFFF">
-              <a:alpha val="6000"/>
+            <a:srgbClr val="E74C3C">
+              <a:alpha val="7000"/>
             </a:srgbClr>
           </a:solidFill>
-          <a:ln w="25400">
+          <a:ln w="12700">
             <a:solidFill>
-              <a:srgbClr val="C9922A">
-                <a:alpha val="60000"/>
+              <a:srgbClr val="E74C3C">
+                <a:alpha val="45000"/>
               </a:srgbClr>
             </a:solidFill>
             <a:prstDash val="solid"/>
@@ -5779,150 +4676,53 @@
       </p:sp>
       <p:sp>
         <p:nvSpPr>
-          <p:cNvPr id="7" name="Shape 5"/>
-          <p:cNvSpPr/>
-          <p:nvPr/>
-        </p:nvSpPr>
-        <p:spPr>
-          <a:xfrm>
-            <a:off x="182880" y="1499616"/>
-            <a:ext cx="36576" cy="694944"/>
-          </a:xfrm>
-          <a:prstGeom prst="rect">
-            <a:avLst/>
-          </a:prstGeom>
-          <a:solidFill>
-            <a:srgbClr val="C9922A">
-              <a:alpha val="60000"/>
-            </a:srgbClr>
-          </a:solidFill>
-          <a:ln w="12700">
-            <a:solidFill>
-              <a:srgbClr val="C9922A"/>
-            </a:solidFill>
-            <a:prstDash val="solid"/>
-          </a:ln>
-        </p:spPr>
-      </p:sp>
-      <p:sp>
-        <p:nvSpPr>
-          <p:cNvPr id="8" name="Text 6"/>
-          <p:cNvSpPr/>
-          <p:nvPr/>
-        </p:nvSpPr>
-        <p:spPr>
-          <a:xfrm>
-            <a:off x="292608" y="1554480"/>
-            <a:ext cx="3246120" cy="274320"/>
-          </a:xfrm>
-          <a:prstGeom prst="rect">
-            <a:avLst/>
-          </a:prstGeom>
-          <a:noFill/>
-          <a:ln/>
-        </p:spPr>
-        <p:txBody>
-          <a:bodyPr wrap="square" rtlCol="0" anchor="ctr"/>
-          <a:lstStyle/>
-          <a:p>
-            <a:pPr indent="0" marL="0">
-              <a:buNone/>
-            </a:pPr>
-            <a:r>
-              <a:rPr lang="en-US" sz="1300" b="1" dirty="0">
-                <a:solidFill>
-                  <a:srgbClr val="FFFFFF"/>
+          <p:cNvPr id="6" name="Text 4"/>
+          <p:cNvSpPr/>
+          <p:nvPr/>
+        </p:nvSpPr>
+        <p:spPr>
+          <a:xfrm>
+            <a:off x="2194560" y="2578608"/>
+            <a:ext cx="4754880" cy="201168"/>
+          </a:xfrm>
+          <a:prstGeom prst="rect">
+            <a:avLst/>
+          </a:prstGeom>
+          <a:noFill/>
+          <a:ln/>
+        </p:spPr>
+        <p:txBody>
+          <a:bodyPr wrap="square" rtlCol="0" anchor="ctr"/>
+          <a:lstStyle/>
+          <a:p>
+            <a:pPr algn="ctr" indent="0" marL="0">
+              <a:buNone/>
+            </a:pPr>
+            <a:r>
+              <a:rPr lang="en-US" sz="800" b="1" spc="100" kern="0" dirty="0">
+                <a:solidFill>
+                  <a:srgbClr val="E74C3C"/>
                 </a:solidFill>
                 <a:latin typeface="Calibri" pitchFamily="34" charset="0"/>
                 <a:ea typeface="Calibri" pitchFamily="34" charset="-122"/>
                 <a:cs typeface="Calibri" pitchFamily="34" charset="-120"/>
               </a:rPr>
-              <a:t>Gaze Heatmap</a:t>
-            </a:r>
-            <a:endParaRPr lang="en-US" sz="1300" dirty="0"/>
-          </a:p>
-        </p:txBody>
-      </p:sp>
-      <p:sp>
-        <p:nvSpPr>
-          <p:cNvPr id="9" name="Text 7"/>
-          <p:cNvSpPr/>
-          <p:nvPr/>
-        </p:nvSpPr>
-        <p:spPr>
-          <a:xfrm>
-            <a:off x="292608" y="1828800"/>
-            <a:ext cx="3246120" cy="310896"/>
-          </a:xfrm>
-          <a:prstGeom prst="rect">
-            <a:avLst/>
-          </a:prstGeom>
-          <a:noFill/>
-          <a:ln/>
-        </p:spPr>
-        <p:txBody>
-          <a:bodyPr wrap="square" rtlCol="0" anchor="ctr"/>
-          <a:lstStyle/>
-          <a:p>
-            <a:pPr indent="0" marL="0">
-              <a:buNone/>
-            </a:pPr>
-            <a:r>
-              <a:rPr lang="en-US" sz="950" dirty="0">
-                <a:solidFill>
-                  <a:srgbClr val="AAAAAA"/>
-                </a:solidFill>
-                <a:latin typeface="Calibri" pitchFamily="34" charset="0"/>
-                <a:ea typeface="Calibri" pitchFamily="34" charset="-122"/>
-                <a:cs typeface="Calibri" pitchFamily="34" charset="-120"/>
-              </a:rPr>
-              <a:t>Gaussian Mixture Model — maps visited vs cold zones across the page</a:t>
-            </a:r>
-            <a:endParaRPr lang="en-US" sz="950" dirty="0"/>
-          </a:p>
-        </p:txBody>
-      </p:sp>
-      <p:sp>
-        <p:nvSpPr>
-          <p:cNvPr id="10" name="Shape 8"/>
-          <p:cNvSpPr/>
-          <p:nvPr/>
-        </p:nvSpPr>
-        <p:spPr>
-          <a:xfrm>
-            <a:off x="4069080" y="475488"/>
-            <a:ext cx="4846320" cy="4206240"/>
-          </a:xfrm>
-          <a:prstGeom prst="roundRect">
-            <a:avLst>
-              <a:gd name="adj" fmla="val 4348"/>
-            </a:avLst>
-          </a:prstGeom>
-          <a:solidFill>
-            <a:srgbClr val="00B4D8">
-              <a:alpha val="4000"/>
-            </a:srgbClr>
-          </a:solidFill>
-          <a:ln w="12700">
-            <a:solidFill>
-              <a:srgbClr val="00B4D8">
-                <a:alpha val="45000"/>
-              </a:srgbClr>
-            </a:solidFill>
-            <a:prstDash val="dash"/>
-          </a:ln>
-        </p:spPr>
-      </p:sp>
-      <p:sp>
-        <p:nvSpPr>
-          <p:cNvPr id="11" name="Text 9"/>
-          <p:cNvSpPr/>
-          <p:nvPr/>
-        </p:nvSpPr>
-        <p:spPr>
-          <a:xfrm>
-            <a:off x="4069080" y="2103120"/>
-            <a:ext cx="4846320" cy="274320"/>
+              <a:t>WHY EXISTING TOOLS ARE ABANDONED</a:t>
+            </a:r>
+            <a:endParaRPr lang="en-US" sz="800" dirty="0"/>
+          </a:p>
+        </p:txBody>
+      </p:sp>
+      <p:sp>
+        <p:nvSpPr>
+          <p:cNvPr id="7" name="Text 5"/>
+          <p:cNvSpPr/>
+          <p:nvPr/>
+        </p:nvSpPr>
+        <p:spPr>
+          <a:xfrm>
+            <a:off x="2194560" y="2889504"/>
+            <a:ext cx="4754880" cy="347472"/>
           </a:xfrm>
           <a:prstGeom prst="rect">
             <a:avLst/>
@@ -5938,32 +4738,30 @@
               <a:buNone/>
             </a:pPr>
             <a:r>
-              <a:rPr lang="en-US" sz="1200" b="1" dirty="0">
-                <a:solidFill>
-                  <a:srgbClr val="00B4D8">
-                    <a:alpha val="65000"/>
-                  </a:srgbClr>
-                </a:solidFill>
-                <a:latin typeface="Calibri" pitchFamily="34" charset="0"/>
-                <a:ea typeface="Calibri" pitchFamily="34" charset="-122"/>
-                <a:cs typeface="Calibri" pitchFamily="34" charset="-120"/>
-              </a:rPr>
-              <a:t>Demo Video — Blind-Spot Hints</a:t>
-            </a:r>
-            <a:endParaRPr lang="en-US" sz="1200" dirty="0"/>
-          </a:p>
-        </p:txBody>
-      </p:sp>
-      <p:sp>
-        <p:nvSpPr>
-          <p:cNvPr id="12" name="Text 10"/>
-          <p:cNvSpPr/>
-          <p:nvPr/>
-        </p:nvSpPr>
-        <p:spPr>
-          <a:xfrm>
-            <a:off x="4069080" y="2423160"/>
-            <a:ext cx="4846320" cy="201168"/>
+              <a:rPr lang="en-US" sz="1800" b="1" dirty="0">
+                <a:solidFill>
+                  <a:srgbClr val="F6AE2D"/>
+                </a:solidFill>
+                <a:latin typeface="Cambria" pitchFamily="34" charset="0"/>
+                <a:ea typeface="Cambria" pitchFamily="34" charset="-122"/>
+                <a:cs typeface="Cambria" pitchFamily="34" charset="-120"/>
+              </a:rPr>
+              <a:t>Always-on required</a:t>
+            </a:r>
+            <a:endParaRPr lang="en-US" sz="1800" dirty="0"/>
+          </a:p>
+        </p:txBody>
+      </p:sp>
+      <p:sp>
+        <p:nvSpPr>
+          <p:cNvPr id="8" name="Text 6"/>
+          <p:cNvSpPr/>
+          <p:nvPr/>
+        </p:nvSpPr>
+        <p:spPr>
+          <a:xfrm>
+            <a:off x="2194560" y="3328416"/>
+            <a:ext cx="4754880" cy="347472"/>
           </a:xfrm>
           <a:prstGeom prst="rect">
             <a:avLst/>
@@ -5979,19 +4777,17 @@
               <a:buNone/>
             </a:pPr>
             <a:r>
-              <a:rPr lang="en-US" sz="900" dirty="0">
-                <a:solidFill>
-                  <a:srgbClr val="00B4D8">
-                    <a:alpha val="40000"/>
-                  </a:srgbClr>
-                </a:solidFill>
-                <a:latin typeface="Calibri" pitchFamily="34" charset="0"/>
-                <a:ea typeface="Calibri" pitchFamily="34" charset="-122"/>
-                <a:cs typeface="Calibri" pitchFamily="34" charset="-120"/>
-              </a:rPr>
-              <a:t>Replace with demo video file</a:t>
-            </a:r>
-            <a:endParaRPr lang="en-US" sz="900" dirty="0"/>
+              <a:rPr lang="en-US" sz="1800" b="1" dirty="0">
+                <a:solidFill>
+                  <a:srgbClr val="F6AE2D"/>
+                </a:solidFill>
+                <a:latin typeface="Cambria" pitchFamily="34" charset="0"/>
+                <a:ea typeface="Cambria" pitchFamily="34" charset="-122"/>
+                <a:cs typeface="Cambria" pitchFamily="34" charset="-120"/>
+              </a:rPr>
+              <a:t>Special hardware</a:t>
+            </a:r>
+            <a:endParaRPr lang="en-US" sz="1800" dirty="0"/>
           </a:p>
         </p:txBody>
       </p:sp>
@@ -6054,7 +4850,7 @@
         <p:spPr>
           <a:xfrm>
             <a:off x="182880" y="329184"/>
-            <a:ext cx="2011680" cy="256032"/>
+            <a:ext cx="2286000" cy="256032"/>
           </a:xfrm>
           <a:prstGeom prst="roundRect">
             <a:avLst>
@@ -6062,7 +4858,7 @@
             </a:avLst>
           </a:prstGeom>
           <a:solidFill>
-            <a:srgbClr val="00B4D8"/>
+            <a:srgbClr val="C9922A"/>
           </a:solidFill>
           <a:ln/>
         </p:spPr>
@@ -6076,7 +4872,7 @@
             <a:r>
               <a:rPr lang="en-US" sz="900" b="1" dirty="0">
                 <a:solidFill>
-                  <a:srgbClr val="0D1F3C"/>
+                  <a:srgbClr val="FFFFFF"/>
                 </a:solidFill>
                 <a:latin typeface="Calibri" pitchFamily="34" charset="0"/>
                 <a:ea typeface="Calibri" pitchFamily="34" charset="-122"/>
@@ -6121,7 +4917,7 @@
                 <a:ea typeface="Cambria" pitchFamily="34" charset="-122"/>
                 <a:cs typeface="Cambria" pitchFamily="34" charset="-120"/>
               </a:rPr>
-              <a:t>Visible Area</a:t>
+              <a:t>Blind Area</a:t>
             </a:r>
             <a:endParaRPr lang="en-US" sz="2600" dirty="0"/>
           </a:p>
@@ -6160,7 +4956,7 @@
                 <a:ea typeface="Calibri" pitchFamily="34" charset="-122"/>
                 <a:cs typeface="Calibri" pitchFamily="34" charset="-120"/>
               </a:rPr>
-              <a:t>Text Enhancement — triggered by gaze hold</a:t>
+              <a:t>Unvisited zones — AI detects &amp; guides</a:t>
             </a:r>
             <a:endParaRPr lang="en-US" sz="1100" dirty="0"/>
           </a:p>
@@ -6175,11 +4971,11 @@
         <p:spPr>
           <a:xfrm>
             <a:off x="182880" y="1499616"/>
-            <a:ext cx="3429000" cy="749808"/>
+            <a:ext cx="3429000" cy="566928"/>
           </a:xfrm>
           <a:prstGeom prst="roundRect">
             <a:avLst>
-              <a:gd name="adj" fmla="val 12195"/>
+              <a:gd name="adj" fmla="val 16129"/>
             </a:avLst>
           </a:prstGeom>
           <a:solidFill>
@@ -6189,7 +4985,7 @@
           </a:solidFill>
           <a:ln w="12700">
             <a:solidFill>
-              <a:srgbClr val="00B4D8">
+              <a:srgbClr val="C9922A">
                 <a:alpha val="50000"/>
               </a:srgbClr>
             </a:solidFill>
@@ -6206,13 +5002,13 @@
         <p:spPr>
           <a:xfrm>
             <a:off x="182880" y="1499616"/>
-            <a:ext cx="36576" cy="749808"/>
-          </a:xfrm>
-          <a:prstGeom prst="rect">
-            <a:avLst/>
-          </a:prstGeom>
-          <a:solidFill>
-            <a:srgbClr val="00B4D8">
+            <a:ext cx="36576" cy="566928"/>
+          </a:xfrm>
+          <a:prstGeom prst="rect">
+            <a:avLst/>
+          </a:prstGeom>
+          <a:solidFill>
+            <a:srgbClr val="C9922A">
               <a:alpha val="50000"/>
             </a:srgbClr>
           </a:solidFill>
@@ -6232,8 +5028,8 @@
         </p:nvSpPr>
         <p:spPr>
           <a:xfrm>
-            <a:off x="292608" y="1591056"/>
-            <a:ext cx="3246120" cy="274320"/>
+            <a:off x="347472" y="1655064"/>
+            <a:ext cx="3191256" cy="256032"/>
           </a:xfrm>
           <a:prstGeom prst="rect">
             <a:avLst/>
@@ -6257,7 +5053,7 @@
                 <a:ea typeface="Calibri" pitchFamily="34" charset="-122"/>
                 <a:cs typeface="Calibri" pitchFamily="34" charset="-120"/>
               </a:rPr>
-              <a:t>Bold &amp; Darken</a:t>
+              <a:t>Gaze Heatmap</a:t>
             </a:r>
             <a:endParaRPr lang="en-US" sz="1300" dirty="0"/>
           </a:p>
@@ -6265,57 +5061,18 @@
       </p:sp>
       <p:sp>
         <p:nvSpPr>
-          <p:cNvPr id="9" name="Text 7"/>
-          <p:cNvSpPr/>
-          <p:nvPr/>
-        </p:nvSpPr>
-        <p:spPr>
-          <a:xfrm>
-            <a:off x="292608" y="1883664"/>
-            <a:ext cx="3246120" cy="310896"/>
-          </a:xfrm>
-          <a:prstGeom prst="rect">
-            <a:avLst/>
-          </a:prstGeom>
-          <a:noFill/>
-          <a:ln/>
-        </p:spPr>
-        <p:txBody>
-          <a:bodyPr wrap="square" rtlCol="0" anchor="ctr"/>
-          <a:lstStyle/>
-          <a:p>
-            <a:pPr indent="0" marL="0">
-              <a:buNone/>
-            </a:pPr>
-            <a:r>
-              <a:rPr lang="en-US" sz="950" dirty="0">
-                <a:solidFill>
-                  <a:srgbClr val="AAAAAA"/>
-                </a:solidFill>
-                <a:latin typeface="Calibri" pitchFamily="34" charset="0"/>
-                <a:ea typeface="Calibri" pitchFamily="34" charset="-122"/>
-                <a:cs typeface="Calibri" pitchFamily="34" charset="-120"/>
-              </a:rPr>
-              <a:t>Heavier weight + darkened text on the hovered paragraph</a:t>
-            </a:r>
-            <a:endParaRPr lang="en-US" sz="950" dirty="0"/>
-          </a:p>
-        </p:txBody>
-      </p:sp>
-      <p:sp>
-        <p:nvSpPr>
-          <p:cNvPr id="10" name="Shape 8"/>
-          <p:cNvSpPr/>
-          <p:nvPr/>
-        </p:nvSpPr>
-        <p:spPr>
-          <a:xfrm>
-            <a:off x="182880" y="2414016"/>
-            <a:ext cx="3429000" cy="749808"/>
+          <p:cNvPr id="9" name="Shape 7"/>
+          <p:cNvSpPr/>
+          <p:nvPr/>
+        </p:nvSpPr>
+        <p:spPr>
+          <a:xfrm>
+            <a:off x="182880" y="2157984"/>
+            <a:ext cx="3429000" cy="566928"/>
           </a:xfrm>
           <a:prstGeom prst="roundRect">
             <a:avLst>
-              <a:gd name="adj" fmla="val 12195"/>
+              <a:gd name="adj" fmla="val 16129"/>
             </a:avLst>
           </a:prstGeom>
           <a:solidFill>
@@ -6325,7 +5082,7 @@
           </a:solidFill>
           <a:ln w="12700">
             <a:solidFill>
-              <a:srgbClr val="00B4D8">
+              <a:srgbClr val="C9922A">
                 <a:alpha val="50000"/>
               </a:srgbClr>
             </a:solidFill>
@@ -6335,20 +5092,20 @@
       </p:sp>
       <p:sp>
         <p:nvSpPr>
-          <p:cNvPr id="11" name="Shape 9"/>
-          <p:cNvSpPr/>
-          <p:nvPr/>
-        </p:nvSpPr>
-        <p:spPr>
-          <a:xfrm>
-            <a:off x="182880" y="2414016"/>
-            <a:ext cx="36576" cy="749808"/>
-          </a:xfrm>
-          <a:prstGeom prst="rect">
-            <a:avLst/>
-          </a:prstGeom>
-          <a:solidFill>
-            <a:srgbClr val="00B4D8">
+          <p:cNvPr id="10" name="Shape 8"/>
+          <p:cNvSpPr/>
+          <p:nvPr/>
+        </p:nvSpPr>
+        <p:spPr>
+          <a:xfrm>
+            <a:off x="182880" y="2157984"/>
+            <a:ext cx="36576" cy="566928"/>
+          </a:xfrm>
+          <a:prstGeom prst="rect">
+            <a:avLst/>
+          </a:prstGeom>
+          <a:solidFill>
+            <a:srgbClr val="C9922A">
               <a:alpha val="50000"/>
             </a:srgbClr>
           </a:solidFill>
@@ -6362,14 +5119,14 @@
       </p:sp>
       <p:sp>
         <p:nvSpPr>
-          <p:cNvPr id="12" name="Text 10"/>
-          <p:cNvSpPr/>
-          <p:nvPr/>
-        </p:nvSpPr>
-        <p:spPr>
-          <a:xfrm>
-            <a:off x="292608" y="2505456"/>
-            <a:ext cx="3246120" cy="274320"/>
+          <p:cNvPr id="11" name="Text 9"/>
+          <p:cNvSpPr/>
+          <p:nvPr/>
+        </p:nvSpPr>
+        <p:spPr>
+          <a:xfrm>
+            <a:off x="347472" y="2313432"/>
+            <a:ext cx="3191256" cy="256032"/>
           </a:xfrm>
           <a:prstGeom prst="rect">
             <a:avLst/>
@@ -6393,7 +5150,7 @@
                 <a:ea typeface="Calibri" pitchFamily="34" charset="-122"/>
                 <a:cs typeface="Calibri" pitchFamily="34" charset="-120"/>
               </a:rPr>
-              <a:t>Font Enlargement</a:t>
+              <a:t>Blind Spot Detection</a:t>
             </a:r>
             <a:endParaRPr lang="en-US" sz="1300" dirty="0"/>
           </a:p>
@@ -6401,196 +5158,7 @@
       </p:sp>
       <p:sp>
         <p:nvSpPr>
-          <p:cNvPr id="13" name="Text 11"/>
-          <p:cNvSpPr/>
-          <p:nvPr/>
-        </p:nvSpPr>
-        <p:spPr>
-          <a:xfrm>
-            <a:off x="292608" y="2798064"/>
-            <a:ext cx="3246120" cy="310896"/>
-          </a:xfrm>
-          <a:prstGeom prst="rect">
-            <a:avLst/>
-          </a:prstGeom>
-          <a:noFill/>
-          <a:ln/>
-        </p:spPr>
-        <p:txBody>
-          <a:bodyPr wrap="square" rtlCol="0" anchor="ctr"/>
-          <a:lstStyle/>
-          <a:p>
-            <a:pPr indent="0" marL="0">
-              <a:buNone/>
-            </a:pPr>
-            <a:r>
-              <a:rPr lang="en-US" sz="950" dirty="0">
-                <a:solidFill>
-                  <a:srgbClr val="AAAAAA"/>
-                </a:solidFill>
-                <a:latin typeface="Calibri" pitchFamily="34" charset="0"/>
-                <a:ea typeface="Calibri" pitchFamily="34" charset="-122"/>
-                <a:cs typeface="Calibri" pitchFamily="34" charset="-120"/>
-              </a:rPr>
-              <a:t>Adjustable 1.0×–3.0× via popup slider — live preview</a:t>
-            </a:r>
-            <a:endParaRPr lang="en-US" sz="950" dirty="0"/>
-          </a:p>
-        </p:txBody>
-      </p:sp>
-      <p:sp>
-        <p:nvSpPr>
-          <p:cNvPr id="14" name="Shape 12"/>
-          <p:cNvSpPr/>
-          <p:nvPr/>
-        </p:nvSpPr>
-        <p:spPr>
-          <a:xfrm>
-            <a:off x="182880" y="3328416"/>
-            <a:ext cx="3429000" cy="749808"/>
-          </a:xfrm>
-          <a:prstGeom prst="roundRect">
-            <a:avLst>
-              <a:gd name="adj" fmla="val 12195"/>
-            </a:avLst>
-          </a:prstGeom>
-          <a:solidFill>
-            <a:srgbClr val="FFFFFF">
-              <a:alpha val="6000"/>
-            </a:srgbClr>
-          </a:solidFill>
-          <a:ln w="12700">
-            <a:solidFill>
-              <a:srgbClr val="00B4D8">
-                <a:alpha val="50000"/>
-              </a:srgbClr>
-            </a:solidFill>
-            <a:prstDash val="solid"/>
-          </a:ln>
-        </p:spPr>
-      </p:sp>
-      <p:sp>
-        <p:nvSpPr>
-          <p:cNvPr id="15" name="Shape 13"/>
-          <p:cNvSpPr/>
-          <p:nvPr/>
-        </p:nvSpPr>
-        <p:spPr>
-          <a:xfrm>
-            <a:off x="182880" y="3328416"/>
-            <a:ext cx="36576" cy="749808"/>
-          </a:xfrm>
-          <a:prstGeom prst="rect">
-            <a:avLst/>
-          </a:prstGeom>
-          <a:solidFill>
-            <a:srgbClr val="00B4D8">
-              <a:alpha val="50000"/>
-            </a:srgbClr>
-          </a:solidFill>
-          <a:ln w="12700">
-            <a:solidFill>
-              <a:srgbClr val="00B4D8"/>
-            </a:solidFill>
-            <a:prstDash val="solid"/>
-          </a:ln>
-        </p:spPr>
-      </p:sp>
-      <p:sp>
-        <p:nvSpPr>
-          <p:cNvPr id="16" name="Text 14"/>
-          <p:cNvSpPr/>
-          <p:nvPr/>
-        </p:nvSpPr>
-        <p:spPr>
-          <a:xfrm>
-            <a:off x="292608" y="3419856"/>
-            <a:ext cx="3246120" cy="274320"/>
-          </a:xfrm>
-          <a:prstGeom prst="rect">
-            <a:avLst/>
-          </a:prstGeom>
-          <a:noFill/>
-          <a:ln/>
-        </p:spPr>
-        <p:txBody>
-          <a:bodyPr wrap="square" rtlCol="0" anchor="ctr"/>
-          <a:lstStyle/>
-          <a:p>
-            <a:pPr indent="0" marL="0">
-              <a:buNone/>
-            </a:pPr>
-            <a:r>
-              <a:rPr lang="en-US" sz="1300" b="1" dirty="0">
-                <a:solidFill>
-                  <a:srgbClr val="FFFFFF"/>
-                </a:solidFill>
-                <a:latin typeface="Calibri" pitchFamily="34" charset="0"/>
-                <a:ea typeface="Calibri" pitchFamily="34" charset="-122"/>
-                <a:cs typeface="Calibri" pitchFamily="34" charset="-120"/>
-              </a:rPr>
-              <a:t>High Contrast Themes</a:t>
-            </a:r>
-            <a:pPr indent="0" marL="0">
-              <a:buNone/>
-            </a:pPr>
-            <a:r>
-              <a:rPr lang="en-US" sz="950" b="1" dirty="0">
-                <a:solidFill>
-                  <a:srgbClr val="06D6A0"/>
-                </a:solidFill>
-                <a:latin typeface="Calibri" pitchFamily="34" charset="0"/>
-                <a:ea typeface="Calibri" pitchFamily="34" charset="-122"/>
-                <a:cs typeface="Calibri" pitchFamily="34" charset="-120"/>
-              </a:rPr>
-              <a:t>  ✓ 5.0 / 5</a:t>
-            </a:r>
-            <a:endParaRPr lang="en-US" sz="1300" dirty="0"/>
-          </a:p>
-        </p:txBody>
-      </p:sp>
-      <p:sp>
-        <p:nvSpPr>
-          <p:cNvPr id="17" name="Text 15"/>
-          <p:cNvSpPr/>
-          <p:nvPr/>
-        </p:nvSpPr>
-        <p:spPr>
-          <a:xfrm>
-            <a:off x="292608" y="3712464"/>
-            <a:ext cx="3246120" cy="310896"/>
-          </a:xfrm>
-          <a:prstGeom prst="rect">
-            <a:avLst/>
-          </a:prstGeom>
-          <a:noFill/>
-          <a:ln/>
-        </p:spPr>
-        <p:txBody>
-          <a:bodyPr wrap="square" rtlCol="0" anchor="ctr"/>
-          <a:lstStyle/>
-          <a:p>
-            <a:pPr indent="0" marL="0">
-              <a:buNone/>
-            </a:pPr>
-            <a:r>
-              <a:rPr lang="en-US" sz="950" dirty="0">
-                <a:solidFill>
-                  <a:srgbClr val="AAAAAA"/>
-                </a:solidFill>
-                <a:latin typeface="Calibri" pitchFamily="34" charset="0"/>
-                <a:ea typeface="Calibri" pitchFamily="34" charset="-122"/>
-                <a:cs typeface="Calibri" pitchFamily="34" charset="-120"/>
-              </a:rPr>
-              <a:t>5 themes — Nightsky, Aquatic, Desert, Dusk, Off</a:t>
-            </a:r>
-            <a:endParaRPr lang="en-US" sz="950" dirty="0"/>
-          </a:p>
-        </p:txBody>
-      </p:sp>
-      <p:sp>
-        <p:nvSpPr>
-          <p:cNvPr id="18" name="Shape 16"/>
+          <p:cNvPr id="12" name="Shape 10"/>
           <p:cNvSpPr/>
           <p:nvPr/>
         </p:nvSpPr>
@@ -6621,7 +5189,7 @@
       </p:sp>
       <p:sp>
         <p:nvSpPr>
-          <p:cNvPr id="19" name="Text 17"/>
+          <p:cNvPr id="13" name="Text 11"/>
           <p:cNvSpPr/>
           <p:nvPr/>
         </p:nvSpPr>
@@ -6654,7 +5222,7 @@
                 <a:ea typeface="Calibri" pitchFamily="34" charset="-122"/>
                 <a:cs typeface="Calibri" pitchFamily="34" charset="-120"/>
               </a:rPr>
-              <a:t>Screenshot / GIF — Text Enhancement</a:t>
+              <a:t>Demo Video — Blind-Spot Hints</a:t>
             </a:r>
             <a:endParaRPr lang="en-US" sz="1200" dirty="0"/>
           </a:p>
@@ -6662,7 +5230,7 @@
       </p:sp>
       <p:sp>
         <p:nvSpPr>
-          <p:cNvPr id="20" name="Text 18"/>
+          <p:cNvPr id="14" name="Text 12"/>
           <p:cNvSpPr/>
           <p:nvPr/>
         </p:nvSpPr>
@@ -6695,7 +5263,7 @@
                 <a:ea typeface="Calibri" pitchFamily="34" charset="-122"/>
                 <a:cs typeface="Calibri" pitchFamily="34" charset="-120"/>
               </a:rPr>
-              <a:t>Replace with screenshot or animated GIF</a:t>
+              <a:t>Replace with demo video file</a:t>
             </a:r>
             <a:endParaRPr lang="en-US" sz="900" dirty="0"/>
           </a:p>
@@ -6760,7 +5328,7 @@
         <p:spPr>
           <a:xfrm>
             <a:off x="182880" y="329184"/>
-            <a:ext cx="2011680" cy="256032"/>
+            <a:ext cx="2286000" cy="256032"/>
           </a:xfrm>
           <a:prstGeom prst="roundRect">
             <a:avLst>
@@ -6866,7 +5434,7 @@
                 <a:ea typeface="Calibri" pitchFamily="34" charset="-122"/>
                 <a:cs typeface="Calibri" pitchFamily="34" charset="-120"/>
               </a:rPr>
-              <a:t>AI Paragraph Summary</a:t>
+              <a:t>Text Enhancement — triggered by gaze hold</a:t>
             </a:r>
             <a:endParaRPr lang="en-US" sz="1100" dirty="0"/>
           </a:p>
@@ -6880,146 +5448,12 @@
         </p:nvSpPr>
         <p:spPr>
           <a:xfrm>
-            <a:off x="182880" y="1481328"/>
-            <a:ext cx="3429000" cy="713232"/>
+            <a:off x="182880" y="1499616"/>
+            <a:ext cx="3429000" cy="566928"/>
           </a:xfrm>
           <a:prstGeom prst="roundRect">
             <a:avLst>
-              <a:gd name="adj" fmla="val 12821"/>
-            </a:avLst>
-          </a:prstGeom>
-          <a:solidFill>
-            <a:srgbClr val="00B4D8">
-              <a:alpha val="12000"/>
-            </a:srgbClr>
-          </a:solidFill>
-          <a:ln w="12700">
-            <a:solidFill>
-              <a:srgbClr val="00B4D8">
-                <a:alpha val="90000"/>
-              </a:srgbClr>
-            </a:solidFill>
-            <a:prstDash val="solid"/>
-          </a:ln>
-        </p:spPr>
-      </p:sp>
-      <p:sp>
-        <p:nvSpPr>
-          <p:cNvPr id="7" name="Shape 5"/>
-          <p:cNvSpPr/>
-          <p:nvPr/>
-        </p:nvSpPr>
-        <p:spPr>
-          <a:xfrm>
-            <a:off x="182880" y="1481328"/>
-            <a:ext cx="36576" cy="713232"/>
-          </a:xfrm>
-          <a:prstGeom prst="rect">
-            <a:avLst/>
-          </a:prstGeom>
-          <a:solidFill>
-            <a:srgbClr val="00B4D8"/>
-          </a:solidFill>
-          <a:ln w="12700">
-            <a:solidFill>
-              <a:srgbClr val="00B4D8"/>
-            </a:solidFill>
-            <a:prstDash val="solid"/>
-          </a:ln>
-        </p:spPr>
-      </p:sp>
-      <p:sp>
-        <p:nvSpPr>
-          <p:cNvPr id="8" name="Text 6"/>
-          <p:cNvSpPr/>
-          <p:nvPr/>
-        </p:nvSpPr>
-        <p:spPr>
-          <a:xfrm>
-            <a:off x="292608" y="1554480"/>
-            <a:ext cx="3246120" cy="274320"/>
-          </a:xfrm>
-          <a:prstGeom prst="rect">
-            <a:avLst/>
-          </a:prstGeom>
-          <a:noFill/>
-          <a:ln/>
-        </p:spPr>
-        <p:txBody>
-          <a:bodyPr wrap="square" rtlCol="0" anchor="ctr"/>
-          <a:lstStyle/>
-          <a:p>
-            <a:pPr indent="0" marL="0">
-              <a:buNone/>
-            </a:pPr>
-            <a:r>
-              <a:rPr lang="en-US" sz="1300" b="1" dirty="0">
-                <a:solidFill>
-                  <a:srgbClr val="90E0EF"/>
-                </a:solidFill>
-                <a:latin typeface="Calibri" pitchFamily="34" charset="0"/>
-                <a:ea typeface="Calibri" pitchFamily="34" charset="-122"/>
-                <a:cs typeface="Calibri" pitchFamily="34" charset="-120"/>
-              </a:rPr>
-              <a:t>Qwen2.5-1.5B INT4</a:t>
-            </a:r>
-            <a:endParaRPr lang="en-US" sz="1300" dirty="0"/>
-          </a:p>
-        </p:txBody>
-      </p:sp>
-      <p:sp>
-        <p:nvSpPr>
-          <p:cNvPr id="9" name="Text 7"/>
-          <p:cNvSpPr/>
-          <p:nvPr/>
-        </p:nvSpPr>
-        <p:spPr>
-          <a:xfrm>
-            <a:off x="292608" y="1828800"/>
-            <a:ext cx="3246120" cy="310896"/>
-          </a:xfrm>
-          <a:prstGeom prst="rect">
-            <a:avLst/>
-          </a:prstGeom>
-          <a:noFill/>
-          <a:ln/>
-        </p:spPr>
-        <p:txBody>
-          <a:bodyPr wrap="square" rtlCol="0" anchor="ctr"/>
-          <a:lstStyle/>
-          <a:p>
-            <a:pPr indent="0" marL="0">
-              <a:buNone/>
-            </a:pPr>
-            <a:r>
-              <a:rPr lang="en-US" sz="950" dirty="0">
-                <a:solidFill>
-                  <a:srgbClr val="AAAAAA"/>
-                </a:solidFill>
-                <a:latin typeface="Calibri" pitchFamily="34" charset="0"/>
-                <a:ea typeface="Calibri" pitchFamily="34" charset="-122"/>
-                <a:cs typeface="Calibri" pitchFamily="34" charset="-120"/>
-              </a:rPr>
-              <a:t>On-device · No cloud · No API fees · Privacy-first</a:t>
-            </a:r>
-            <a:endParaRPr lang="en-US" sz="950" dirty="0"/>
-          </a:p>
-        </p:txBody>
-      </p:sp>
-      <p:sp>
-        <p:nvSpPr>
-          <p:cNvPr id="10" name="Shape 8"/>
-          <p:cNvSpPr/>
-          <p:nvPr/>
-        </p:nvSpPr>
-        <p:spPr>
-          <a:xfrm>
-            <a:off x="182880" y="2286000"/>
-            <a:ext cx="3429000" cy="713232"/>
-          </a:xfrm>
-          <a:prstGeom prst="roundRect">
-            <a:avLst>
-              <a:gd name="adj" fmla="val 12821"/>
+              <a:gd name="adj" fmla="val 16129"/>
             </a:avLst>
           </a:prstGeom>
           <a:solidFill>
@@ -7039,14 +5473,14 @@
       </p:sp>
       <p:sp>
         <p:nvSpPr>
-          <p:cNvPr id="11" name="Shape 9"/>
-          <p:cNvSpPr/>
-          <p:nvPr/>
-        </p:nvSpPr>
-        <p:spPr>
-          <a:xfrm>
-            <a:off x="182880" y="2286000"/>
-            <a:ext cx="36576" cy="713232"/>
+          <p:cNvPr id="7" name="Shape 5"/>
+          <p:cNvSpPr/>
+          <p:nvPr/>
+        </p:nvSpPr>
+        <p:spPr>
+          <a:xfrm>
+            <a:off x="182880" y="1499616"/>
+            <a:ext cx="36576" cy="566928"/>
           </a:xfrm>
           <a:prstGeom prst="rect">
             <a:avLst/>
@@ -7066,14 +5500,14 @@
       </p:sp>
       <p:sp>
         <p:nvSpPr>
-          <p:cNvPr id="12" name="Text 10"/>
-          <p:cNvSpPr/>
-          <p:nvPr/>
-        </p:nvSpPr>
-        <p:spPr>
-          <a:xfrm>
-            <a:off x="292608" y="2359152"/>
-            <a:ext cx="3246120" cy="274320"/>
+          <p:cNvPr id="8" name="Text 6"/>
+          <p:cNvSpPr/>
+          <p:nvPr/>
+        </p:nvSpPr>
+        <p:spPr>
+          <a:xfrm>
+            <a:off x="347472" y="1655064"/>
+            <a:ext cx="3191256" cy="256032"/>
           </a:xfrm>
           <a:prstGeom prst="rect">
             <a:avLst/>
@@ -7097,7 +5531,7 @@
                 <a:ea typeface="Calibri" pitchFamily="34" charset="-122"/>
                 <a:cs typeface="Calibri" pitchFamily="34" charset="-120"/>
               </a:rPr>
-              <a:t>⚡ GPU 0.85s · CPU 1.32s</a:t>
+              <a:t>Bold &amp; Darken</a:t>
             </a:r>
             <a:endParaRPr lang="en-US" sz="1300" dirty="0"/>
           </a:p>
@@ -7105,57 +5539,18 @@
       </p:sp>
       <p:sp>
         <p:nvSpPr>
-          <p:cNvPr id="13" name="Text 11"/>
-          <p:cNvSpPr/>
-          <p:nvPr/>
-        </p:nvSpPr>
-        <p:spPr>
-          <a:xfrm>
-            <a:off x="292608" y="2633472"/>
-            <a:ext cx="3246120" cy="310896"/>
-          </a:xfrm>
-          <a:prstGeom prst="rect">
-            <a:avLst/>
-          </a:prstGeom>
-          <a:noFill/>
-          <a:ln/>
-        </p:spPr>
-        <p:txBody>
-          <a:bodyPr wrap="square" rtlCol="0" anchor="ctr"/>
-          <a:lstStyle/>
-          <a:p>
-            <a:pPr indent="0" marL="0">
-              <a:buNone/>
-            </a:pPr>
-            <a:r>
-              <a:rPr lang="en-US" sz="950" dirty="0">
-                <a:solidFill>
-                  <a:srgbClr val="AAAAAA"/>
-                </a:solidFill>
-                <a:latin typeface="Calibri" pitchFamily="34" charset="0"/>
-                <a:ea typeface="Calibri" pitchFamily="34" charset="-122"/>
-                <a:cs typeface="Calibri" pitchFamily="34" charset="-120"/>
-              </a:rPr>
-              <a:t>Intel Panther Lake benchmark — meets &lt;1s target on GPU</a:t>
-            </a:r>
-            <a:endParaRPr lang="en-US" sz="950" dirty="0"/>
-          </a:p>
-        </p:txBody>
-      </p:sp>
-      <p:sp>
-        <p:nvSpPr>
-          <p:cNvPr id="14" name="Shape 12"/>
-          <p:cNvSpPr/>
-          <p:nvPr/>
-        </p:nvSpPr>
-        <p:spPr>
-          <a:xfrm>
-            <a:off x="182880" y="3090672"/>
-            <a:ext cx="3429000" cy="713232"/>
+          <p:cNvPr id="9" name="Shape 7"/>
+          <p:cNvSpPr/>
+          <p:nvPr/>
+        </p:nvSpPr>
+        <p:spPr>
+          <a:xfrm>
+            <a:off x="182880" y="2157984"/>
+            <a:ext cx="3429000" cy="566928"/>
           </a:xfrm>
           <a:prstGeom prst="roundRect">
             <a:avLst>
-              <a:gd name="adj" fmla="val 12821"/>
+              <a:gd name="adj" fmla="val 16129"/>
             </a:avLst>
           </a:prstGeom>
           <a:solidFill>
@@ -7175,14 +5570,14 @@
       </p:sp>
       <p:sp>
         <p:nvSpPr>
-          <p:cNvPr id="15" name="Shape 13"/>
-          <p:cNvSpPr/>
-          <p:nvPr/>
-        </p:nvSpPr>
-        <p:spPr>
-          <a:xfrm>
-            <a:off x="182880" y="3090672"/>
-            <a:ext cx="36576" cy="713232"/>
+          <p:cNvPr id="10" name="Shape 8"/>
+          <p:cNvSpPr/>
+          <p:nvPr/>
+        </p:nvSpPr>
+        <p:spPr>
+          <a:xfrm>
+            <a:off x="182880" y="2157984"/>
+            <a:ext cx="36576" cy="566928"/>
           </a:xfrm>
           <a:prstGeom prst="rect">
             <a:avLst/>
@@ -7202,14 +5597,14 @@
       </p:sp>
       <p:sp>
         <p:nvSpPr>
-          <p:cNvPr id="16" name="Text 14"/>
-          <p:cNvSpPr/>
-          <p:nvPr/>
-        </p:nvSpPr>
-        <p:spPr>
-          <a:xfrm>
-            <a:off x="292608" y="3163824"/>
-            <a:ext cx="3246120" cy="274320"/>
+          <p:cNvPr id="11" name="Text 9"/>
+          <p:cNvSpPr/>
+          <p:nvPr/>
+        </p:nvSpPr>
+        <p:spPr>
+          <a:xfrm>
+            <a:off x="347472" y="2313432"/>
+            <a:ext cx="3191256" cy="256032"/>
           </a:xfrm>
           <a:prstGeom prst="rect">
             <a:avLst/>
@@ -7233,7 +5628,7 @@
                 <a:ea typeface="Calibri" pitchFamily="34" charset="-122"/>
                 <a:cs typeface="Calibri" pitchFamily="34" charset="-120"/>
               </a:rPr>
-              <a:t>Click-to-Reveal</a:t>
+              <a:t>Font Enlargement</a:t>
             </a:r>
             <a:endParaRPr lang="en-US" sz="1300" dirty="0"/>
           </a:p>
@@ -7241,68 +5636,29 @@
       </p:sp>
       <p:sp>
         <p:nvSpPr>
-          <p:cNvPr id="17" name="Text 15"/>
-          <p:cNvSpPr/>
-          <p:nvPr/>
-        </p:nvSpPr>
-        <p:spPr>
-          <a:xfrm>
-            <a:off x="292608" y="3438144"/>
-            <a:ext cx="3246120" cy="310896"/>
-          </a:xfrm>
-          <a:prstGeom prst="rect">
-            <a:avLst/>
-          </a:prstGeom>
-          <a:noFill/>
-          <a:ln/>
-        </p:spPr>
-        <p:txBody>
-          <a:bodyPr wrap="square" rtlCol="0" anchor="ctr"/>
-          <a:lstStyle/>
-          <a:p>
-            <a:pPr indent="0" marL="0">
-              <a:buNone/>
-            </a:pPr>
-            <a:r>
-              <a:rPr lang="en-US" sz="950" dirty="0">
-                <a:solidFill>
-                  <a:srgbClr val="AAAAAA"/>
-                </a:solidFill>
-                <a:latin typeface="Calibri" pitchFamily="34" charset="0"/>
-                <a:ea typeface="Calibri" pitchFamily="34" charset="-122"/>
-                <a:cs typeface="Calibri" pitchFamily="34" charset="-120"/>
-              </a:rPr>
-              <a:t>Hover 1.5s → "點擊摘要" tag → click to replace text with bullet summary</a:t>
-            </a:r>
-            <a:endParaRPr lang="en-US" sz="950" dirty="0"/>
-          </a:p>
-        </p:txBody>
-      </p:sp>
-      <p:sp>
-        <p:nvSpPr>
-          <p:cNvPr id="18" name="Shape 16"/>
-          <p:cNvSpPr/>
-          <p:nvPr/>
-        </p:nvSpPr>
-        <p:spPr>
-          <a:xfrm>
-            <a:off x="182880" y="3895344"/>
-            <a:ext cx="3429000" cy="694944"/>
+          <p:cNvPr id="12" name="Shape 10"/>
+          <p:cNvSpPr/>
+          <p:nvPr/>
+        </p:nvSpPr>
+        <p:spPr>
+          <a:xfrm>
+            <a:off x="182880" y="2816352"/>
+            <a:ext cx="3429000" cy="566928"/>
           </a:xfrm>
           <a:prstGeom prst="roundRect">
             <a:avLst>
-              <a:gd name="adj" fmla="val 13158"/>
+              <a:gd name="adj" fmla="val 16129"/>
             </a:avLst>
           </a:prstGeom>
           <a:solidFill>
-            <a:srgbClr val="06D6A0">
-              <a:alpha val="12000"/>
+            <a:srgbClr val="FFFFFF">
+              <a:alpha val="6000"/>
             </a:srgbClr>
           </a:solidFill>
           <a:ln w="12700">
             <a:solidFill>
-              <a:srgbClr val="06D6A0">
-                <a:alpha val="60000"/>
+              <a:srgbClr val="00B4D8">
+                <a:alpha val="50000"/>
               </a:srgbClr>
             </a:solidFill>
             <a:prstDash val="solid"/>
@@ -7311,14 +5667,41 @@
       </p:sp>
       <p:sp>
         <p:nvSpPr>
-          <p:cNvPr id="19" name="Text 17"/>
-          <p:cNvSpPr/>
-          <p:nvPr/>
-        </p:nvSpPr>
-        <p:spPr>
-          <a:xfrm>
-            <a:off x="292608" y="3959352"/>
-            <a:ext cx="3246120" cy="274320"/>
+          <p:cNvPr id="13" name="Shape 11"/>
+          <p:cNvSpPr/>
+          <p:nvPr/>
+        </p:nvSpPr>
+        <p:spPr>
+          <a:xfrm>
+            <a:off x="182880" y="2816352"/>
+            <a:ext cx="36576" cy="566928"/>
+          </a:xfrm>
+          <a:prstGeom prst="rect">
+            <a:avLst/>
+          </a:prstGeom>
+          <a:solidFill>
+            <a:srgbClr val="00B4D8">
+              <a:alpha val="50000"/>
+            </a:srgbClr>
+          </a:solidFill>
+          <a:ln w="12700">
+            <a:solidFill>
+              <a:srgbClr val="00B4D8"/>
+            </a:solidFill>
+            <a:prstDash val="solid"/>
+          </a:ln>
+        </p:spPr>
+      </p:sp>
+      <p:sp>
+        <p:nvSpPr>
+          <p:cNvPr id="14" name="Text 12"/>
+          <p:cNvSpPr/>
+          <p:nvPr/>
+        </p:nvSpPr>
+        <p:spPr>
+          <a:xfrm>
+            <a:off x="347472" y="2971800"/>
+            <a:ext cx="3191256" cy="256032"/>
           </a:xfrm>
           <a:prstGeom prst="rect">
             <a:avLst/>
@@ -7334,62 +5717,37 @@
               <a:buNone/>
             </a:pPr>
             <a:r>
-              <a:rPr lang="en-US" sz="1200" b="1" dirty="0">
-                <a:solidFill>
-                  <a:srgbClr val="06D6A0"/>
+              <a:rPr lang="en-US" sz="1300" b="1" dirty="0">
+                <a:solidFill>
+                  <a:srgbClr val="FFFFFF"/>
                 </a:solidFill>
                 <a:latin typeface="Calibri" pitchFamily="34" charset="0"/>
                 <a:ea typeface="Calibri" pitchFamily="34" charset="-122"/>
                 <a:cs typeface="Calibri" pitchFamily="34" charset="-120"/>
               </a:rPr>
-              <a:t>AI Summary validated — 4.3 / 5</a:t>
-            </a:r>
-            <a:endParaRPr lang="en-US" sz="1200" dirty="0"/>
-          </a:p>
-        </p:txBody>
-      </p:sp>
-      <p:sp>
-        <p:nvSpPr>
-          <p:cNvPr id="20" name="Text 18"/>
-          <p:cNvSpPr/>
-          <p:nvPr/>
-        </p:nvSpPr>
-        <p:spPr>
-          <a:xfrm>
-            <a:off x="292608" y="4233672"/>
-            <a:ext cx="3246120" cy="274320"/>
-          </a:xfrm>
-          <a:prstGeom prst="rect">
-            <a:avLst/>
-          </a:prstGeom>
-          <a:noFill/>
-          <a:ln/>
-        </p:spPr>
-        <p:txBody>
-          <a:bodyPr wrap="square" rtlCol="0" anchor="ctr"/>
-          <a:lstStyle/>
-          <a:p>
+              <a:t>High Contrast Themes</a:t>
+            </a:r>
             <a:pPr indent="0" marL="0">
               <a:buNone/>
             </a:pPr>
             <a:r>
-              <a:rPr lang="en-US" sz="900" dirty="0">
-                <a:solidFill>
-                  <a:srgbClr val="AAAAAA"/>
+              <a:rPr lang="en-US" sz="900" b="1" dirty="0">
+                <a:solidFill>
+                  <a:srgbClr val="06D6A0"/>
                 </a:solidFill>
                 <a:latin typeface="Calibri" pitchFamily="34" charset="0"/>
                 <a:ea typeface="Calibri" pitchFamily="34" charset="-122"/>
                 <a:cs typeface="Calibri" pitchFamily="34" charset="-120"/>
               </a:rPr>
-              <a:t>Helps absorb content · Accurate key points · Faster comprehension</a:t>
-            </a:r>
-            <a:endParaRPr lang="en-US" sz="900" dirty="0"/>
-          </a:p>
-        </p:txBody>
-      </p:sp>
-      <p:sp>
-        <p:nvSpPr>
-          <p:cNvPr id="21" name="Shape 19"/>
+              <a:t>  User Feedback</a:t>
+            </a:r>
+            <a:endParaRPr lang="en-US" sz="1300" dirty="0"/>
+          </a:p>
+        </p:txBody>
+      </p:sp>
+      <p:sp>
+        <p:nvSpPr>
+          <p:cNvPr id="15" name="Shape 13"/>
           <p:cNvSpPr/>
           <p:nvPr/>
         </p:nvSpPr>
@@ -7420,7 +5778,7 @@
       </p:sp>
       <p:sp>
         <p:nvSpPr>
-          <p:cNvPr id="22" name="Text 20"/>
+          <p:cNvPr id="16" name="Text 14"/>
           <p:cNvSpPr/>
           <p:nvPr/>
         </p:nvSpPr>
@@ -7453,7 +5811,7 @@
                 <a:ea typeface="Calibri" pitchFamily="34" charset="-122"/>
                 <a:cs typeface="Calibri" pitchFamily="34" charset="-120"/>
               </a:rPr>
-              <a:t>Demo Video — AI Summary</a:t>
+              <a:t>Screenshot / GIF — Text Enhancement</a:t>
             </a:r>
             <a:endParaRPr lang="en-US" sz="1200" dirty="0"/>
           </a:p>
@@ -7461,7 +5819,7 @@
       </p:sp>
       <p:sp>
         <p:nvSpPr>
-          <p:cNvPr id="23" name="Text 21"/>
+          <p:cNvPr id="17" name="Text 15"/>
           <p:cNvSpPr/>
           <p:nvPr/>
         </p:nvSpPr>
@@ -7494,7 +5852,7 @@
                 <a:ea typeface="Calibri" pitchFamily="34" charset="-122"/>
                 <a:cs typeface="Calibri" pitchFamily="34" charset="-120"/>
               </a:rPr>
-              <a:t>Replace with demo video file</a:t>
+              <a:t>Replace with screenshot or animated GIF</a:t>
             </a:r>
             <a:endParaRPr lang="en-US" sz="900" dirty="0"/>
           </a:p>
@@ -7511,13 +5869,6 @@
 <file path=ppt/slides/slide7.xml><?xml version="1.0" encoding="utf-8"?>
 <p:sld xmlns:a="http://schemas.openxmlformats.org/drawingml/2006/main" xmlns:r="http://schemas.openxmlformats.org/officeDocument/2006/relationships" xmlns:p="http://schemas.openxmlformats.org/presentationml/2006/main">
   <p:cSld name="Slide 7">
-    <p:bg>
-      <p:bgPr>
-        <a:solidFill>
-          <a:srgbClr val="0D1F3C"/>
-        </a:solidFill>
-      </p:bgPr>
-    </p:bg>
     <p:spTree>
       <p:nvGrpSpPr>
         <p:cNvPr id="1" name=""/>
@@ -7534,14 +5885,39 @@
       </p:grpSpPr>
       <p:sp>
         <p:nvSpPr>
-          <p:cNvPr id="2" name="Text 0"/>
-          <p:cNvSpPr/>
-          <p:nvPr/>
-        </p:nvSpPr>
-        <p:spPr>
-          <a:xfrm>
-            <a:off x="3566160" y="1261872"/>
-            <a:ext cx="2011680" cy="256032"/>
+          <p:cNvPr id="2" name="Shape 0"/>
+          <p:cNvSpPr/>
+          <p:nvPr/>
+        </p:nvSpPr>
+        <p:spPr>
+          <a:xfrm>
+            <a:off x="0" y="0"/>
+            <a:ext cx="3840480" cy="5143500"/>
+          </a:xfrm>
+          <a:prstGeom prst="rect">
+            <a:avLst/>
+          </a:prstGeom>
+          <a:solidFill>
+            <a:srgbClr val="0D1F3C"/>
+          </a:solidFill>
+          <a:ln w="12700">
+            <a:solidFill>
+              <a:srgbClr val="0D1F3C"/>
+            </a:solidFill>
+            <a:prstDash val="solid"/>
+          </a:ln>
+        </p:spPr>
+      </p:sp>
+      <p:sp>
+        <p:nvSpPr>
+          <p:cNvPr id="3" name="Text 1"/>
+          <p:cNvSpPr/>
+          <p:nvPr/>
+        </p:nvSpPr>
+        <p:spPr>
+          <a:xfrm>
+            <a:off x="182880" y="329184"/>
+            <a:ext cx="2286000" cy="256032"/>
           </a:xfrm>
           <a:prstGeom prst="roundRect">
             <a:avLst>
@@ -7577,30 +5953,30 @@
       </p:sp>
       <p:sp>
         <p:nvSpPr>
-          <p:cNvPr id="3" name="Text 1"/>
-          <p:cNvSpPr/>
-          <p:nvPr/>
-        </p:nvSpPr>
-        <p:spPr>
-          <a:xfrm>
-            <a:off x="457200" y="1591056"/>
-            <a:ext cx="8229600" cy="1280160"/>
-          </a:xfrm>
-          <a:prstGeom prst="rect">
-            <a:avLst/>
-          </a:prstGeom>
-          <a:noFill/>
-          <a:ln/>
-        </p:spPr>
-        <p:txBody>
-          <a:bodyPr wrap="square" rtlCol="0" anchor="ctr"/>
-          <a:lstStyle/>
-          <a:p>
-            <a:pPr algn="ctr" indent="0" marL="0">
-              <a:buNone/>
-            </a:pPr>
-            <a:r>
-              <a:rPr lang="en-US" sz="5200" b="1" dirty="0">
+          <p:cNvPr id="4" name="Text 2"/>
+          <p:cNvSpPr/>
+          <p:nvPr/>
+        </p:nvSpPr>
+        <p:spPr>
+          <a:xfrm>
+            <a:off x="182880" y="676656"/>
+            <a:ext cx="3429000" cy="475488"/>
+          </a:xfrm>
+          <a:prstGeom prst="rect">
+            <a:avLst/>
+          </a:prstGeom>
+          <a:noFill/>
+          <a:ln/>
+        </p:spPr>
+        <p:txBody>
+          <a:bodyPr wrap="square" rtlCol="0" anchor="ctr"/>
+          <a:lstStyle/>
+          <a:p>
+            <a:pPr indent="0" marL="0">
+              <a:buNone/>
+            </a:pPr>
+            <a:r>
+              <a:rPr lang="en-US" sz="2600" b="1" dirty="0">
                 <a:solidFill>
                   <a:srgbClr val="FFFFFF"/>
                 </a:solidFill>
@@ -7608,38 +5984,38 @@
                 <a:ea typeface="Cambria" pitchFamily="34" charset="-122"/>
                 <a:cs typeface="Cambria" pitchFamily="34" charset="-120"/>
               </a:rPr>
-              <a:t>On-Device AI Stack</a:t>
-            </a:r>
-            <a:endParaRPr lang="en-US" sz="5200" dirty="0"/>
-          </a:p>
-        </p:txBody>
-      </p:sp>
-      <p:sp>
-        <p:nvSpPr>
-          <p:cNvPr id="4" name="Text 2"/>
-          <p:cNvSpPr/>
-          <p:nvPr/>
-        </p:nvSpPr>
-        <p:spPr>
-          <a:xfrm>
-            <a:off x="1371600" y="2944368"/>
-            <a:ext cx="6400800" cy="365760"/>
-          </a:xfrm>
-          <a:prstGeom prst="rect">
-            <a:avLst/>
-          </a:prstGeom>
-          <a:noFill/>
-          <a:ln/>
-        </p:spPr>
-        <p:txBody>
-          <a:bodyPr wrap="square" rtlCol="0" anchor="ctr"/>
-          <a:lstStyle/>
-          <a:p>
-            <a:pPr algn="ctr" indent="0" marL="0">
-              <a:buNone/>
-            </a:pPr>
-            <a:r>
-              <a:rPr lang="en-US" sz="1400" dirty="0">
+              <a:t>Visible Area</a:t>
+            </a:r>
+            <a:endParaRPr lang="en-US" sz="2600" dirty="0"/>
+          </a:p>
+        </p:txBody>
+      </p:sp>
+      <p:sp>
+        <p:nvSpPr>
+          <p:cNvPr id="5" name="Text 3"/>
+          <p:cNvSpPr/>
+          <p:nvPr/>
+        </p:nvSpPr>
+        <p:spPr>
+          <a:xfrm>
+            <a:off x="182880" y="1133856"/>
+            <a:ext cx="3429000" cy="256032"/>
+          </a:xfrm>
+          <a:prstGeom prst="rect">
+            <a:avLst/>
+          </a:prstGeom>
+          <a:noFill/>
+          <a:ln/>
+        </p:spPr>
+        <p:txBody>
+          <a:bodyPr wrap="square" rtlCol="0" anchor="ctr"/>
+          <a:lstStyle/>
+          <a:p>
+            <a:pPr indent="0" marL="0">
+              <a:buNone/>
+            </a:pPr>
+            <a:r>
+              <a:rPr lang="en-US" sz="1100" dirty="0">
                 <a:solidFill>
                   <a:srgbClr val="AAAAAA"/>
                 </a:solidFill>
@@ -7647,9 +6023,328 @@
                 <a:ea typeface="Calibri" pitchFamily="34" charset="-122"/>
                 <a:cs typeface="Calibri" pitchFamily="34" charset="-120"/>
               </a:rPr>
-              <a:t>All inference runs locally — no API, no cloud, no data leaves the laptop</a:t>
-            </a:r>
-            <a:endParaRPr lang="en-US" sz="1400" dirty="0"/>
+              <a:t>AI Paragraph Summary</a:t>
+            </a:r>
+            <a:endParaRPr lang="en-US" sz="1100" dirty="0"/>
+          </a:p>
+        </p:txBody>
+      </p:sp>
+      <p:sp>
+        <p:nvSpPr>
+          <p:cNvPr id="6" name="Shape 4"/>
+          <p:cNvSpPr/>
+          <p:nvPr/>
+        </p:nvSpPr>
+        <p:spPr>
+          <a:xfrm>
+            <a:off x="182880" y="1499616"/>
+            <a:ext cx="3429000" cy="566928"/>
+          </a:xfrm>
+          <a:prstGeom prst="roundRect">
+            <a:avLst>
+              <a:gd name="adj" fmla="val 16129"/>
+            </a:avLst>
+          </a:prstGeom>
+          <a:solidFill>
+            <a:srgbClr val="00B4D8">
+              <a:alpha val="12000"/>
+            </a:srgbClr>
+          </a:solidFill>
+          <a:ln w="12700">
+            <a:solidFill>
+              <a:srgbClr val="00B4D8">
+                <a:alpha val="90000"/>
+              </a:srgbClr>
+            </a:solidFill>
+            <a:prstDash val="solid"/>
+          </a:ln>
+        </p:spPr>
+      </p:sp>
+      <p:sp>
+        <p:nvSpPr>
+          <p:cNvPr id="7" name="Shape 5"/>
+          <p:cNvSpPr/>
+          <p:nvPr/>
+        </p:nvSpPr>
+        <p:spPr>
+          <a:xfrm>
+            <a:off x="182880" y="1499616"/>
+            <a:ext cx="36576" cy="566928"/>
+          </a:xfrm>
+          <a:prstGeom prst="rect">
+            <a:avLst/>
+          </a:prstGeom>
+          <a:solidFill>
+            <a:srgbClr val="00B4D8"/>
+          </a:solidFill>
+          <a:ln w="12700">
+            <a:solidFill>
+              <a:srgbClr val="00B4D8"/>
+            </a:solidFill>
+            <a:prstDash val="solid"/>
+          </a:ln>
+        </p:spPr>
+      </p:sp>
+      <p:sp>
+        <p:nvSpPr>
+          <p:cNvPr id="8" name="Text 6"/>
+          <p:cNvSpPr/>
+          <p:nvPr/>
+        </p:nvSpPr>
+        <p:spPr>
+          <a:xfrm>
+            <a:off x="347472" y="1655064"/>
+            <a:ext cx="3191256" cy="256032"/>
+          </a:xfrm>
+          <a:prstGeom prst="rect">
+            <a:avLst/>
+          </a:prstGeom>
+          <a:noFill/>
+          <a:ln/>
+        </p:spPr>
+        <p:txBody>
+          <a:bodyPr wrap="square" rtlCol="0" anchor="ctr"/>
+          <a:lstStyle/>
+          <a:p>
+            <a:pPr indent="0" marL="0">
+              <a:buNone/>
+            </a:pPr>
+            <a:r>
+              <a:rPr lang="en-US" sz="1300" b="1" dirty="0">
+                <a:solidFill>
+                  <a:srgbClr val="90E0EF"/>
+                </a:solidFill>
+                <a:latin typeface="Calibri" pitchFamily="34" charset="0"/>
+                <a:ea typeface="Calibri" pitchFamily="34" charset="-122"/>
+                <a:cs typeface="Calibri" pitchFamily="34" charset="-120"/>
+              </a:rPr>
+              <a:t>Paragraph Summary</a:t>
+            </a:r>
+            <a:pPr indent="0" marL="0">
+              <a:buNone/>
+            </a:pPr>
+            <a:r>
+              <a:rPr lang="en-US" sz="900" b="1" dirty="0">
+                <a:solidFill>
+                  <a:srgbClr val="06D6A0"/>
+                </a:solidFill>
+                <a:latin typeface="Calibri" pitchFamily="34" charset="0"/>
+                <a:ea typeface="Calibri" pitchFamily="34" charset="-122"/>
+                <a:cs typeface="Calibri" pitchFamily="34" charset="-120"/>
+              </a:rPr>
+              <a:t>  User Feedback</a:t>
+            </a:r>
+            <a:endParaRPr lang="en-US" sz="1300" dirty="0"/>
+          </a:p>
+        </p:txBody>
+      </p:sp>
+      <p:sp>
+        <p:nvSpPr>
+          <p:cNvPr id="9" name="Shape 7"/>
+          <p:cNvSpPr/>
+          <p:nvPr/>
+        </p:nvSpPr>
+        <p:spPr>
+          <a:xfrm>
+            <a:off x="182880" y="2157984"/>
+            <a:ext cx="3429000" cy="566928"/>
+          </a:xfrm>
+          <a:prstGeom prst="roundRect">
+            <a:avLst>
+              <a:gd name="adj" fmla="val 16129"/>
+            </a:avLst>
+          </a:prstGeom>
+          <a:solidFill>
+            <a:srgbClr val="FFFFFF">
+              <a:alpha val="6000"/>
+            </a:srgbClr>
+          </a:solidFill>
+          <a:ln w="12700">
+            <a:solidFill>
+              <a:srgbClr val="00B4D8">
+                <a:alpha val="50000"/>
+              </a:srgbClr>
+            </a:solidFill>
+            <a:prstDash val="solid"/>
+          </a:ln>
+        </p:spPr>
+      </p:sp>
+      <p:sp>
+        <p:nvSpPr>
+          <p:cNvPr id="10" name="Shape 8"/>
+          <p:cNvSpPr/>
+          <p:nvPr/>
+        </p:nvSpPr>
+        <p:spPr>
+          <a:xfrm>
+            <a:off x="182880" y="2157984"/>
+            <a:ext cx="36576" cy="566928"/>
+          </a:xfrm>
+          <a:prstGeom prst="rect">
+            <a:avLst/>
+          </a:prstGeom>
+          <a:solidFill>
+            <a:srgbClr val="00B4D8">
+              <a:alpha val="50000"/>
+            </a:srgbClr>
+          </a:solidFill>
+          <a:ln w="12700">
+            <a:solidFill>
+              <a:srgbClr val="00B4D8"/>
+            </a:solidFill>
+            <a:prstDash val="solid"/>
+          </a:ln>
+        </p:spPr>
+      </p:sp>
+      <p:sp>
+        <p:nvSpPr>
+          <p:cNvPr id="11" name="Text 9"/>
+          <p:cNvSpPr/>
+          <p:nvPr/>
+        </p:nvSpPr>
+        <p:spPr>
+          <a:xfrm>
+            <a:off x="347472" y="2313432"/>
+            <a:ext cx="3191256" cy="256032"/>
+          </a:xfrm>
+          <a:prstGeom prst="rect">
+            <a:avLst/>
+          </a:prstGeom>
+          <a:noFill/>
+          <a:ln/>
+        </p:spPr>
+        <p:txBody>
+          <a:bodyPr wrap="square" rtlCol="0" anchor="ctr"/>
+          <a:lstStyle/>
+          <a:p>
+            <a:pPr indent="0" marL="0">
+              <a:buNone/>
+            </a:pPr>
+            <a:r>
+              <a:rPr lang="en-US" sz="1300" b="1" dirty="0">
+                <a:solidFill>
+                  <a:srgbClr val="FFFFFF"/>
+                </a:solidFill>
+                <a:latin typeface="Calibri" pitchFamily="34" charset="0"/>
+                <a:ea typeface="Calibri" pitchFamily="34" charset="-122"/>
+                <a:cs typeface="Calibri" pitchFamily="34" charset="-120"/>
+              </a:rPr>
+              <a:t>Click-to-Reveal</a:t>
+            </a:r>
+            <a:endParaRPr lang="en-US" sz="1300" dirty="0"/>
+          </a:p>
+        </p:txBody>
+      </p:sp>
+      <p:sp>
+        <p:nvSpPr>
+          <p:cNvPr id="12" name="Shape 10"/>
+          <p:cNvSpPr/>
+          <p:nvPr/>
+        </p:nvSpPr>
+        <p:spPr>
+          <a:xfrm>
+            <a:off x="4069080" y="475488"/>
+            <a:ext cx="4846320" cy="4206240"/>
+          </a:xfrm>
+          <a:prstGeom prst="roundRect">
+            <a:avLst>
+              <a:gd name="adj" fmla="val 4348"/>
+            </a:avLst>
+          </a:prstGeom>
+          <a:solidFill>
+            <a:srgbClr val="00B4D8">
+              <a:alpha val="4000"/>
+            </a:srgbClr>
+          </a:solidFill>
+          <a:ln w="12700">
+            <a:solidFill>
+              <a:srgbClr val="00B4D8">
+                <a:alpha val="45000"/>
+              </a:srgbClr>
+            </a:solidFill>
+            <a:prstDash val="dash"/>
+          </a:ln>
+        </p:spPr>
+      </p:sp>
+      <p:sp>
+        <p:nvSpPr>
+          <p:cNvPr id="13" name="Text 11"/>
+          <p:cNvSpPr/>
+          <p:nvPr/>
+        </p:nvSpPr>
+        <p:spPr>
+          <a:xfrm>
+            <a:off x="4069080" y="2103120"/>
+            <a:ext cx="4846320" cy="274320"/>
+          </a:xfrm>
+          <a:prstGeom prst="rect">
+            <a:avLst/>
+          </a:prstGeom>
+          <a:noFill/>
+          <a:ln/>
+        </p:spPr>
+        <p:txBody>
+          <a:bodyPr wrap="square" rtlCol="0" anchor="ctr"/>
+          <a:lstStyle/>
+          <a:p>
+            <a:pPr algn="ctr" indent="0" marL="0">
+              <a:buNone/>
+            </a:pPr>
+            <a:r>
+              <a:rPr lang="en-US" sz="1200" b="1" dirty="0">
+                <a:solidFill>
+                  <a:srgbClr val="00B4D8">
+                    <a:alpha val="65000"/>
+                  </a:srgbClr>
+                </a:solidFill>
+                <a:latin typeface="Calibri" pitchFamily="34" charset="0"/>
+                <a:ea typeface="Calibri" pitchFamily="34" charset="-122"/>
+                <a:cs typeface="Calibri" pitchFamily="34" charset="-120"/>
+              </a:rPr>
+              <a:t>Demo Video — AI Summary</a:t>
+            </a:r>
+            <a:endParaRPr lang="en-US" sz="1200" dirty="0"/>
+          </a:p>
+        </p:txBody>
+      </p:sp>
+      <p:sp>
+        <p:nvSpPr>
+          <p:cNvPr id="14" name="Text 12"/>
+          <p:cNvSpPr/>
+          <p:nvPr/>
+        </p:nvSpPr>
+        <p:spPr>
+          <a:xfrm>
+            <a:off x="4069080" y="2423160"/>
+            <a:ext cx="4846320" cy="201168"/>
+          </a:xfrm>
+          <a:prstGeom prst="rect">
+            <a:avLst/>
+          </a:prstGeom>
+          <a:noFill/>
+          <a:ln/>
+        </p:spPr>
+        <p:txBody>
+          <a:bodyPr wrap="square" rtlCol="0" anchor="ctr"/>
+          <a:lstStyle/>
+          <a:p>
+            <a:pPr algn="ctr" indent="0" marL="0">
+              <a:buNone/>
+            </a:pPr>
+            <a:r>
+              <a:rPr lang="en-US" sz="900" dirty="0">
+                <a:solidFill>
+                  <a:srgbClr val="00B4D8">
+                    <a:alpha val="40000"/>
+                  </a:srgbClr>
+                </a:solidFill>
+                <a:latin typeface="Calibri" pitchFamily="34" charset="0"/>
+                <a:ea typeface="Calibri" pitchFamily="34" charset="-122"/>
+                <a:cs typeface="Calibri" pitchFamily="34" charset="-120"/>
+              </a:rPr>
+              <a:t>Replace with demo video file</a:t>
+            </a:r>
+            <a:endParaRPr lang="en-US" sz="900" dirty="0"/>
           </a:p>
         </p:txBody>
       </p:sp>
@@ -7693,8 +6388,8 @@
         </p:nvSpPr>
         <p:spPr>
           <a:xfrm>
-            <a:off x="3566160" y="237744"/>
-            <a:ext cx="2011680" cy="256032"/>
+            <a:off x="3429000" y="201168"/>
+            <a:ext cx="2286000" cy="256032"/>
           </a:xfrm>
           <a:prstGeom prst="roundRect">
             <a:avLst>
@@ -7722,7 +6417,7 @@
                 <a:ea typeface="Calibri" pitchFamily="34" charset="-122"/>
                 <a:cs typeface="Calibri" pitchFamily="34" charset="-120"/>
               </a:rPr>
-              <a:t>3 · USER EXPERIENCE</a:t>
+              <a:t>2 · PROPOSED SOLUTION</a:t>
             </a:r>
             <a:endParaRPr lang="en-US" sz="900" dirty="0"/>
           </a:p>
@@ -7736,24 +6431,24 @@
         </p:nvSpPr>
         <p:spPr>
           <a:xfrm>
-            <a:off x="457200" y="548640"/>
-            <a:ext cx="8229600" cy="658368"/>
-          </a:xfrm>
-          <a:prstGeom prst="rect">
-            <a:avLst/>
-          </a:prstGeom>
-          <a:noFill/>
-          <a:ln/>
-        </p:spPr>
-        <p:txBody>
-          <a:bodyPr wrap="square" rtlCol="0" anchor="ctr"/>
-          <a:lstStyle/>
-          <a:p>
-            <a:pPr algn="ctr" indent="0" marL="0">
-              <a:buNone/>
-            </a:pPr>
-            <a:r>
-              <a:rPr lang="en-US" sz="4000" b="1" dirty="0">
+            <a:off x="457200" y="530352"/>
+            <a:ext cx="8229600" cy="512064"/>
+          </a:xfrm>
+          <a:prstGeom prst="rect">
+            <a:avLst/>
+          </a:prstGeom>
+          <a:noFill/>
+          <a:ln/>
+        </p:spPr>
+        <p:txBody>
+          <a:bodyPr wrap="square" rtlCol="0" anchor="ctr"/>
+          <a:lstStyle/>
+          <a:p>
+            <a:pPr indent="0" marL="0">
+              <a:buNone/>
+            </a:pPr>
+            <a:r>
+              <a:rPr lang="en-US" sz="3000" b="1" dirty="0">
                 <a:solidFill>
                   <a:srgbClr val="0D1F3C"/>
                 </a:solidFill>
@@ -7761,9 +6456,9 @@
                 <a:ea typeface="Cambria" pitchFamily="34" charset="-122"/>
                 <a:cs typeface="Cambria" pitchFamily="34" charset="-120"/>
               </a:rPr>
-              <a:t>Read Faster</a:t>
-            </a:r>
-            <a:endParaRPr lang="en-US" sz="4000" dirty="0"/>
+              <a:t>On-Device AI Stack</a:t>
+            </a:r>
+            <a:endParaRPr lang="en-US" sz="3000" dirty="0"/>
           </a:p>
         </p:txBody>
       </p:sp>
@@ -7775,20 +6470,20 @@
         </p:nvSpPr>
         <p:spPr>
           <a:xfrm>
-            <a:off x="457200" y="1170432"/>
-            <a:ext cx="8229600" cy="256032"/>
-          </a:xfrm>
-          <a:prstGeom prst="rect">
-            <a:avLst/>
-          </a:prstGeom>
-          <a:noFill/>
-          <a:ln/>
-        </p:spPr>
-        <p:txBody>
-          <a:bodyPr wrap="square" rtlCol="0" anchor="ctr"/>
-          <a:lstStyle/>
-          <a:p>
-            <a:pPr algn="ctr" indent="0" marL="0">
+            <a:off x="457200" y="1024128"/>
+            <a:ext cx="8229600" cy="219456"/>
+          </a:xfrm>
+          <a:prstGeom prst="rect">
+            <a:avLst/>
+          </a:prstGeom>
+          <a:noFill/>
+          <a:ln/>
+        </p:spPr>
+        <p:txBody>
+          <a:bodyPr wrap="square" rtlCol="0" anchor="ctr"/>
+          <a:lstStyle/>
+          <a:p>
+            <a:pPr indent="0" marL="0">
               <a:buNone/>
             </a:pPr>
             <a:r>
@@ -7800,28 +6495,1310 @@
                 <a:ea typeface="Calibri" pitchFamily="34" charset="-122"/>
                 <a:cs typeface="Calibri" pitchFamily="34" charset="-120"/>
               </a:rPr>
-              <a:t>Measured reading time across three conditions — same 300-word article, same user</a:t>
+              <a:t>All inference runs locally — no API, no cloud, no data leaves the laptop</a:t>
             </a:r>
             <a:endParaRPr lang="en-US" sz="1100" dirty="0"/>
           </a:p>
         </p:txBody>
       </p:sp>
-      <p:graphicFrame>
-        <p:nvGraphicFramePr>
-          <p:cNvPr id="5" name="Chart 0" descr=""/>
-          <p:cNvGraphicFramePr/>
-          <p:nvPr/>
-        </p:nvGraphicFramePr>
-        <p:xfrm>
-          <a:off x="640080" y="1508760"/>
-          <a:ext cx="7863840" cy="3310128"/>
-        </p:xfrm>
-        <a:graphic xmlns:a="http://schemas.openxmlformats.org/drawingml/2006/main">
-          <a:graphicData uri="http://schemas.openxmlformats.org/drawingml/2006/chart">
-            <c:chart xmlns:c="http://schemas.openxmlformats.org/drawingml/2006/chart" r:id="rId1"/>
-          </a:graphicData>
-        </a:graphic>
-      </p:graphicFrame>
+      <p:sp>
+        <p:nvSpPr>
+          <p:cNvPr id="5" name="Shape 3"/>
+          <p:cNvSpPr/>
+          <p:nvPr/>
+        </p:nvSpPr>
+        <p:spPr>
+          <a:xfrm>
+            <a:off x="365760" y="1371600"/>
+            <a:ext cx="3566160" cy="2743200"/>
+          </a:xfrm>
+          <a:prstGeom prst="roundRect">
+            <a:avLst>
+              <a:gd name="adj" fmla="val 5000"/>
+            </a:avLst>
+          </a:prstGeom>
+          <a:solidFill>
+            <a:srgbClr val="0077B6">
+              <a:alpha val="7000"/>
+            </a:srgbClr>
+          </a:solidFill>
+          <a:ln w="25400">
+            <a:solidFill>
+              <a:srgbClr val="0077B6">
+                <a:alpha val="40000"/>
+              </a:srgbClr>
+            </a:solidFill>
+            <a:prstDash val="solid"/>
+          </a:ln>
+        </p:spPr>
+      </p:sp>
+      <p:sp>
+        <p:nvSpPr>
+          <p:cNvPr id="6" name="Text 4"/>
+          <p:cNvSpPr/>
+          <p:nvPr/>
+        </p:nvSpPr>
+        <p:spPr>
+          <a:xfrm>
+            <a:off x="548640" y="1463040"/>
+            <a:ext cx="3200400" cy="274320"/>
+          </a:xfrm>
+          <a:prstGeom prst="rect">
+            <a:avLst/>
+          </a:prstGeom>
+          <a:noFill/>
+          <a:ln/>
+        </p:spPr>
+        <p:txBody>
+          <a:bodyPr wrap="square" rtlCol="0" anchor="ctr"/>
+          <a:lstStyle/>
+          <a:p>
+            <a:pPr indent="0" marL="0">
+              <a:buNone/>
+            </a:pPr>
+            <a:r>
+              <a:rPr lang="en-US" sz="1300" b="1" dirty="0">
+                <a:solidFill>
+                  <a:srgbClr val="0077B6"/>
+                </a:solidFill>
+                <a:latin typeface="Calibri" pitchFamily="34" charset="0"/>
+                <a:ea typeface="Calibri" pitchFamily="34" charset="-122"/>
+                <a:cs typeface="Calibri" pitchFamily="34" charset="-120"/>
+              </a:rPr>
+              <a:t>Browser World</a:t>
+            </a:r>
+            <a:endParaRPr lang="en-US" sz="1300" dirty="0"/>
+          </a:p>
+        </p:txBody>
+      </p:sp>
+      <p:sp>
+        <p:nvSpPr>
+          <p:cNvPr id="7" name="Shape 5"/>
+          <p:cNvSpPr/>
+          <p:nvPr/>
+        </p:nvSpPr>
+        <p:spPr>
+          <a:xfrm>
+            <a:off x="530352" y="1828800"/>
+            <a:ext cx="3236976" cy="548640"/>
+          </a:xfrm>
+          <a:prstGeom prst="roundRect">
+            <a:avLst>
+              <a:gd name="adj" fmla="val 15000"/>
+            </a:avLst>
+          </a:prstGeom>
+          <a:solidFill>
+            <a:srgbClr val="0077B6">
+              <a:alpha val="8000"/>
+            </a:srgbClr>
+          </a:solidFill>
+          <a:ln w="12700">
+            <a:solidFill>
+              <a:srgbClr val="0077B6">
+                <a:alpha val="30000"/>
+              </a:srgbClr>
+            </a:solidFill>
+            <a:prstDash val="solid"/>
+          </a:ln>
+        </p:spPr>
+      </p:sp>
+      <p:sp>
+        <p:nvSpPr>
+          <p:cNvPr id="8" name="Text 6"/>
+          <p:cNvSpPr/>
+          <p:nvPr/>
+        </p:nvSpPr>
+        <p:spPr>
+          <a:xfrm>
+            <a:off x="658368" y="1874520"/>
+            <a:ext cx="3017520" cy="237744"/>
+          </a:xfrm>
+          <a:prstGeom prst="rect">
+            <a:avLst/>
+          </a:prstGeom>
+          <a:noFill/>
+          <a:ln/>
+        </p:spPr>
+        <p:txBody>
+          <a:bodyPr wrap="square" rtlCol="0" anchor="ctr"/>
+          <a:lstStyle/>
+          <a:p>
+            <a:pPr indent="0" marL="0">
+              <a:buNone/>
+            </a:pPr>
+            <a:r>
+              <a:rPr lang="en-US" sz="1200" b="1" dirty="0">
+                <a:solidFill>
+                  <a:srgbClr val="0D1F3C"/>
+                </a:solidFill>
+                <a:latin typeface="Calibri" pitchFamily="34" charset="0"/>
+                <a:ea typeface="Calibri" pitchFamily="34" charset="-122"/>
+                <a:cs typeface="Calibri" pitchFamily="34" charset="-120"/>
+              </a:rPr>
+              <a:t>Gaze Tracking</a:t>
+            </a:r>
+            <a:endParaRPr lang="en-US" sz="1200" dirty="0"/>
+          </a:p>
+        </p:txBody>
+      </p:sp>
+      <p:sp>
+        <p:nvSpPr>
+          <p:cNvPr id="9" name="Text 7"/>
+          <p:cNvSpPr/>
+          <p:nvPr/>
+        </p:nvSpPr>
+        <p:spPr>
+          <a:xfrm>
+            <a:off x="658368" y="2103120"/>
+            <a:ext cx="3017520" cy="201168"/>
+          </a:xfrm>
+          <a:prstGeom prst="rect">
+            <a:avLst/>
+          </a:prstGeom>
+          <a:noFill/>
+          <a:ln/>
+        </p:spPr>
+        <p:txBody>
+          <a:bodyPr wrap="square" rtlCol="0" anchor="ctr"/>
+          <a:lstStyle/>
+          <a:p>
+            <a:pPr indent="0" marL="0">
+              <a:buNone/>
+            </a:pPr>
+            <a:r>
+              <a:rPr lang="en-US" sz="900" dirty="0">
+                <a:solidFill>
+                  <a:srgbClr val="4A5568"/>
+                </a:solidFill>
+                <a:latin typeface="Calibri" pitchFamily="34" charset="0"/>
+                <a:ea typeface="Calibri" pitchFamily="34" charset="-122"/>
+                <a:cs typeface="Calibri" pitchFamily="34" charset="-120"/>
+              </a:rPr>
+              <a:t>Mouse hover · Webcam</a:t>
+            </a:r>
+            <a:endParaRPr lang="en-US" sz="900" dirty="0"/>
+          </a:p>
+        </p:txBody>
+      </p:sp>
+      <p:sp>
+        <p:nvSpPr>
+          <p:cNvPr id="10" name="Shape 8"/>
+          <p:cNvSpPr/>
+          <p:nvPr/>
+        </p:nvSpPr>
+        <p:spPr>
+          <a:xfrm>
+            <a:off x="530352" y="2487168"/>
+            <a:ext cx="3236976" cy="548640"/>
+          </a:xfrm>
+          <a:prstGeom prst="roundRect">
+            <a:avLst>
+              <a:gd name="adj" fmla="val 15000"/>
+            </a:avLst>
+          </a:prstGeom>
+          <a:solidFill>
+            <a:srgbClr val="0077B6">
+              <a:alpha val="8000"/>
+            </a:srgbClr>
+          </a:solidFill>
+          <a:ln w="12700">
+            <a:solidFill>
+              <a:srgbClr val="0077B6">
+                <a:alpha val="30000"/>
+              </a:srgbClr>
+            </a:solidFill>
+            <a:prstDash val="solid"/>
+          </a:ln>
+        </p:spPr>
+      </p:sp>
+      <p:sp>
+        <p:nvSpPr>
+          <p:cNvPr id="11" name="Text 9"/>
+          <p:cNvSpPr/>
+          <p:nvPr/>
+        </p:nvSpPr>
+        <p:spPr>
+          <a:xfrm>
+            <a:off x="658368" y="2532888"/>
+            <a:ext cx="3017520" cy="237744"/>
+          </a:xfrm>
+          <a:prstGeom prst="rect">
+            <a:avLst/>
+          </a:prstGeom>
+          <a:noFill/>
+          <a:ln/>
+        </p:spPr>
+        <p:txBody>
+          <a:bodyPr wrap="square" rtlCol="0" anchor="ctr"/>
+          <a:lstStyle/>
+          <a:p>
+            <a:pPr indent="0" marL="0">
+              <a:buNone/>
+            </a:pPr>
+            <a:r>
+              <a:rPr lang="en-US" sz="1200" b="1" dirty="0">
+                <a:solidFill>
+                  <a:srgbClr val="0D1F3C"/>
+                </a:solidFill>
+                <a:latin typeface="Calibri" pitchFamily="34" charset="0"/>
+                <a:ea typeface="Calibri" pitchFamily="34" charset="-122"/>
+                <a:cs typeface="Calibri" pitchFamily="34" charset="-120"/>
+              </a:rPr>
+              <a:t>Content Enhancement</a:t>
+            </a:r>
+            <a:endParaRPr lang="en-US" sz="1200" dirty="0"/>
+          </a:p>
+        </p:txBody>
+      </p:sp>
+      <p:sp>
+        <p:nvSpPr>
+          <p:cNvPr id="12" name="Text 10"/>
+          <p:cNvSpPr/>
+          <p:nvPr/>
+        </p:nvSpPr>
+        <p:spPr>
+          <a:xfrm>
+            <a:off x="658368" y="2761488"/>
+            <a:ext cx="3017520" cy="201168"/>
+          </a:xfrm>
+          <a:prstGeom prst="rect">
+            <a:avLst/>
+          </a:prstGeom>
+          <a:noFill/>
+          <a:ln/>
+        </p:spPr>
+        <p:txBody>
+          <a:bodyPr wrap="square" rtlCol="0" anchor="ctr"/>
+          <a:lstStyle/>
+          <a:p>
+            <a:pPr indent="0" marL="0">
+              <a:buNone/>
+            </a:pPr>
+            <a:r>
+              <a:rPr lang="en-US" sz="900" dirty="0">
+                <a:solidFill>
+                  <a:srgbClr val="4A5568"/>
+                </a:solidFill>
+                <a:latin typeface="Calibri" pitchFamily="34" charset="0"/>
+                <a:ea typeface="Calibri" pitchFamily="34" charset="-122"/>
+                <a:cs typeface="Calibri" pitchFamily="34" charset="-120"/>
+              </a:rPr>
+              <a:t>Text enhancement · AI Summary</a:t>
+            </a:r>
+            <a:endParaRPr lang="en-US" sz="900" dirty="0"/>
+          </a:p>
+        </p:txBody>
+      </p:sp>
+      <p:sp>
+        <p:nvSpPr>
+          <p:cNvPr id="13" name="Shape 11"/>
+          <p:cNvSpPr/>
+          <p:nvPr/>
+        </p:nvSpPr>
+        <p:spPr>
+          <a:xfrm>
+            <a:off x="530352" y="3145536"/>
+            <a:ext cx="3236976" cy="548640"/>
+          </a:xfrm>
+          <a:prstGeom prst="roundRect">
+            <a:avLst>
+              <a:gd name="adj" fmla="val 15000"/>
+            </a:avLst>
+          </a:prstGeom>
+          <a:solidFill>
+            <a:srgbClr val="0077B6">
+              <a:alpha val="8000"/>
+            </a:srgbClr>
+          </a:solidFill>
+          <a:ln w="12700">
+            <a:solidFill>
+              <a:srgbClr val="0077B6">
+                <a:alpha val="30000"/>
+              </a:srgbClr>
+            </a:solidFill>
+            <a:prstDash val="solid"/>
+          </a:ln>
+        </p:spPr>
+      </p:sp>
+      <p:sp>
+        <p:nvSpPr>
+          <p:cNvPr id="14" name="Text 12"/>
+          <p:cNvSpPr/>
+          <p:nvPr/>
+        </p:nvSpPr>
+        <p:spPr>
+          <a:xfrm>
+            <a:off x="658368" y="3191256"/>
+            <a:ext cx="3017520" cy="237744"/>
+          </a:xfrm>
+          <a:prstGeom prst="rect">
+            <a:avLst/>
+          </a:prstGeom>
+          <a:noFill/>
+          <a:ln/>
+        </p:spPr>
+        <p:txBody>
+          <a:bodyPr wrap="square" rtlCol="0" anchor="ctr"/>
+          <a:lstStyle/>
+          <a:p>
+            <a:pPr indent="0" marL="0">
+              <a:buNone/>
+            </a:pPr>
+            <a:r>
+              <a:rPr lang="en-US" sz="1200" b="1" dirty="0">
+                <a:solidFill>
+                  <a:srgbClr val="0D1F3C"/>
+                </a:solidFill>
+                <a:latin typeface="Calibri" pitchFamily="34" charset="0"/>
+                <a:ea typeface="Calibri" pitchFamily="34" charset="-122"/>
+                <a:cs typeface="Calibri" pitchFamily="34" charset="-120"/>
+              </a:rPr>
+              <a:t>Service Worker</a:t>
+            </a:r>
+            <a:endParaRPr lang="en-US" sz="1200" dirty="0"/>
+          </a:p>
+        </p:txBody>
+      </p:sp>
+      <p:sp>
+        <p:nvSpPr>
+          <p:cNvPr id="15" name="Text 13"/>
+          <p:cNvSpPr/>
+          <p:nvPr/>
+        </p:nvSpPr>
+        <p:spPr>
+          <a:xfrm>
+            <a:off x="658368" y="3419856"/>
+            <a:ext cx="3017520" cy="201168"/>
+          </a:xfrm>
+          <a:prstGeom prst="rect">
+            <a:avLst/>
+          </a:prstGeom>
+          <a:noFill/>
+          <a:ln/>
+        </p:spPr>
+        <p:txBody>
+          <a:bodyPr wrap="square" rtlCol="0" anchor="ctr"/>
+          <a:lstStyle/>
+          <a:p>
+            <a:pPr indent="0" marL="0">
+              <a:buNone/>
+            </a:pPr>
+            <a:r>
+              <a:rPr lang="en-US" sz="900" dirty="0">
+                <a:solidFill>
+                  <a:srgbClr val="4A5568"/>
+                </a:solidFill>
+                <a:latin typeface="Calibri" pitchFamily="34" charset="0"/>
+                <a:ea typeface="Calibri" pitchFamily="34" charset="-122"/>
+                <a:cs typeface="Calibri" pitchFamily="34" charset="-120"/>
+              </a:rPr>
+              <a:t>Native port routing</a:t>
+            </a:r>
+            <a:endParaRPr lang="en-US" sz="900" dirty="0"/>
+          </a:p>
+        </p:txBody>
+      </p:sp>
+      <p:sp>
+        <p:nvSpPr>
+          <p:cNvPr id="16" name="Text 14"/>
+          <p:cNvSpPr/>
+          <p:nvPr/>
+        </p:nvSpPr>
+        <p:spPr>
+          <a:xfrm>
+            <a:off x="4023360" y="2194560"/>
+            <a:ext cx="1097280" cy="438912"/>
+          </a:xfrm>
+          <a:prstGeom prst="rect">
+            <a:avLst/>
+          </a:prstGeom>
+          <a:noFill/>
+          <a:ln/>
+        </p:spPr>
+        <p:txBody>
+          <a:bodyPr wrap="square" rtlCol="0" anchor="ctr"/>
+          <a:lstStyle/>
+          <a:p>
+            <a:pPr algn="ctr" indent="0" marL="0">
+              <a:buNone/>
+            </a:pPr>
+            <a:r>
+              <a:rPr lang="en-US" sz="1000" b="1" dirty="0">
+                <a:solidFill>
+                  <a:srgbClr val="0077B6"/>
+                </a:solidFill>
+                <a:latin typeface="Calibri" pitchFamily="34" charset="0"/>
+                <a:ea typeface="Calibri" pitchFamily="34" charset="-122"/>
+                <a:cs typeface="Calibri" pitchFamily="34" charset="-120"/>
+              </a:rPr>
+              <a:t>Native</a:t>
+            </a:r>
+            <a:endParaRPr lang="en-US" sz="1000" dirty="0"/>
+          </a:p>
+          <a:p>
+            <a:pPr algn="ctr" indent="0" marL="0">
+              <a:buNone/>
+            </a:pPr>
+            <a:r>
+              <a:rPr lang="en-US" sz="1000" b="1" dirty="0">
+                <a:solidFill>
+                  <a:srgbClr val="0077B6"/>
+                </a:solidFill>
+                <a:latin typeface="Calibri" pitchFamily="34" charset="0"/>
+                <a:ea typeface="Calibri" pitchFamily="34" charset="-122"/>
+                <a:cs typeface="Calibri" pitchFamily="34" charset="-120"/>
+              </a:rPr>
+              <a:t>Messaging</a:t>
+            </a:r>
+            <a:endParaRPr lang="en-US" sz="1000" dirty="0"/>
+          </a:p>
+        </p:txBody>
+      </p:sp>
+      <p:sp>
+        <p:nvSpPr>
+          <p:cNvPr id="17" name="Text 15"/>
+          <p:cNvSpPr/>
+          <p:nvPr/>
+        </p:nvSpPr>
+        <p:spPr>
+          <a:xfrm>
+            <a:off x="4023360" y="2651760"/>
+            <a:ext cx="1097280" cy="329184"/>
+          </a:xfrm>
+          <a:prstGeom prst="rect">
+            <a:avLst/>
+          </a:prstGeom>
+          <a:noFill/>
+          <a:ln/>
+        </p:spPr>
+        <p:txBody>
+          <a:bodyPr wrap="square" rtlCol="0" anchor="ctr"/>
+          <a:lstStyle/>
+          <a:p>
+            <a:pPr algn="ctr" indent="0" marL="0">
+              <a:buNone/>
+            </a:pPr>
+            <a:r>
+              <a:rPr lang="en-US" sz="2200" dirty="0">
+                <a:solidFill>
+                  <a:srgbClr val="0077B6">
+                    <a:alpha val="60000"/>
+                  </a:srgbClr>
+                </a:solidFill>
+                <a:latin typeface="Calibri" pitchFamily="34" charset="0"/>
+                <a:ea typeface="Calibri" pitchFamily="34" charset="-122"/>
+                <a:cs typeface="Calibri" pitchFamily="34" charset="-120"/>
+              </a:rPr>
+              <a:t>↔</a:t>
+            </a:r>
+            <a:endParaRPr lang="en-US" sz="2200" dirty="0"/>
+          </a:p>
+        </p:txBody>
+      </p:sp>
+      <p:sp>
+        <p:nvSpPr>
+          <p:cNvPr id="18" name="Text 16"/>
+          <p:cNvSpPr/>
+          <p:nvPr/>
+        </p:nvSpPr>
+        <p:spPr>
+          <a:xfrm>
+            <a:off x="4023360" y="2999232"/>
+            <a:ext cx="1097280" cy="201168"/>
+          </a:xfrm>
+          <a:prstGeom prst="rect">
+            <a:avLst/>
+          </a:prstGeom>
+          <a:noFill/>
+          <a:ln/>
+        </p:spPr>
+        <p:txBody>
+          <a:bodyPr wrap="square" rtlCol="0" anchor="ctr"/>
+          <a:lstStyle/>
+          <a:p>
+            <a:pPr algn="ctr" indent="0" marL="0">
+              <a:buNone/>
+            </a:pPr>
+            <a:r>
+              <a:rPr lang="en-US" sz="800" dirty="0">
+                <a:solidFill>
+                  <a:srgbClr val="4A5568"/>
+                </a:solidFill>
+                <a:latin typeface="Calibri" pitchFamily="34" charset="0"/>
+                <a:ea typeface="Calibri" pitchFamily="34" charset="-122"/>
+                <a:cs typeface="Calibri" pitchFamily="34" charset="-120"/>
+              </a:rPr>
+              <a:t>stdin / stdout</a:t>
+            </a:r>
+            <a:endParaRPr lang="en-US" sz="800" dirty="0"/>
+          </a:p>
+        </p:txBody>
+      </p:sp>
+      <p:sp>
+        <p:nvSpPr>
+          <p:cNvPr id="19" name="Shape 17"/>
+          <p:cNvSpPr/>
+          <p:nvPr/>
+        </p:nvSpPr>
+        <p:spPr>
+          <a:xfrm>
+            <a:off x="5212080" y="1371600"/>
+            <a:ext cx="3566160" cy="2743200"/>
+          </a:xfrm>
+          <a:prstGeom prst="roundRect">
+            <a:avLst>
+              <a:gd name="adj" fmla="val 5000"/>
+            </a:avLst>
+          </a:prstGeom>
+          <a:solidFill>
+            <a:srgbClr val="C9922A">
+              <a:alpha val="8000"/>
+            </a:srgbClr>
+          </a:solidFill>
+          <a:ln w="25400">
+            <a:solidFill>
+              <a:srgbClr val="C9922A">
+                <a:alpha val="45000"/>
+              </a:srgbClr>
+            </a:solidFill>
+            <a:prstDash val="solid"/>
+          </a:ln>
+        </p:spPr>
+      </p:sp>
+      <p:sp>
+        <p:nvSpPr>
+          <p:cNvPr id="20" name="Text 18"/>
+          <p:cNvSpPr/>
+          <p:nvPr/>
+        </p:nvSpPr>
+        <p:spPr>
+          <a:xfrm>
+            <a:off x="5394960" y="1463040"/>
+            <a:ext cx="3200400" cy="274320"/>
+          </a:xfrm>
+          <a:prstGeom prst="rect">
+            <a:avLst/>
+          </a:prstGeom>
+          <a:noFill/>
+          <a:ln/>
+        </p:spPr>
+        <p:txBody>
+          <a:bodyPr wrap="square" rtlCol="0" anchor="ctr"/>
+          <a:lstStyle/>
+          <a:p>
+            <a:pPr indent="0" marL="0">
+              <a:buNone/>
+            </a:pPr>
+            <a:r>
+              <a:rPr lang="en-US" sz="1300" b="1" dirty="0">
+                <a:solidFill>
+                  <a:srgbClr val="C9922A"/>
+                </a:solidFill>
+                <a:latin typeface="Calibri" pitchFamily="34" charset="0"/>
+                <a:ea typeface="Calibri" pitchFamily="34" charset="-122"/>
+                <a:cs typeface="Calibri" pitchFamily="34" charset="-120"/>
+              </a:rPr>
+              <a:t>OS World</a:t>
+            </a:r>
+            <a:endParaRPr lang="en-US" sz="1300" dirty="0"/>
+          </a:p>
+        </p:txBody>
+      </p:sp>
+      <p:sp>
+        <p:nvSpPr>
+          <p:cNvPr id="21" name="Shape 19"/>
+          <p:cNvSpPr/>
+          <p:nvPr/>
+        </p:nvSpPr>
+        <p:spPr>
+          <a:xfrm>
+            <a:off x="5376672" y="1828800"/>
+            <a:ext cx="3236976" cy="548640"/>
+          </a:xfrm>
+          <a:prstGeom prst="roundRect">
+            <a:avLst>
+              <a:gd name="adj" fmla="val 15000"/>
+            </a:avLst>
+          </a:prstGeom>
+          <a:solidFill>
+            <a:srgbClr val="C9922A">
+              <a:alpha val="10000"/>
+            </a:srgbClr>
+          </a:solidFill>
+          <a:ln w="12700">
+            <a:solidFill>
+              <a:srgbClr val="C9922A">
+                <a:alpha val="35000"/>
+              </a:srgbClr>
+            </a:solidFill>
+            <a:prstDash val="solid"/>
+          </a:ln>
+        </p:spPr>
+      </p:sp>
+      <p:sp>
+        <p:nvSpPr>
+          <p:cNvPr id="22" name="Text 20"/>
+          <p:cNvSpPr/>
+          <p:nvPr/>
+        </p:nvSpPr>
+        <p:spPr>
+          <a:xfrm>
+            <a:off x="5504688" y="1874520"/>
+            <a:ext cx="3017520" cy="237744"/>
+          </a:xfrm>
+          <a:prstGeom prst="rect">
+            <a:avLst/>
+          </a:prstGeom>
+          <a:noFill/>
+          <a:ln/>
+        </p:spPr>
+        <p:txBody>
+          <a:bodyPr wrap="square" rtlCol="0" anchor="ctr"/>
+          <a:lstStyle/>
+          <a:p>
+            <a:pPr indent="0" marL="0">
+              <a:buNone/>
+            </a:pPr>
+            <a:r>
+              <a:rPr lang="en-US" sz="1200" b="1" dirty="0">
+                <a:solidFill>
+                  <a:srgbClr val="0D1F3C"/>
+                </a:solidFill>
+                <a:latin typeface="Calibri" pitchFamily="34" charset="0"/>
+                <a:ea typeface="Calibri" pitchFamily="34" charset="-122"/>
+                <a:cs typeface="Calibri" pitchFamily="34" charset="-120"/>
+              </a:rPr>
+              <a:t>Native Host</a:t>
+            </a:r>
+            <a:endParaRPr lang="en-US" sz="1200" dirty="0"/>
+          </a:p>
+        </p:txBody>
+      </p:sp>
+      <p:sp>
+        <p:nvSpPr>
+          <p:cNvPr id="23" name="Text 21"/>
+          <p:cNvSpPr/>
+          <p:nvPr/>
+        </p:nvSpPr>
+        <p:spPr>
+          <a:xfrm>
+            <a:off x="5504688" y="2103120"/>
+            <a:ext cx="3017520" cy="201168"/>
+          </a:xfrm>
+          <a:prstGeom prst="rect">
+            <a:avLst/>
+          </a:prstGeom>
+          <a:noFill/>
+          <a:ln/>
+        </p:spPr>
+        <p:txBody>
+          <a:bodyPr wrap="square" rtlCol="0" anchor="ctr"/>
+          <a:lstStyle/>
+          <a:p>
+            <a:pPr indent="0" marL="0">
+              <a:buNone/>
+            </a:pPr>
+            <a:r>
+              <a:rPr lang="en-US" sz="900" dirty="0">
+                <a:solidFill>
+                  <a:srgbClr val="4A5568"/>
+                </a:solidFill>
+                <a:latin typeface="Calibri" pitchFamily="34" charset="0"/>
+                <a:ea typeface="Calibri" pitchFamily="34" charset="-122"/>
+                <a:cs typeface="Calibri" pitchFamily="34" charset="-120"/>
+              </a:rPr>
+              <a:t>PyInstaller · Windows</a:t>
+            </a:r>
+            <a:endParaRPr lang="en-US" sz="900" dirty="0"/>
+          </a:p>
+        </p:txBody>
+      </p:sp>
+      <p:sp>
+        <p:nvSpPr>
+          <p:cNvPr id="24" name="Shape 22"/>
+          <p:cNvSpPr/>
+          <p:nvPr/>
+        </p:nvSpPr>
+        <p:spPr>
+          <a:xfrm>
+            <a:off x="5376672" y="2487168"/>
+            <a:ext cx="3236976" cy="548640"/>
+          </a:xfrm>
+          <a:prstGeom prst="roundRect">
+            <a:avLst>
+              <a:gd name="adj" fmla="val 15000"/>
+            </a:avLst>
+          </a:prstGeom>
+          <a:solidFill>
+            <a:srgbClr val="C9922A">
+              <a:alpha val="10000"/>
+            </a:srgbClr>
+          </a:solidFill>
+          <a:ln w="12700">
+            <a:solidFill>
+              <a:srgbClr val="C9922A">
+                <a:alpha val="35000"/>
+              </a:srgbClr>
+            </a:solidFill>
+            <a:prstDash val="solid"/>
+          </a:ln>
+        </p:spPr>
+      </p:sp>
+      <p:sp>
+        <p:nvSpPr>
+          <p:cNvPr id="25" name="Text 23"/>
+          <p:cNvSpPr/>
+          <p:nvPr/>
+        </p:nvSpPr>
+        <p:spPr>
+          <a:xfrm>
+            <a:off x="5504688" y="2532888"/>
+            <a:ext cx="3017520" cy="237744"/>
+          </a:xfrm>
+          <a:prstGeom prst="rect">
+            <a:avLst/>
+          </a:prstGeom>
+          <a:noFill/>
+          <a:ln/>
+        </p:spPr>
+        <p:txBody>
+          <a:bodyPr wrap="square" rtlCol="0" anchor="ctr"/>
+          <a:lstStyle/>
+          <a:p>
+            <a:pPr indent="0" marL="0">
+              <a:buNone/>
+            </a:pPr>
+            <a:r>
+              <a:rPr lang="en-US" sz="1200" b="1" dirty="0">
+                <a:solidFill>
+                  <a:srgbClr val="0D1F3C"/>
+                </a:solidFill>
+                <a:latin typeface="Calibri" pitchFamily="34" charset="0"/>
+                <a:ea typeface="Calibri" pitchFamily="34" charset="-122"/>
+                <a:cs typeface="Calibri" pitchFamily="34" charset="-120"/>
+              </a:rPr>
+              <a:t>OpenVINO GenAI</a:t>
+            </a:r>
+            <a:endParaRPr lang="en-US" sz="1200" dirty="0"/>
+          </a:p>
+        </p:txBody>
+      </p:sp>
+      <p:sp>
+        <p:nvSpPr>
+          <p:cNvPr id="26" name="Text 24"/>
+          <p:cNvSpPr/>
+          <p:nvPr/>
+        </p:nvSpPr>
+        <p:spPr>
+          <a:xfrm>
+            <a:off x="5504688" y="2761488"/>
+            <a:ext cx="3017520" cy="201168"/>
+          </a:xfrm>
+          <a:prstGeom prst="rect">
+            <a:avLst/>
+          </a:prstGeom>
+          <a:noFill/>
+          <a:ln/>
+        </p:spPr>
+        <p:txBody>
+          <a:bodyPr wrap="square" rtlCol="0" anchor="ctr"/>
+          <a:lstStyle/>
+          <a:p>
+            <a:pPr indent="0" marL="0">
+              <a:buNone/>
+            </a:pPr>
+            <a:r>
+              <a:rPr lang="en-US" sz="900" dirty="0">
+                <a:solidFill>
+                  <a:srgbClr val="4A5568"/>
+                </a:solidFill>
+                <a:latin typeface="Calibri" pitchFamily="34" charset="0"/>
+                <a:ea typeface="Calibri" pitchFamily="34" charset="-122"/>
+                <a:cs typeface="Calibri" pitchFamily="34" charset="-120"/>
+              </a:rPr>
+              <a:t>Inference Runtime</a:t>
+            </a:r>
+            <a:endParaRPr lang="en-US" sz="900" dirty="0"/>
+          </a:p>
+        </p:txBody>
+      </p:sp>
+      <p:sp>
+        <p:nvSpPr>
+          <p:cNvPr id="27" name="Shape 25"/>
+          <p:cNvSpPr/>
+          <p:nvPr/>
+        </p:nvSpPr>
+        <p:spPr>
+          <a:xfrm>
+            <a:off x="5376672" y="3145536"/>
+            <a:ext cx="3236976" cy="548640"/>
+          </a:xfrm>
+          <a:prstGeom prst="roundRect">
+            <a:avLst>
+              <a:gd name="adj" fmla="val 15000"/>
+            </a:avLst>
+          </a:prstGeom>
+          <a:solidFill>
+            <a:srgbClr val="C9922A">
+              <a:alpha val="10000"/>
+            </a:srgbClr>
+          </a:solidFill>
+          <a:ln w="12700">
+            <a:solidFill>
+              <a:srgbClr val="C9922A">
+                <a:alpha val="35000"/>
+              </a:srgbClr>
+            </a:solidFill>
+            <a:prstDash val="solid"/>
+          </a:ln>
+        </p:spPr>
+      </p:sp>
+      <p:sp>
+        <p:nvSpPr>
+          <p:cNvPr id="28" name="Text 26"/>
+          <p:cNvSpPr/>
+          <p:nvPr/>
+        </p:nvSpPr>
+        <p:spPr>
+          <a:xfrm>
+            <a:off x="5504688" y="3191256"/>
+            <a:ext cx="3017520" cy="237744"/>
+          </a:xfrm>
+          <a:prstGeom prst="rect">
+            <a:avLst/>
+          </a:prstGeom>
+          <a:noFill/>
+          <a:ln/>
+        </p:spPr>
+        <p:txBody>
+          <a:bodyPr wrap="square" rtlCol="0" anchor="ctr"/>
+          <a:lstStyle/>
+          <a:p>
+            <a:pPr indent="0" marL="0">
+              <a:buNone/>
+            </a:pPr>
+            <a:r>
+              <a:rPr lang="en-US" sz="1200" b="1" dirty="0">
+                <a:solidFill>
+                  <a:srgbClr val="0D1F3C"/>
+                </a:solidFill>
+                <a:latin typeface="Calibri" pitchFamily="34" charset="0"/>
+                <a:ea typeface="Calibri" pitchFamily="34" charset="-122"/>
+                <a:cs typeface="Calibri" pitchFamily="34" charset="-120"/>
+              </a:rPr>
+              <a:t>Qwen2.5-1.5B INT4</a:t>
+            </a:r>
+            <a:endParaRPr lang="en-US" sz="1200" dirty="0"/>
+          </a:p>
+        </p:txBody>
+      </p:sp>
+      <p:sp>
+        <p:nvSpPr>
+          <p:cNvPr id="29" name="Text 27"/>
+          <p:cNvSpPr/>
+          <p:nvPr/>
+        </p:nvSpPr>
+        <p:spPr>
+          <a:xfrm>
+            <a:off x="5504688" y="3419856"/>
+            <a:ext cx="3017520" cy="201168"/>
+          </a:xfrm>
+          <a:prstGeom prst="rect">
+            <a:avLst/>
+          </a:prstGeom>
+          <a:noFill/>
+          <a:ln/>
+        </p:spPr>
+        <p:txBody>
+          <a:bodyPr wrap="square" rtlCol="0" anchor="ctr"/>
+          <a:lstStyle/>
+          <a:p>
+            <a:pPr indent="0" marL="0">
+              <a:buNone/>
+            </a:pPr>
+            <a:r>
+              <a:rPr lang="en-US" sz="900" dirty="0">
+                <a:solidFill>
+                  <a:srgbClr val="4A5568"/>
+                </a:solidFill>
+                <a:latin typeface="Calibri" pitchFamily="34" charset="0"/>
+                <a:ea typeface="Calibri" pitchFamily="34" charset="-122"/>
+                <a:cs typeface="Calibri" pitchFamily="34" charset="-120"/>
+              </a:rPr>
+              <a:t>On-device AI Model</a:t>
+            </a:r>
+            <a:endParaRPr lang="en-US" sz="900" dirty="0"/>
+          </a:p>
+        </p:txBody>
+      </p:sp>
+      <p:sp>
+        <p:nvSpPr>
+          <p:cNvPr id="30" name="Shape 28"/>
+          <p:cNvSpPr/>
+          <p:nvPr/>
+        </p:nvSpPr>
+        <p:spPr>
+          <a:xfrm>
+            <a:off x="2286000" y="4251960"/>
+            <a:ext cx="1371600" cy="658368"/>
+          </a:xfrm>
+          <a:prstGeom prst="roundRect">
+            <a:avLst>
+              <a:gd name="adj" fmla="val 13889"/>
+            </a:avLst>
+          </a:prstGeom>
+          <a:solidFill>
+            <a:srgbClr val="00B4D8">
+              <a:alpha val="12000"/>
+            </a:srgbClr>
+          </a:solidFill>
+          <a:ln w="12700">
+            <a:solidFill>
+              <a:srgbClr val="00B4D8">
+                <a:alpha val="10000"/>
+              </a:srgbClr>
+            </a:solidFill>
+            <a:prstDash val="solid"/>
+          </a:ln>
+        </p:spPr>
+      </p:sp>
+      <p:sp>
+        <p:nvSpPr>
+          <p:cNvPr id="31" name="Text 29"/>
+          <p:cNvSpPr/>
+          <p:nvPr/>
+        </p:nvSpPr>
+        <p:spPr>
+          <a:xfrm>
+            <a:off x="2286000" y="4279392"/>
+            <a:ext cx="1371600" cy="292608"/>
+          </a:xfrm>
+          <a:prstGeom prst="rect">
+            <a:avLst/>
+          </a:prstGeom>
+          <a:noFill/>
+          <a:ln/>
+        </p:spPr>
+        <p:txBody>
+          <a:bodyPr wrap="square" rtlCol="0" anchor="ctr"/>
+          <a:lstStyle/>
+          <a:p>
+            <a:pPr algn="ctr" indent="0" marL="0">
+              <a:buNone/>
+            </a:pPr>
+            <a:r>
+              <a:rPr lang="en-US" sz="1800" b="1" dirty="0">
+                <a:solidFill>
+                  <a:srgbClr val="00B4D8"/>
+                </a:solidFill>
+                <a:latin typeface="Cambria" pitchFamily="34" charset="0"/>
+                <a:ea typeface="Cambria" pitchFamily="34" charset="-122"/>
+                <a:cs typeface="Cambria" pitchFamily="34" charset="-120"/>
+              </a:rPr>
+              <a:t>0.85s</a:t>
+            </a:r>
+            <a:endParaRPr lang="en-US" sz="1800" dirty="0"/>
+          </a:p>
+        </p:txBody>
+      </p:sp>
+      <p:sp>
+        <p:nvSpPr>
+          <p:cNvPr id="32" name="Text 30"/>
+          <p:cNvSpPr/>
+          <p:nvPr/>
+        </p:nvSpPr>
+        <p:spPr>
+          <a:xfrm>
+            <a:off x="2286000" y="4562856"/>
+            <a:ext cx="1371600" cy="201168"/>
+          </a:xfrm>
+          <a:prstGeom prst="rect">
+            <a:avLst/>
+          </a:prstGeom>
+          <a:noFill/>
+          <a:ln/>
+        </p:spPr>
+        <p:txBody>
+          <a:bodyPr wrap="square" rtlCol="0" anchor="ctr"/>
+          <a:lstStyle/>
+          <a:p>
+            <a:pPr algn="ctr" indent="0" marL="0">
+              <a:buNone/>
+            </a:pPr>
+            <a:r>
+              <a:rPr lang="en-US" sz="850" dirty="0">
+                <a:solidFill>
+                  <a:srgbClr val="4A5568"/>
+                </a:solidFill>
+                <a:latin typeface="Calibri" pitchFamily="34" charset="0"/>
+                <a:ea typeface="Calibri" pitchFamily="34" charset="-122"/>
+                <a:cs typeface="Calibri" pitchFamily="34" charset="-120"/>
+              </a:rPr>
+              <a:t>GPU · 71 tok/s</a:t>
+            </a:r>
+            <a:endParaRPr lang="en-US" sz="850" dirty="0"/>
+          </a:p>
+        </p:txBody>
+      </p:sp>
+      <p:sp>
+        <p:nvSpPr>
+          <p:cNvPr id="33" name="Shape 31"/>
+          <p:cNvSpPr/>
+          <p:nvPr/>
+        </p:nvSpPr>
+        <p:spPr>
+          <a:xfrm>
+            <a:off x="3858768" y="4251960"/>
+            <a:ext cx="1371600" cy="658368"/>
+          </a:xfrm>
+          <a:prstGeom prst="roundRect">
+            <a:avLst>
+              <a:gd name="adj" fmla="val 13889"/>
+            </a:avLst>
+          </a:prstGeom>
+          <a:solidFill>
+            <a:srgbClr val="000000">
+              <a:alpha val="5000"/>
+            </a:srgbClr>
+          </a:solidFill>
+          <a:ln w="12700">
+            <a:solidFill>
+              <a:srgbClr val="000000">
+                <a:alpha val="10000"/>
+              </a:srgbClr>
+            </a:solidFill>
+            <a:prstDash val="solid"/>
+          </a:ln>
+        </p:spPr>
+      </p:sp>
+      <p:sp>
+        <p:nvSpPr>
+          <p:cNvPr id="34" name="Text 32"/>
+          <p:cNvSpPr/>
+          <p:nvPr/>
+        </p:nvSpPr>
+        <p:spPr>
+          <a:xfrm>
+            <a:off x="3858768" y="4279392"/>
+            <a:ext cx="1371600" cy="292608"/>
+          </a:xfrm>
+          <a:prstGeom prst="rect">
+            <a:avLst/>
+          </a:prstGeom>
+          <a:noFill/>
+          <a:ln/>
+        </p:spPr>
+        <p:txBody>
+          <a:bodyPr wrap="square" rtlCol="0" anchor="ctr"/>
+          <a:lstStyle/>
+          <a:p>
+            <a:pPr algn="ctr" indent="0" marL="0">
+              <a:buNone/>
+            </a:pPr>
+            <a:r>
+              <a:rPr lang="en-US" sz="1800" b="1" dirty="0">
+                <a:solidFill>
+                  <a:srgbClr val="0D1F3C"/>
+                </a:solidFill>
+                <a:latin typeface="Cambria" pitchFamily="34" charset="0"/>
+                <a:ea typeface="Cambria" pitchFamily="34" charset="-122"/>
+                <a:cs typeface="Cambria" pitchFamily="34" charset="-120"/>
+              </a:rPr>
+              <a:t>1.32s</a:t>
+            </a:r>
+            <a:endParaRPr lang="en-US" sz="1800" dirty="0"/>
+          </a:p>
+        </p:txBody>
+      </p:sp>
+      <p:sp>
+        <p:nvSpPr>
+          <p:cNvPr id="35" name="Text 33"/>
+          <p:cNvSpPr/>
+          <p:nvPr/>
+        </p:nvSpPr>
+        <p:spPr>
+          <a:xfrm>
+            <a:off x="3858768" y="4562856"/>
+            <a:ext cx="1371600" cy="201168"/>
+          </a:xfrm>
+          <a:prstGeom prst="rect">
+            <a:avLst/>
+          </a:prstGeom>
+          <a:noFill/>
+          <a:ln/>
+        </p:spPr>
+        <p:txBody>
+          <a:bodyPr wrap="square" rtlCol="0" anchor="ctr"/>
+          <a:lstStyle/>
+          <a:p>
+            <a:pPr algn="ctr" indent="0" marL="0">
+              <a:buNone/>
+            </a:pPr>
+            <a:r>
+              <a:rPr lang="en-US" sz="850" dirty="0">
+                <a:solidFill>
+                  <a:srgbClr val="4A5568"/>
+                </a:solidFill>
+                <a:latin typeface="Calibri" pitchFamily="34" charset="0"/>
+                <a:ea typeface="Calibri" pitchFamily="34" charset="-122"/>
+                <a:cs typeface="Calibri" pitchFamily="34" charset="-120"/>
+              </a:rPr>
+              <a:t>CPU · 45 tok/s</a:t>
+            </a:r>
+            <a:endParaRPr lang="en-US" sz="850" dirty="0"/>
+          </a:p>
+        </p:txBody>
+      </p:sp>
+      <p:sp>
+        <p:nvSpPr>
+          <p:cNvPr id="36" name="Shape 34"/>
+          <p:cNvSpPr/>
+          <p:nvPr/>
+        </p:nvSpPr>
+        <p:spPr>
+          <a:xfrm>
+            <a:off x="5431536" y="4251960"/>
+            <a:ext cx="1371600" cy="658368"/>
+          </a:xfrm>
+          <a:prstGeom prst="roundRect">
+            <a:avLst>
+              <a:gd name="adj" fmla="val 13889"/>
+            </a:avLst>
+          </a:prstGeom>
+          <a:solidFill>
+            <a:srgbClr val="000000">
+              <a:alpha val="5000"/>
+            </a:srgbClr>
+          </a:solidFill>
+          <a:ln w="12700">
+            <a:solidFill>
+              <a:srgbClr val="000000">
+                <a:alpha val="10000"/>
+              </a:srgbClr>
+            </a:solidFill>
+            <a:prstDash val="solid"/>
+          </a:ln>
+        </p:spPr>
+      </p:sp>
+      <p:sp>
+        <p:nvSpPr>
+          <p:cNvPr id="37" name="Text 35"/>
+          <p:cNvSpPr/>
+          <p:nvPr/>
+        </p:nvSpPr>
+        <p:spPr>
+          <a:xfrm>
+            <a:off x="5431536" y="4279392"/>
+            <a:ext cx="1371600" cy="292608"/>
+          </a:xfrm>
+          <a:prstGeom prst="rect">
+            <a:avLst/>
+          </a:prstGeom>
+          <a:noFill/>
+          <a:ln/>
+        </p:spPr>
+        <p:txBody>
+          <a:bodyPr wrap="square" rtlCol="0" anchor="ctr"/>
+          <a:lstStyle/>
+          <a:p>
+            <a:pPr algn="ctr" indent="0" marL="0">
+              <a:buNone/>
+            </a:pPr>
+            <a:r>
+              <a:rPr lang="en-US" sz="1800" b="1" dirty="0">
+                <a:solidFill>
+                  <a:srgbClr val="0D1F3C"/>
+                </a:solidFill>
+                <a:latin typeface="Cambria" pitchFamily="34" charset="0"/>
+                <a:ea typeface="Cambria" pitchFamily="34" charset="-122"/>
+                <a:cs typeface="Cambria" pitchFamily="34" charset="-120"/>
+              </a:rPr>
+              <a:t>1.62s</a:t>
+            </a:r>
+            <a:endParaRPr lang="en-US" sz="1800" dirty="0"/>
+          </a:p>
+        </p:txBody>
+      </p:sp>
+      <p:sp>
+        <p:nvSpPr>
+          <p:cNvPr id="38" name="Text 36"/>
+          <p:cNvSpPr/>
+          <p:nvPr/>
+        </p:nvSpPr>
+        <p:spPr>
+          <a:xfrm>
+            <a:off x="5431536" y="4562856"/>
+            <a:ext cx="1371600" cy="201168"/>
+          </a:xfrm>
+          <a:prstGeom prst="rect">
+            <a:avLst/>
+          </a:prstGeom>
+          <a:noFill/>
+          <a:ln/>
+        </p:spPr>
+        <p:txBody>
+          <a:bodyPr wrap="square" rtlCol="0" anchor="ctr"/>
+          <a:lstStyle/>
+          <a:p>
+            <a:pPr algn="ctr" indent="0" marL="0">
+              <a:buNone/>
+            </a:pPr>
+            <a:r>
+              <a:rPr lang="en-US" sz="850" dirty="0">
+                <a:solidFill>
+                  <a:srgbClr val="4A5568"/>
+                </a:solidFill>
+                <a:latin typeface="Calibri" pitchFamily="34" charset="0"/>
+                <a:ea typeface="Calibri" pitchFamily="34" charset="-122"/>
+                <a:cs typeface="Calibri" pitchFamily="34" charset="-120"/>
+              </a:rPr>
+              <a:t>NPU · 37 tok/s</a:t>
+            </a:r>
+            <a:endParaRPr lang="en-US" sz="850" dirty="0"/>
+          </a:p>
+        </p:txBody>
+      </p:sp>
+      <p:sp>
+        <p:nvSpPr>
+          <p:cNvPr id="39" name="Text 37"/>
+          <p:cNvSpPr/>
+          <p:nvPr/>
+        </p:nvSpPr>
+        <p:spPr>
+          <a:xfrm>
+            <a:off x="457200" y="4919472"/>
+            <a:ext cx="8229600" cy="164592"/>
+          </a:xfrm>
+          <a:prstGeom prst="rect">
+            <a:avLst/>
+          </a:prstGeom>
+          <a:noFill/>
+          <a:ln/>
+        </p:spPr>
+        <p:txBody>
+          <a:bodyPr wrap="square" rtlCol="0" anchor="ctr"/>
+          <a:lstStyle/>
+          <a:p>
+            <a:pPr algn="ctr" indent="0" marL="0">
+              <a:buNone/>
+            </a:pPr>
+            <a:r>
+              <a:rPr lang="en-US" sz="900" dirty="0">
+                <a:solidFill>
+                  <a:srgbClr val="4A5568">
+                    <a:alpha val="80000"/>
+                  </a:srgbClr>
+                </a:solidFill>
+                <a:latin typeface="Calibri" pitchFamily="34" charset="0"/>
+                <a:ea typeface="Calibri" pitchFamily="34" charset="-122"/>
+                <a:cs typeface="Calibri" pitchFamily="34" charset="-120"/>
+              </a:rPr>
+              <a:t>Test Environment · KentoI (Intel Panther Lake)</a:t>
+            </a:r>
+            <a:endParaRPr lang="en-US" sz="900" dirty="0"/>
+          </a:p>
+        </p:txBody>
+      </p:sp>
     </p:spTree>
   </p:cSld>
   <p:clrMapOvr>
@@ -7833,6 +7810,13 @@
 <file path=ppt/slides/slide9.xml><?xml version="1.0" encoding="utf-8"?>
 <p:sld xmlns:a="http://schemas.openxmlformats.org/drawingml/2006/main" xmlns:r="http://schemas.openxmlformats.org/officeDocument/2006/relationships" xmlns:p="http://schemas.openxmlformats.org/presentationml/2006/main">
   <p:cSld name="Slide 9">
+    <p:bg>
+      <p:bgPr>
+        <a:solidFill>
+          <a:srgbClr val="EEF5FF"/>
+        </a:solidFill>
+      </p:bgPr>
+    </p:bg>
     <p:spTree>
       <p:nvGrpSpPr>
         <p:cNvPr id="1" name=""/>
@@ -7849,39 +7833,14 @@
       </p:grpSpPr>
       <p:sp>
         <p:nvSpPr>
-          <p:cNvPr id="2" name="Shape 0"/>
-          <p:cNvSpPr/>
-          <p:nvPr/>
-        </p:nvSpPr>
-        <p:spPr>
-          <a:xfrm>
-            <a:off x="0" y="0"/>
-            <a:ext cx="9144000" cy="1371600"/>
-          </a:xfrm>
-          <a:prstGeom prst="rect">
-            <a:avLst/>
-          </a:prstGeom>
-          <a:solidFill>
-            <a:srgbClr val="0D1F3C"/>
-          </a:solidFill>
-          <a:ln w="12700">
-            <a:solidFill>
-              <a:srgbClr val="0D1F3C"/>
-            </a:solidFill>
-            <a:prstDash val="solid"/>
-          </a:ln>
-        </p:spPr>
-      </p:sp>
-      <p:sp>
-        <p:nvSpPr>
-          <p:cNvPr id="3" name="Text 1"/>
-          <p:cNvSpPr/>
-          <p:nvPr/>
-        </p:nvSpPr>
-        <p:spPr>
-          <a:xfrm>
-            <a:off x="219456" y="219456"/>
-            <a:ext cx="2011680" cy="256032"/>
+          <p:cNvPr id="2" name="Text 0"/>
+          <p:cNvSpPr/>
+          <p:nvPr/>
+        </p:nvSpPr>
+        <p:spPr>
+          <a:xfrm>
+            <a:off x="3383280" y="237744"/>
+            <a:ext cx="2377440" cy="256032"/>
           </a:xfrm>
           <a:prstGeom prst="roundRect">
             <a:avLst>
@@ -7889,7 +7848,7 @@
             </a:avLst>
           </a:prstGeom>
           <a:solidFill>
-            <a:srgbClr val="F6AE2D"/>
+            <a:srgbClr val="00B4D8"/>
           </a:solidFill>
           <a:ln/>
         </p:spPr>
@@ -7909,7 +7868,7 @@
                 <a:ea typeface="Calibri" pitchFamily="34" charset="-122"/>
                 <a:cs typeface="Calibri" pitchFamily="34" charset="-120"/>
               </a:rPr>
-              <a:t>4 · VALUE &amp; IMPACT / CURB-CUT</a:t>
+              <a:t>3 · USER EXPERIENCE FLOW</a:t>
             </a:r>
             <a:endParaRPr lang="en-US" sz="900" dirty="0"/>
           </a:p>
@@ -7917,127 +7876,61 @@
       </p:sp>
       <p:sp>
         <p:nvSpPr>
-          <p:cNvPr id="4" name="Text 2"/>
-          <p:cNvSpPr/>
-          <p:nvPr/>
-        </p:nvSpPr>
-        <p:spPr>
-          <a:xfrm>
-            <a:off x="219456" y="548640"/>
-            <a:ext cx="8686800" cy="512064"/>
-          </a:xfrm>
-          <a:prstGeom prst="rect">
-            <a:avLst/>
-          </a:prstGeom>
-          <a:noFill/>
-          <a:ln/>
-        </p:spPr>
-        <p:txBody>
-          <a:bodyPr wrap="square" rtlCol="0" anchor="ctr"/>
-          <a:lstStyle/>
-          <a:p>
-            <a:pPr indent="0" marL="0">
-              <a:buNone/>
-            </a:pPr>
-            <a:r>
-              <a:rPr lang="en-US" sz="2200" b="1" dirty="0">
-                <a:solidFill>
-                  <a:srgbClr val="FFFFFF"/>
+          <p:cNvPr id="3" name="Text 1"/>
+          <p:cNvSpPr/>
+          <p:nvPr/>
+        </p:nvSpPr>
+        <p:spPr>
+          <a:xfrm>
+            <a:off x="457200" y="566928"/>
+            <a:ext cx="8229600" cy="548640"/>
+          </a:xfrm>
+          <a:prstGeom prst="rect">
+            <a:avLst/>
+          </a:prstGeom>
+          <a:noFill/>
+          <a:ln/>
+        </p:spPr>
+        <p:txBody>
+          <a:bodyPr wrap="square" rtlCol="0" anchor="ctr"/>
+          <a:lstStyle/>
+          <a:p>
+            <a:pPr algn="ctr" indent="0" marL="0">
+              <a:buNone/>
+            </a:pPr>
+            <a:r>
+              <a:rPr lang="en-US" sz="3000" b="1" dirty="0">
+                <a:solidFill>
+                  <a:srgbClr val="0D1F3C"/>
                 </a:solidFill>
                 <a:latin typeface="Cambria" pitchFamily="34" charset="0"/>
                 <a:ea typeface="Cambria" pitchFamily="34" charset="-122"/>
                 <a:cs typeface="Cambria" pitchFamily="34" charset="-120"/>
               </a:rPr>
-              <a:t>Curb-Cut Effect — From 20% to Everyday Users</a:t>
-            </a:r>
-            <a:endParaRPr lang="en-US" sz="2200" dirty="0"/>
-          </a:p>
-        </p:txBody>
-      </p:sp>
-      <p:sp>
-        <p:nvSpPr>
-          <p:cNvPr id="5" name="Text 3"/>
-          <p:cNvSpPr/>
-          <p:nvPr/>
-        </p:nvSpPr>
-        <p:spPr>
-          <a:xfrm>
-            <a:off x="219456" y="1042416"/>
-            <a:ext cx="8686800" cy="256032"/>
-          </a:xfrm>
-          <a:prstGeom prst="rect">
-            <a:avLst/>
-          </a:prstGeom>
-          <a:noFill/>
-          <a:ln/>
-        </p:spPr>
-        <p:txBody>
-          <a:bodyPr wrap="square" rtlCol="0" anchor="ctr"/>
-          <a:lstStyle/>
-          <a:p>
-            <a:pPr indent="0" marL="0">
-              <a:buNone/>
-            </a:pPr>
-            <a:r>
-              <a:rPr lang="en-US" sz="1100" dirty="0">
-                <a:solidFill>
-                  <a:srgbClr val="AAAAAA"/>
-                </a:solidFill>
-                <a:latin typeface="Calibri" pitchFamily="34" charset="0"/>
-                <a:ea typeface="Calibri" pitchFamily="34" charset="-122"/>
-                <a:cs typeface="Calibri" pitchFamily="34" charset="-120"/>
-              </a:rPr>
-              <a:t>The same solution works for everyday users — not just vision-impaired</a:t>
-            </a:r>
-            <a:endParaRPr lang="en-US" sz="1100" dirty="0"/>
-          </a:p>
-        </p:txBody>
-      </p:sp>
-      <p:sp>
-        <p:nvSpPr>
-          <p:cNvPr id="6" name="Shape 4"/>
-          <p:cNvSpPr/>
-          <p:nvPr/>
-        </p:nvSpPr>
-        <p:spPr>
-          <a:xfrm>
-            <a:off x="182880" y="1481328"/>
-            <a:ext cx="2103120" cy="3401568"/>
-          </a:xfrm>
-          <a:prstGeom prst="roundRect">
-            <a:avLst>
-              <a:gd name="adj" fmla="val 6522"/>
-            </a:avLst>
-          </a:prstGeom>
-          <a:solidFill>
-            <a:srgbClr val="F4F6FA"/>
-          </a:solidFill>
-          <a:ln w="12700">
-            <a:solidFill>
-              <a:srgbClr val="F4F6FA"/>
-            </a:solidFill>
-            <a:prstDash val="solid"/>
-          </a:ln>
-        </p:spPr>
-      </p:sp>
-      <p:sp>
-        <p:nvSpPr>
-          <p:cNvPr id="7" name="Shape 5"/>
-          <p:cNvSpPr/>
-          <p:nvPr/>
-        </p:nvSpPr>
-        <p:spPr>
-          <a:xfrm>
-            <a:off x="182880" y="1481328"/>
-            <a:ext cx="2103120" cy="45720"/>
-          </a:xfrm>
-          <a:prstGeom prst="rect">
-            <a:avLst/>
-          </a:prstGeom>
-          <a:solidFill>
-            <a:srgbClr val="00B4D8"/>
-          </a:solidFill>
-          <a:ln w="12700">
+              <a:t>User Journey Map</a:t>
+            </a:r>
+            <a:endParaRPr lang="en-US" sz="3000" dirty="0"/>
+          </a:p>
+        </p:txBody>
+      </p:sp>
+      <p:sp>
+        <p:nvSpPr>
+          <p:cNvPr id="4" name="Shape 2"/>
+          <p:cNvSpPr/>
+          <p:nvPr/>
+        </p:nvSpPr>
+        <p:spPr>
+          <a:xfrm>
+            <a:off x="676656" y="1316736"/>
+            <a:ext cx="914400" cy="914400"/>
+          </a:xfrm>
+          <a:prstGeom prst="ellipse">
+            <a:avLst/>
+          </a:prstGeom>
+          <a:solidFill>
+            <a:srgbClr val="FFFFFF"/>
+          </a:solidFill>
+          <a:ln w="38100">
             <a:solidFill>
               <a:srgbClr val="00B4D8"/>
             </a:solidFill>
@@ -8047,30 +7940,69 @@
       </p:sp>
       <p:sp>
         <p:nvSpPr>
-          <p:cNvPr id="8" name="Text 6"/>
-          <p:cNvSpPr/>
-          <p:nvPr/>
-        </p:nvSpPr>
-        <p:spPr>
-          <a:xfrm>
-            <a:off x="320040" y="1664208"/>
-            <a:ext cx="1828800" cy="658368"/>
-          </a:xfrm>
-          <a:prstGeom prst="rect">
-            <a:avLst/>
-          </a:prstGeom>
-          <a:noFill/>
-          <a:ln/>
-        </p:spPr>
-        <p:txBody>
-          <a:bodyPr wrap="square" rtlCol="0" anchor="ctr"/>
-          <a:lstStyle/>
-          <a:p>
-            <a:pPr indent="0" marL="0">
-              <a:buNone/>
-            </a:pPr>
-            <a:r>
-              <a:rPr lang="en-US" sz="1500" b="1" dirty="0">
+          <p:cNvPr id="5" name="Text 3"/>
+          <p:cNvSpPr/>
+          <p:nvPr/>
+        </p:nvSpPr>
+        <p:spPr>
+          <a:xfrm>
+            <a:off x="1664208" y="1627632"/>
+            <a:ext cx="329184" cy="274320"/>
+          </a:xfrm>
+          <a:prstGeom prst="rect">
+            <a:avLst/>
+          </a:prstGeom>
+          <a:noFill/>
+          <a:ln/>
+        </p:spPr>
+        <p:txBody>
+          <a:bodyPr wrap="square" rtlCol="0" anchor="ctr"/>
+          <a:lstStyle/>
+          <a:p>
+            <a:pPr algn="ctr" indent="0" marL="0">
+              <a:buNone/>
+            </a:pPr>
+            <a:r>
+              <a:rPr lang="en-US" sz="1600" dirty="0">
+                <a:solidFill>
+                  <a:srgbClr val="00B4D8"/>
+                </a:solidFill>
+                <a:latin typeface="Calibri" pitchFamily="34" charset="0"/>
+                <a:ea typeface="Calibri" pitchFamily="34" charset="-122"/>
+                <a:cs typeface="Calibri" pitchFamily="34" charset="-120"/>
+              </a:rPr>
+              <a:t>→</a:t>
+            </a:r>
+            <a:endParaRPr lang="en-US" sz="1600" dirty="0"/>
+          </a:p>
+        </p:txBody>
+      </p:sp>
+      <p:sp>
+        <p:nvSpPr>
+          <p:cNvPr id="6" name="Text 4"/>
+          <p:cNvSpPr/>
+          <p:nvPr/>
+        </p:nvSpPr>
+        <p:spPr>
+          <a:xfrm>
+            <a:off x="274320" y="2395728"/>
+            <a:ext cx="1719072" cy="347472"/>
+          </a:xfrm>
+          <a:prstGeom prst="rect">
+            <a:avLst/>
+          </a:prstGeom>
+          <a:noFill/>
+          <a:ln/>
+        </p:spPr>
+        <p:txBody>
+          <a:bodyPr wrap="square" rtlCol="0" anchor="ctr"/>
+          <a:lstStyle/>
+          <a:p>
+            <a:pPr algn="ctr" indent="0" marL="0">
+              <a:buNone/>
+            </a:pPr>
+            <a:r>
+              <a:rPr lang="en-US" sz="1400" b="1" dirty="0">
                 <a:solidFill>
                   <a:srgbClr val="0D1F3C"/>
                 </a:solidFill>
@@ -8078,38 +8010,38 @@
                 <a:ea typeface="Cambria" pitchFamily="34" charset="-122"/>
                 <a:cs typeface="Cambria" pitchFamily="34" charset="-120"/>
               </a:rPr>
-              <a:t>Screen Glare &amp; Reflections</a:t>
-            </a:r>
-            <a:endParaRPr lang="en-US" sz="1500" dirty="0"/>
-          </a:p>
-        </p:txBody>
-      </p:sp>
-      <p:sp>
-        <p:nvSpPr>
-          <p:cNvPr id="9" name="Text 7"/>
-          <p:cNvSpPr/>
-          <p:nvPr/>
-        </p:nvSpPr>
-        <p:spPr>
-          <a:xfrm>
-            <a:off x="320040" y="2377440"/>
-            <a:ext cx="1828800" cy="2377440"/>
-          </a:xfrm>
-          <a:prstGeom prst="rect">
-            <a:avLst/>
-          </a:prstGeom>
-          <a:noFill/>
-          <a:ln/>
-        </p:spPr>
-        <p:txBody>
-          <a:bodyPr wrap="square" rtlCol="0" anchor="t"/>
-          <a:lstStyle/>
-          <a:p>
-            <a:pPr indent="0" marL="0">
-              <a:buNone/>
-            </a:pPr>
-            <a:r>
-              <a:rPr lang="en-US" sz="1100" dirty="0">
+              <a:t>Pre-installed</a:t>
+            </a:r>
+            <a:endParaRPr lang="en-US" sz="1400" dirty="0"/>
+          </a:p>
+        </p:txBody>
+      </p:sp>
+      <p:sp>
+        <p:nvSpPr>
+          <p:cNvPr id="7" name="Text 5"/>
+          <p:cNvSpPr/>
+          <p:nvPr/>
+        </p:nvSpPr>
+        <p:spPr>
+          <a:xfrm>
+            <a:off x="274320" y="2798064"/>
+            <a:ext cx="1719072" cy="658368"/>
+          </a:xfrm>
+          <a:prstGeom prst="rect">
+            <a:avLst/>
+          </a:prstGeom>
+          <a:noFill/>
+          <a:ln/>
+        </p:spPr>
+        <p:txBody>
+          <a:bodyPr wrap="square" rtlCol="0" anchor="ctr"/>
+          <a:lstStyle/>
+          <a:p>
+            <a:pPr algn="ctr" indent="0" marL="0">
+              <a:buNone/>
+            </a:pPr>
+            <a:r>
+              <a:rPr lang="en-US" sz="1000" dirty="0">
                 <a:solidFill>
                   <a:srgbClr val="4A5568"/>
                 </a:solidFill>
@@ -8117,57 +8049,47 @@
                 <a:ea typeface="Calibri" pitchFamily="34" charset="-122"/>
                 <a:cs typeface="Calibri" pitchFamily="34" charset="-120"/>
               </a:rPr>
-              <a:t>Same visual experience as dim-vision users</a:t>
-            </a:r>
-            <a:endParaRPr lang="en-US" sz="1100" dirty="0"/>
-          </a:p>
-        </p:txBody>
-      </p:sp>
-      <p:sp>
-        <p:nvSpPr>
-          <p:cNvPr id="10" name="Shape 8"/>
-          <p:cNvSpPr/>
-          <p:nvPr/>
-        </p:nvSpPr>
-        <p:spPr>
-          <a:xfrm>
-            <a:off x="2395728" y="1481328"/>
-            <a:ext cx="2103120" cy="3401568"/>
-          </a:xfrm>
-          <a:prstGeom prst="roundRect">
-            <a:avLst>
-              <a:gd name="adj" fmla="val 6522"/>
-            </a:avLst>
-          </a:prstGeom>
-          <a:solidFill>
-            <a:srgbClr val="F4F6FA"/>
-          </a:solidFill>
-          <a:ln w="12700">
-            <a:solidFill>
-              <a:srgbClr val="F4F6FA"/>
-            </a:solidFill>
-            <a:prstDash val="solid"/>
-          </a:ln>
-        </p:spPr>
-      </p:sp>
-      <p:sp>
-        <p:nvSpPr>
-          <p:cNvPr id="11" name="Shape 9"/>
-          <p:cNvSpPr/>
-          <p:nvPr/>
-        </p:nvSpPr>
-        <p:spPr>
-          <a:xfrm>
-            <a:off x="2395728" y="1481328"/>
-            <a:ext cx="2103120" cy="45720"/>
-          </a:xfrm>
-          <a:prstGeom prst="rect">
-            <a:avLst/>
-          </a:prstGeom>
-          <a:solidFill>
-            <a:srgbClr val="00B4D8"/>
-          </a:solidFill>
-          <a:ln w="12700">
+              <a:t>Ready at boot</a:t>
+            </a:r>
+            <a:endParaRPr lang="en-US" sz="1000" dirty="0"/>
+          </a:p>
+          <a:p>
+            <a:pPr algn="ctr" indent="0" marL="0">
+              <a:buNone/>
+            </a:pPr>
+            <a:r>
+              <a:rPr lang="en-US" sz="1000" dirty="0">
+                <a:solidFill>
+                  <a:srgbClr val="4A5568"/>
+                </a:solidFill>
+                <a:latin typeface="Calibri" pitchFamily="34" charset="0"/>
+                <a:ea typeface="Calibri" pitchFamily="34" charset="-122"/>
+                <a:cs typeface="Calibri" pitchFamily="34" charset="-120"/>
+              </a:rPr>
+              <a:t>No setup needed</a:t>
+            </a:r>
+            <a:endParaRPr lang="en-US" sz="1000" dirty="0"/>
+          </a:p>
+        </p:txBody>
+      </p:sp>
+      <p:sp>
+        <p:nvSpPr>
+          <p:cNvPr id="8" name="Shape 6"/>
+          <p:cNvSpPr/>
+          <p:nvPr/>
+        </p:nvSpPr>
+        <p:spPr>
+          <a:xfrm>
+            <a:off x="2395728" y="1316736"/>
+            <a:ext cx="914400" cy="914400"/>
+          </a:xfrm>
+          <a:prstGeom prst="ellipse">
+            <a:avLst/>
+          </a:prstGeom>
+          <a:solidFill>
+            <a:srgbClr val="FFFFFF"/>
+          </a:solidFill>
+          <a:ln w="38100">
             <a:solidFill>
               <a:srgbClr val="00B4D8"/>
             </a:solidFill>
@@ -8177,30 +8099,69 @@
       </p:sp>
       <p:sp>
         <p:nvSpPr>
-          <p:cNvPr id="12" name="Text 10"/>
-          <p:cNvSpPr/>
-          <p:nvPr/>
-        </p:nvSpPr>
-        <p:spPr>
-          <a:xfrm>
-            <a:off x="2532888" y="1664208"/>
-            <a:ext cx="1828800" cy="658368"/>
-          </a:xfrm>
-          <a:prstGeom prst="rect">
-            <a:avLst/>
-          </a:prstGeom>
-          <a:noFill/>
-          <a:ln/>
-        </p:spPr>
-        <p:txBody>
-          <a:bodyPr wrap="square" rtlCol="0" anchor="ctr"/>
-          <a:lstStyle/>
-          <a:p>
-            <a:pPr indent="0" marL="0">
-              <a:buNone/>
-            </a:pPr>
-            <a:r>
-              <a:rPr lang="en-US" sz="1500" b="1" dirty="0">
+          <p:cNvPr id="9" name="Text 7"/>
+          <p:cNvSpPr/>
+          <p:nvPr/>
+        </p:nvSpPr>
+        <p:spPr>
+          <a:xfrm>
+            <a:off x="3383280" y="1627632"/>
+            <a:ext cx="329184" cy="274320"/>
+          </a:xfrm>
+          <a:prstGeom prst="rect">
+            <a:avLst/>
+          </a:prstGeom>
+          <a:noFill/>
+          <a:ln/>
+        </p:spPr>
+        <p:txBody>
+          <a:bodyPr wrap="square" rtlCol="0" anchor="ctr"/>
+          <a:lstStyle/>
+          <a:p>
+            <a:pPr algn="ctr" indent="0" marL="0">
+              <a:buNone/>
+            </a:pPr>
+            <a:r>
+              <a:rPr lang="en-US" sz="1600" dirty="0">
+                <a:solidFill>
+                  <a:srgbClr val="00B4D8"/>
+                </a:solidFill>
+                <a:latin typeface="Calibri" pitchFamily="34" charset="0"/>
+                <a:ea typeface="Calibri" pitchFamily="34" charset="-122"/>
+                <a:cs typeface="Calibri" pitchFamily="34" charset="-120"/>
+              </a:rPr>
+              <a:t>→</a:t>
+            </a:r>
+            <a:endParaRPr lang="en-US" sz="1600" dirty="0"/>
+          </a:p>
+        </p:txBody>
+      </p:sp>
+      <p:sp>
+        <p:nvSpPr>
+          <p:cNvPr id="10" name="Text 8"/>
+          <p:cNvSpPr/>
+          <p:nvPr/>
+        </p:nvSpPr>
+        <p:spPr>
+          <a:xfrm>
+            <a:off x="1993392" y="2395728"/>
+            <a:ext cx="1719072" cy="347472"/>
+          </a:xfrm>
+          <a:prstGeom prst="rect">
+            <a:avLst/>
+          </a:prstGeom>
+          <a:noFill/>
+          <a:ln/>
+        </p:spPr>
+        <p:txBody>
+          <a:bodyPr wrap="square" rtlCol="0" anchor="ctr"/>
+          <a:lstStyle/>
+          <a:p>
+            <a:pPr algn="ctr" indent="0" marL="0">
+              <a:buNone/>
+            </a:pPr>
+            <a:r>
+              <a:rPr lang="en-US" sz="1400" b="1" dirty="0">
                 <a:solidFill>
                   <a:srgbClr val="0D1F3C"/>
                 </a:solidFill>
@@ -8208,38 +8169,38 @@
                 <a:ea typeface="Cambria" pitchFamily="34" charset="-122"/>
                 <a:cs typeface="Cambria" pitchFamily="34" charset="-120"/>
               </a:rPr>
-              <a:t>Outdoor Bright Sunlight</a:t>
-            </a:r>
-            <a:endParaRPr lang="en-US" sz="1500" dirty="0"/>
-          </a:p>
-        </p:txBody>
-      </p:sp>
-      <p:sp>
-        <p:nvSpPr>
-          <p:cNvPr id="13" name="Text 11"/>
-          <p:cNvSpPr/>
-          <p:nvPr/>
-        </p:nvSpPr>
-        <p:spPr>
-          <a:xfrm>
-            <a:off x="2532888" y="2377440"/>
-            <a:ext cx="1828800" cy="2377440"/>
-          </a:xfrm>
-          <a:prstGeom prst="rect">
-            <a:avLst/>
-          </a:prstGeom>
-          <a:noFill/>
-          <a:ln/>
-        </p:spPr>
-        <p:txBody>
-          <a:bodyPr wrap="square" rtlCol="0" anchor="t"/>
-          <a:lstStyle/>
-          <a:p>
-            <a:pPr indent="0" marL="0">
-              <a:buNone/>
-            </a:pPr>
-            <a:r>
-              <a:rPr lang="en-US" sz="1100" dirty="0">
+              <a:t>One-time Setup</a:t>
+            </a:r>
+            <a:endParaRPr lang="en-US" sz="1400" dirty="0"/>
+          </a:p>
+        </p:txBody>
+      </p:sp>
+      <p:sp>
+        <p:nvSpPr>
+          <p:cNvPr id="11" name="Text 9"/>
+          <p:cNvSpPr/>
+          <p:nvPr/>
+        </p:nvSpPr>
+        <p:spPr>
+          <a:xfrm>
+            <a:off x="1993392" y="2798064"/>
+            <a:ext cx="1719072" cy="658368"/>
+          </a:xfrm>
+          <a:prstGeom prst="rect">
+            <a:avLst/>
+          </a:prstGeom>
+          <a:noFill/>
+          <a:ln/>
+        </p:spPr>
+        <p:txBody>
+          <a:bodyPr wrap="square" rtlCol="0" anchor="ctr"/>
+          <a:lstStyle/>
+          <a:p>
+            <a:pPr algn="ctr" indent="0" marL="0">
+              <a:buNone/>
+            </a:pPr>
+            <a:r>
+              <a:rPr lang="en-US" sz="1000" dirty="0">
                 <a:solidFill>
                   <a:srgbClr val="4A5568"/>
                 </a:solidFill>
@@ -8247,57 +8208,47 @@
                 <a:ea typeface="Calibri" pitchFamily="34" charset="-122"/>
                 <a:cs typeface="Calibri" pitchFamily="34" charset="-120"/>
               </a:rPr>
-              <a:t>Identical to the daily reality of foggy-vision users</a:t>
-            </a:r>
-            <a:endParaRPr lang="en-US" sz="1100" dirty="0"/>
-          </a:p>
-        </p:txBody>
-      </p:sp>
-      <p:sp>
-        <p:nvSpPr>
-          <p:cNvPr id="14" name="Shape 12"/>
-          <p:cNvSpPr/>
-          <p:nvPr/>
-        </p:nvSpPr>
-        <p:spPr>
-          <a:xfrm>
-            <a:off x="4608576" y="1481328"/>
-            <a:ext cx="2103120" cy="3401568"/>
-          </a:xfrm>
-          <a:prstGeom prst="roundRect">
-            <a:avLst>
-              <a:gd name="adj" fmla="val 6522"/>
-            </a:avLst>
-          </a:prstGeom>
-          <a:solidFill>
-            <a:srgbClr val="F4F6FA"/>
-          </a:solidFill>
-          <a:ln w="12700">
-            <a:solidFill>
-              <a:srgbClr val="F4F6FA"/>
-            </a:solidFill>
-            <a:prstDash val="solid"/>
-          </a:ln>
-        </p:spPr>
-      </p:sp>
-      <p:sp>
-        <p:nvSpPr>
-          <p:cNvPr id="15" name="Shape 13"/>
-          <p:cNvSpPr/>
-          <p:nvPr/>
-        </p:nvSpPr>
-        <p:spPr>
-          <a:xfrm>
-            <a:off x="4608576" y="1481328"/>
-            <a:ext cx="2103120" cy="45720"/>
-          </a:xfrm>
-          <a:prstGeom prst="rect">
-            <a:avLst/>
-          </a:prstGeom>
-          <a:solidFill>
-            <a:srgbClr val="00B4D8"/>
-          </a:solidFill>
-          <a:ln w="12700">
+              <a:t>25-point gaze calibration</a:t>
+            </a:r>
+            <a:endParaRPr lang="en-US" sz="1000" dirty="0"/>
+          </a:p>
+          <a:p>
+            <a:pPr algn="ctr" indent="0" marL="0">
+              <a:buNone/>
+            </a:pPr>
+            <a:r>
+              <a:rPr lang="en-US" sz="1000" dirty="0">
+                <a:solidFill>
+                  <a:srgbClr val="4A5568"/>
+                </a:solidFill>
+                <a:latin typeface="Calibri" pitchFamily="34" charset="0"/>
+                <a:ea typeface="Calibri" pitchFamily="34" charset="-122"/>
+                <a:cs typeface="Calibri" pitchFamily="34" charset="-120"/>
+              </a:rPr>
+              <a:t>Done once · ~60 sec</a:t>
+            </a:r>
+            <a:endParaRPr lang="en-US" sz="1000" dirty="0"/>
+          </a:p>
+        </p:txBody>
+      </p:sp>
+      <p:sp>
+        <p:nvSpPr>
+          <p:cNvPr id="12" name="Shape 10"/>
+          <p:cNvSpPr/>
+          <p:nvPr/>
+        </p:nvSpPr>
+        <p:spPr>
+          <a:xfrm>
+            <a:off x="4114800" y="1316736"/>
+            <a:ext cx="914400" cy="914400"/>
+          </a:xfrm>
+          <a:prstGeom prst="ellipse">
+            <a:avLst/>
+          </a:prstGeom>
+          <a:solidFill>
+            <a:srgbClr val="FFFFFF"/>
+          </a:solidFill>
+          <a:ln w="38100">
             <a:solidFill>
               <a:srgbClr val="00B4D8"/>
             </a:solidFill>
@@ -8307,30 +8258,69 @@
       </p:sp>
       <p:sp>
         <p:nvSpPr>
-          <p:cNvPr id="16" name="Text 14"/>
-          <p:cNvSpPr/>
-          <p:nvPr/>
-        </p:nvSpPr>
-        <p:spPr>
-          <a:xfrm>
-            <a:off x="4745736" y="1664208"/>
-            <a:ext cx="1828800" cy="658368"/>
-          </a:xfrm>
-          <a:prstGeom prst="rect">
-            <a:avLst/>
-          </a:prstGeom>
-          <a:noFill/>
-          <a:ln/>
-        </p:spPr>
-        <p:txBody>
-          <a:bodyPr wrap="square" rtlCol="0" anchor="ctr"/>
-          <a:lstStyle/>
-          <a:p>
-            <a:pPr indent="0" marL="0">
-              <a:buNone/>
-            </a:pPr>
-            <a:r>
-              <a:rPr lang="en-US" sz="1500" b="1" dirty="0">
+          <p:cNvPr id="13" name="Text 11"/>
+          <p:cNvSpPr/>
+          <p:nvPr/>
+        </p:nvSpPr>
+        <p:spPr>
+          <a:xfrm>
+            <a:off x="5102352" y="1627632"/>
+            <a:ext cx="329184" cy="274320"/>
+          </a:xfrm>
+          <a:prstGeom prst="rect">
+            <a:avLst/>
+          </a:prstGeom>
+          <a:noFill/>
+          <a:ln/>
+        </p:spPr>
+        <p:txBody>
+          <a:bodyPr wrap="square" rtlCol="0" anchor="ctr"/>
+          <a:lstStyle/>
+          <a:p>
+            <a:pPr algn="ctr" indent="0" marL="0">
+              <a:buNone/>
+            </a:pPr>
+            <a:r>
+              <a:rPr lang="en-US" sz="1600" dirty="0">
+                <a:solidFill>
+                  <a:srgbClr val="00B4D8"/>
+                </a:solidFill>
+                <a:latin typeface="Calibri" pitchFamily="34" charset="0"/>
+                <a:ea typeface="Calibri" pitchFamily="34" charset="-122"/>
+                <a:cs typeface="Calibri" pitchFamily="34" charset="-120"/>
+              </a:rPr>
+              <a:t>→</a:t>
+            </a:r>
+            <a:endParaRPr lang="en-US" sz="1600" dirty="0"/>
+          </a:p>
+        </p:txBody>
+      </p:sp>
+      <p:sp>
+        <p:nvSpPr>
+          <p:cNvPr id="14" name="Text 12"/>
+          <p:cNvSpPr/>
+          <p:nvPr/>
+        </p:nvSpPr>
+        <p:spPr>
+          <a:xfrm>
+            <a:off x="3712464" y="2395728"/>
+            <a:ext cx="1719072" cy="347472"/>
+          </a:xfrm>
+          <a:prstGeom prst="rect">
+            <a:avLst/>
+          </a:prstGeom>
+          <a:noFill/>
+          <a:ln/>
+        </p:spPr>
+        <p:txBody>
+          <a:bodyPr wrap="square" rtlCol="0" anchor="ctr"/>
+          <a:lstStyle/>
+          <a:p>
+            <a:pPr algn="ctr" indent="0" marL="0">
+              <a:buNone/>
+            </a:pPr>
+            <a:r>
+              <a:rPr lang="en-US" sz="1400" b="1" dirty="0">
                 <a:solidFill>
                   <a:srgbClr val="0D1F3C"/>
                 </a:solidFill>
@@ -8338,38 +8328,38 @@
                 <a:ea typeface="Cambria" pitchFamily="34" charset="-122"/>
                 <a:cs typeface="Cambria" pitchFamily="34" charset="-120"/>
               </a:rPr>
-              <a:t>Eye Strain from Long Screen Time</a:t>
-            </a:r>
-            <a:endParaRPr lang="en-US" sz="1500" dirty="0"/>
-          </a:p>
-        </p:txBody>
-      </p:sp>
-      <p:sp>
-        <p:nvSpPr>
-          <p:cNvPr id="17" name="Text 15"/>
-          <p:cNvSpPr/>
-          <p:nvPr/>
-        </p:nvSpPr>
-        <p:spPr>
-          <a:xfrm>
-            <a:off x="4745736" y="2377440"/>
-            <a:ext cx="1828800" cy="2377440"/>
-          </a:xfrm>
-          <a:prstGeom prst="rect">
-            <a:avLst/>
-          </a:prstGeom>
-          <a:noFill/>
-          <a:ln/>
-        </p:spPr>
-        <p:txBody>
-          <a:bodyPr wrap="square" rtlCol="0" anchor="t"/>
-          <a:lstStyle/>
-          <a:p>
-            <a:pPr indent="0" marL="0">
-              <a:buNone/>
-            </a:pPr>
-            <a:r>
-              <a:rPr lang="en-US" sz="1100" dirty="0">
+              <a:t>Browse Normally</a:t>
+            </a:r>
+            <a:endParaRPr lang="en-US" sz="1400" dirty="0"/>
+          </a:p>
+        </p:txBody>
+      </p:sp>
+      <p:sp>
+        <p:nvSpPr>
+          <p:cNvPr id="15" name="Text 13"/>
+          <p:cNvSpPr/>
+          <p:nvPr/>
+        </p:nvSpPr>
+        <p:spPr>
+          <a:xfrm>
+            <a:off x="3712464" y="2798064"/>
+            <a:ext cx="1719072" cy="658368"/>
+          </a:xfrm>
+          <a:prstGeom prst="rect">
+            <a:avLst/>
+          </a:prstGeom>
+          <a:noFill/>
+          <a:ln/>
+        </p:spPr>
+        <p:txBody>
+          <a:bodyPr wrap="square" rtlCol="0" anchor="ctr"/>
+          <a:lstStyle/>
+          <a:p>
+            <a:pPr algn="ctr" indent="0" marL="0">
+              <a:buNone/>
+            </a:pPr>
+            <a:r>
+              <a:rPr lang="en-US" sz="1000" dirty="0">
                 <a:solidFill>
                   <a:srgbClr val="4A5568"/>
                 </a:solidFill>
@@ -8377,34 +8367,49 @@
                 <a:ea typeface="Calibri" pitchFamily="34" charset="-122"/>
                 <a:cs typeface="Calibri" pitchFamily="34" charset="-120"/>
               </a:rPr>
-              <a:t>#1 pain point for 71% of impaired users — common for everyone after extended sessions</a:t>
-            </a:r>
-            <a:endParaRPr lang="en-US" sz="1100" dirty="0"/>
-          </a:p>
-        </p:txBody>
-      </p:sp>
-      <p:sp>
-        <p:nvSpPr>
-          <p:cNvPr id="18" name="Shape 16"/>
-          <p:cNvSpPr/>
-          <p:nvPr/>
-        </p:nvSpPr>
-        <p:spPr>
-          <a:xfrm>
-            <a:off x="6821424" y="1481328"/>
-            <a:ext cx="2103120" cy="3401568"/>
-          </a:xfrm>
-          <a:prstGeom prst="roundRect">
-            <a:avLst>
-              <a:gd name="adj" fmla="val 6522"/>
-            </a:avLst>
-          </a:prstGeom>
-          <a:solidFill>
-            <a:srgbClr val="F4F6FA"/>
-          </a:solidFill>
-          <a:ln w="12700">
+              <a:t>AI runs silently</a:t>
+            </a:r>
+            <a:endParaRPr lang="en-US" sz="1000" dirty="0"/>
+          </a:p>
+          <a:p>
+            <a:pPr algn="ctr" indent="0" marL="0">
+              <a:buNone/>
+            </a:pPr>
+            <a:r>
+              <a:rPr lang="en-US" sz="1000" dirty="0">
+                <a:solidFill>
+                  <a:srgbClr val="4A5568"/>
+                </a:solidFill>
+                <a:latin typeface="Calibri" pitchFamily="34" charset="0"/>
+                <a:ea typeface="Calibri" pitchFamily="34" charset="-122"/>
+                <a:cs typeface="Calibri" pitchFamily="34" charset="-120"/>
+              </a:rPr>
+              <a:t>No habit change</a:t>
+            </a:r>
+            <a:endParaRPr lang="en-US" sz="1000" dirty="0"/>
+          </a:p>
+        </p:txBody>
+      </p:sp>
+      <p:sp>
+        <p:nvSpPr>
+          <p:cNvPr id="16" name="Shape 14"/>
+          <p:cNvSpPr/>
+          <p:nvPr/>
+        </p:nvSpPr>
+        <p:spPr>
+          <a:xfrm>
+            <a:off x="5833872" y="1316736"/>
+            <a:ext cx="914400" cy="914400"/>
+          </a:xfrm>
+          <a:prstGeom prst="ellipse">
+            <a:avLst/>
+          </a:prstGeom>
+          <a:solidFill>
+            <a:srgbClr val="FFFFFF"/>
+          </a:solidFill>
+          <a:ln w="38100">
             <a:solidFill>
-              <a:srgbClr val="F4F6FA"/>
+              <a:srgbClr val="F6AE2D"/>
             </a:solidFill>
             <a:prstDash val="solid"/>
           </a:ln>
@@ -8412,22 +8417,156 @@
       </p:sp>
       <p:sp>
         <p:nvSpPr>
-          <p:cNvPr id="19" name="Shape 17"/>
-          <p:cNvSpPr/>
-          <p:nvPr/>
-        </p:nvSpPr>
-        <p:spPr>
-          <a:xfrm>
-            <a:off x="6821424" y="1481328"/>
-            <a:ext cx="2103120" cy="45720"/>
-          </a:xfrm>
-          <a:prstGeom prst="rect">
-            <a:avLst/>
-          </a:prstGeom>
-          <a:solidFill>
-            <a:srgbClr val="F6AE2D"/>
-          </a:solidFill>
-          <a:ln w="12700">
+          <p:cNvPr id="17" name="Text 15"/>
+          <p:cNvSpPr/>
+          <p:nvPr/>
+        </p:nvSpPr>
+        <p:spPr>
+          <a:xfrm>
+            <a:off x="6821424" y="1627632"/>
+            <a:ext cx="329184" cy="274320"/>
+          </a:xfrm>
+          <a:prstGeom prst="rect">
+            <a:avLst/>
+          </a:prstGeom>
+          <a:noFill/>
+          <a:ln/>
+        </p:spPr>
+        <p:txBody>
+          <a:bodyPr wrap="square" rtlCol="0" anchor="ctr"/>
+          <a:lstStyle/>
+          <a:p>
+            <a:pPr algn="ctr" indent="0" marL="0">
+              <a:buNone/>
+            </a:pPr>
+            <a:r>
+              <a:rPr lang="en-US" sz="1600" dirty="0">
+                <a:solidFill>
+                  <a:srgbClr val="00B4D8"/>
+                </a:solidFill>
+                <a:latin typeface="Calibri" pitchFamily="34" charset="0"/>
+                <a:ea typeface="Calibri" pitchFamily="34" charset="-122"/>
+                <a:cs typeface="Calibri" pitchFamily="34" charset="-120"/>
+              </a:rPr>
+              <a:t>→</a:t>
+            </a:r>
+            <a:endParaRPr lang="en-US" sz="1600" dirty="0"/>
+          </a:p>
+        </p:txBody>
+      </p:sp>
+      <p:sp>
+        <p:nvSpPr>
+          <p:cNvPr id="18" name="Text 16"/>
+          <p:cNvSpPr/>
+          <p:nvPr/>
+        </p:nvSpPr>
+        <p:spPr>
+          <a:xfrm>
+            <a:off x="5431536" y="2395728"/>
+            <a:ext cx="1719072" cy="347472"/>
+          </a:xfrm>
+          <a:prstGeom prst="rect">
+            <a:avLst/>
+          </a:prstGeom>
+          <a:noFill/>
+          <a:ln/>
+        </p:spPr>
+        <p:txBody>
+          <a:bodyPr wrap="square" rtlCol="0" anchor="ctr"/>
+          <a:lstStyle/>
+          <a:p>
+            <a:pPr algn="ctr" indent="0" marL="0">
+              <a:buNone/>
+            </a:pPr>
+            <a:r>
+              <a:rPr lang="en-US" sz="1400" b="1" dirty="0">
+                <a:solidFill>
+                  <a:srgbClr val="0D1F3C"/>
+                </a:solidFill>
+                <a:latin typeface="Cambria" pitchFamily="34" charset="0"/>
+                <a:ea typeface="Cambria" pitchFamily="34" charset="-122"/>
+                <a:cs typeface="Cambria" pitchFamily="34" charset="-120"/>
+              </a:rPr>
+              <a:t>Gaze Holds 1.5s</a:t>
+            </a:r>
+            <a:endParaRPr lang="en-US" sz="1400" dirty="0"/>
+          </a:p>
+        </p:txBody>
+      </p:sp>
+      <p:sp>
+        <p:nvSpPr>
+          <p:cNvPr id="19" name="Text 17"/>
+          <p:cNvSpPr/>
+          <p:nvPr/>
+        </p:nvSpPr>
+        <p:spPr>
+          <a:xfrm>
+            <a:off x="5431536" y="2798064"/>
+            <a:ext cx="1719072" cy="658368"/>
+          </a:xfrm>
+          <a:prstGeom prst="rect">
+            <a:avLst/>
+          </a:prstGeom>
+          <a:noFill/>
+          <a:ln/>
+        </p:spPr>
+        <p:txBody>
+          <a:bodyPr wrap="square" rtlCol="0" anchor="ctr"/>
+          <a:lstStyle/>
+          <a:p>
+            <a:pPr algn="ctr" indent="0" marL="0">
+              <a:buNone/>
+            </a:pPr>
+            <a:r>
+              <a:rPr lang="en-US" sz="1000" dirty="0">
+                <a:solidFill>
+                  <a:srgbClr val="4A5568"/>
+                </a:solidFill>
+                <a:latin typeface="Calibri" pitchFamily="34" charset="0"/>
+                <a:ea typeface="Calibri" pitchFamily="34" charset="-122"/>
+                <a:cs typeface="Calibri" pitchFamily="34" charset="-120"/>
+              </a:rPr>
+              <a:t>Text enhancements</a:t>
+            </a:r>
+            <a:endParaRPr lang="en-US" sz="1000" dirty="0"/>
+          </a:p>
+          <a:p>
+            <a:pPr algn="ctr" indent="0" marL="0">
+              <a:buNone/>
+            </a:pPr>
+            <a:r>
+              <a:rPr lang="en-US" sz="1000" dirty="0">
+                <a:solidFill>
+                  <a:srgbClr val="4A5568"/>
+                </a:solidFill>
+                <a:latin typeface="Calibri" pitchFamily="34" charset="0"/>
+                <a:ea typeface="Calibri" pitchFamily="34" charset="-122"/>
+                <a:cs typeface="Calibri" pitchFamily="34" charset="-120"/>
+              </a:rPr>
+              <a:t>AI Summary appears</a:t>
+            </a:r>
+            <a:endParaRPr lang="en-US" sz="1000" dirty="0"/>
+          </a:p>
+        </p:txBody>
+      </p:sp>
+      <p:sp>
+        <p:nvSpPr>
+          <p:cNvPr id="20" name="Shape 18"/>
+          <p:cNvSpPr/>
+          <p:nvPr/>
+        </p:nvSpPr>
+        <p:spPr>
+          <a:xfrm>
+            <a:off x="7552944" y="1316736"/>
+            <a:ext cx="914400" cy="914400"/>
+          </a:xfrm>
+          <a:prstGeom prst="ellipse">
+            <a:avLst/>
+          </a:prstGeom>
+          <a:solidFill>
+            <a:srgbClr val="FFFFFF"/>
+          </a:solidFill>
+          <a:ln w="38100">
             <a:solidFill>
               <a:srgbClr val="00B4D8"/>
             </a:solidFill>
@@ -8437,30 +8576,30 @@
       </p:sp>
       <p:sp>
         <p:nvSpPr>
-          <p:cNvPr id="20" name="Text 18"/>
-          <p:cNvSpPr/>
-          <p:nvPr/>
-        </p:nvSpPr>
-        <p:spPr>
-          <a:xfrm>
-            <a:off x="6958584" y="1664208"/>
-            <a:ext cx="1828800" cy="658368"/>
-          </a:xfrm>
-          <a:prstGeom prst="rect">
-            <a:avLst/>
-          </a:prstGeom>
-          <a:noFill/>
-          <a:ln/>
-        </p:spPr>
-        <p:txBody>
-          <a:bodyPr wrap="square" rtlCol="0" anchor="ctr"/>
-          <a:lstStyle/>
-          <a:p>
-            <a:pPr indent="0" marL="0">
-              <a:buNone/>
-            </a:pPr>
-            <a:r>
-              <a:rPr lang="en-US" sz="1500" b="1" dirty="0">
+          <p:cNvPr id="21" name="Text 19"/>
+          <p:cNvSpPr/>
+          <p:nvPr/>
+        </p:nvSpPr>
+        <p:spPr>
+          <a:xfrm>
+            <a:off x="7150608" y="2395728"/>
+            <a:ext cx="1719072" cy="347472"/>
+          </a:xfrm>
+          <a:prstGeom prst="rect">
+            <a:avLst/>
+          </a:prstGeom>
+          <a:noFill/>
+          <a:ln/>
+        </p:spPr>
+        <p:txBody>
+          <a:bodyPr wrap="square" rtlCol="0" anchor="ctr"/>
+          <a:lstStyle/>
+          <a:p>
+            <a:pPr algn="ctr" indent="0" marL="0">
+              <a:buNone/>
+            </a:pPr>
+            <a:r>
+              <a:rPr lang="en-US" sz="1400" b="1" dirty="0">
                 <a:solidFill>
                   <a:srgbClr val="0D1F3C"/>
                 </a:solidFill>
@@ -8468,38 +8607,38 @@
                 <a:ea typeface="Cambria" pitchFamily="34" charset="-122"/>
                 <a:cs typeface="Cambria" pitchFamily="34" charset="-120"/>
               </a:rPr>
-              <a:t>Busy Readers &amp; Skimmers</a:t>
-            </a:r>
-            <a:endParaRPr lang="en-US" sz="1500" dirty="0"/>
-          </a:p>
-        </p:txBody>
-      </p:sp>
-      <p:sp>
-        <p:nvSpPr>
-          <p:cNvPr id="21" name="Text 19"/>
-          <p:cNvSpPr/>
-          <p:nvPr/>
-        </p:nvSpPr>
-        <p:spPr>
-          <a:xfrm>
-            <a:off x="6958584" y="2377440"/>
-            <a:ext cx="1828800" cy="2377440"/>
-          </a:xfrm>
-          <a:prstGeom prst="rect">
-            <a:avLst/>
-          </a:prstGeom>
-          <a:noFill/>
-          <a:ln/>
-        </p:spPr>
-        <p:txBody>
-          <a:bodyPr wrap="square" rtlCol="0" anchor="t"/>
-          <a:lstStyle/>
-          <a:p>
-            <a:pPr indent="0" marL="0">
-              <a:buNone/>
-            </a:pPr>
-            <a:r>
-              <a:rPr lang="en-US" sz="1100" dirty="0">
+              <a:t>Read Faster</a:t>
+            </a:r>
+            <a:endParaRPr lang="en-US" sz="1400" dirty="0"/>
+          </a:p>
+        </p:txBody>
+      </p:sp>
+      <p:sp>
+        <p:nvSpPr>
+          <p:cNvPr id="22" name="Text 20"/>
+          <p:cNvSpPr/>
+          <p:nvPr/>
+        </p:nvSpPr>
+        <p:spPr>
+          <a:xfrm>
+            <a:off x="7150608" y="2798064"/>
+            <a:ext cx="1719072" cy="658368"/>
+          </a:xfrm>
+          <a:prstGeom prst="rect">
+            <a:avLst/>
+          </a:prstGeom>
+          <a:noFill/>
+          <a:ln/>
+        </p:spPr>
+        <p:txBody>
+          <a:bodyPr wrap="square" rtlCol="0" anchor="ctr"/>
+          <a:lstStyle/>
+          <a:p>
+            <a:pPr algn="ctr" indent="0" marL="0">
+              <a:buNone/>
+            </a:pPr>
+            <a:r>
+              <a:rPr lang="en-US" sz="1000" dirty="0">
                 <a:solidFill>
                   <a:srgbClr val="4A5568"/>
                 </a:solidFill>
@@ -8507,9 +8646,26 @@
                 <a:ea typeface="Calibri" pitchFamily="34" charset="-122"/>
                 <a:cs typeface="Calibri" pitchFamily="34" charset="-120"/>
               </a:rPr>
-              <a:t>AI summary helps anyone quickly grasp paragraph meaning without reading every word</a:t>
-            </a:r>
-            <a:endParaRPr lang="en-US" sz="1100" dirty="0"/>
+              <a:t>Summary aids</a:t>
+            </a:r>
+            <a:endParaRPr lang="en-US" sz="1000" dirty="0"/>
+          </a:p>
+          <a:p>
+            <a:pPr algn="ctr" indent="0" marL="0">
+              <a:buNone/>
+            </a:pPr>
+            <a:r>
+              <a:rPr lang="en-US" sz="1000" dirty="0">
+                <a:solidFill>
+                  <a:srgbClr val="4A5568"/>
+                </a:solidFill>
+                <a:latin typeface="Calibri" pitchFamily="34" charset="0"/>
+                <a:ea typeface="Calibri" pitchFamily="34" charset="-122"/>
+                <a:cs typeface="Calibri" pitchFamily="34" charset="-120"/>
+              </a:rPr>
+              <a:t>comprehension</a:t>
+            </a:r>
+            <a:endParaRPr lang="en-US" sz="1000" dirty="0"/>
           </a:p>
         </p:txBody>
       </p:sp>
